--- a/presentation.pptx
+++ b/presentation.pptx
@@ -1,26 +1,26 @@
 
 <file path=ppt/presentation.xml><?xml version="1.0" encoding="utf-8"?>
-<p:presentation xmlns:a="http://schemas.openxmlformats.org/drawingml/2006/main" xmlns:r="http://schemas.openxmlformats.org/officeDocument/2006/relationships" xmlns:p="http://schemas.openxmlformats.org/presentationml/2006/main">
+<p:presentation xmlns:p="http://schemas.openxmlformats.org/presentationml/2006/main">
   <p:sldMasterIdLst>
-    <p:sldMasterId id="2147483648" r:id="rId1"/>
+    <p:sldMasterId xmlns:r="http://schemas.openxmlformats.org/officeDocument/2006/relationships" id="2147483648" r:id="R8412e1df22e640f1"/>
   </p:sldMasterIdLst>
   <p:notesMasterIdLst>
-    <p:notesMasterId r:id="rId7"/>
+    <p:notesMasterId xmlns:r="http://schemas.openxmlformats.org/officeDocument/2006/relationships" r:id="R1afe5b1b640448d2"/>
   </p:notesMasterIdLst>
   <p:sldIdLst>
-    <p:sldId id="256" r:id="rId2"/>
-    <p:sldId id="257" r:id="rId3"/>
-    <p:sldId id="259" r:id="rId4"/>
-    <p:sldId id="260" r:id="rId5"/>
-    <p:sldId id="258" r:id="rId6"/>
+    <p:sldId xmlns:r="http://schemas.openxmlformats.org/officeDocument/2006/relationships" id="256" r:id="R56f986b48e2b45fa"/>
+    <p:sldId xmlns:r="http://schemas.openxmlformats.org/officeDocument/2006/relationships" id="257" r:id="R2bd3d7d822cd4f2e"/>
+    <p:sldId xmlns:r="http://schemas.openxmlformats.org/officeDocument/2006/relationships" id="258" r:id="R63a6921759d644d2"/>
+    <p:sldId xmlns:r="http://schemas.openxmlformats.org/officeDocument/2006/relationships" id="259" r:id="Raa4a5eff26e541cc"/>
+    <p:sldId xmlns:r="http://schemas.openxmlformats.org/officeDocument/2006/relationships" id="260" r:id="R74dc2713797741b7"/>
   </p:sldIdLst>
   <p:sldSz cx="12192000" cy="6858000"/>
   <p:notesSz cx="6858000" cy="9144000"/>
   <p:defaultTextStyle>
-    <a:defPPr>
+    <a:defPPr xmlns:a="http://schemas.openxmlformats.org/drawingml/2006/main">
       <a:buNone/>
     </a:defPPr>
-    <a:lvl1pPr marL="0" algn="l" defTabSz="914400">
+    <a:lvl1pPr xmlns:a="http://schemas.openxmlformats.org/drawingml/2006/main" marL="0" algn="l" defTabSz="914400">
       <a:buNone/>
       <a:defRPr sz="1800" kern="1200">
         <a:solidFill>
@@ -31,7 +31,7 @@
         <a:cs typeface="+mn-lt"/>
       </a:defRPr>
     </a:lvl1pPr>
-    <a:lvl2pPr marL="457200" algn="l" defTabSz="914400">
+    <a:lvl2pPr xmlns:a="http://schemas.openxmlformats.org/drawingml/2006/main" marL="457200" algn="l" defTabSz="914400">
       <a:buNone/>
       <a:defRPr sz="1800" kern="1200">
         <a:solidFill>
@@ -42,7 +42,7 @@
         <a:cs typeface="+mn-lt"/>
       </a:defRPr>
     </a:lvl2pPr>
-    <a:lvl3pPr marL="914400" algn="l" defTabSz="914400">
+    <a:lvl3pPr xmlns:a="http://schemas.openxmlformats.org/drawingml/2006/main" marL="914400" algn="l" defTabSz="914400">
       <a:buNone/>
       <a:defRPr sz="1800" kern="1200">
         <a:solidFill>
@@ -53,7 +53,7 @@
         <a:cs typeface="+mn-lt"/>
       </a:defRPr>
     </a:lvl3pPr>
-    <a:lvl4pPr marL="1371600" algn="l" defTabSz="914400">
+    <a:lvl4pPr xmlns:a="http://schemas.openxmlformats.org/drawingml/2006/main" marL="1371600" algn="l" defTabSz="914400">
       <a:buNone/>
       <a:defRPr sz="1800" kern="1200">
         <a:solidFill>
@@ -64,7 +64,7 @@
         <a:cs typeface="+mn-lt"/>
       </a:defRPr>
     </a:lvl4pPr>
-    <a:lvl5pPr marL="1828800" algn="l" defTabSz="914400">
+    <a:lvl5pPr xmlns:a="http://schemas.openxmlformats.org/drawingml/2006/main" marL="1828800" algn="l" defTabSz="914400">
       <a:buNone/>
       <a:defRPr sz="1800" kern="1200">
         <a:solidFill>
@@ -75,7 +75,7 @@
         <a:cs typeface="+mn-lt"/>
       </a:defRPr>
     </a:lvl5pPr>
-    <a:lvl6pPr marL="2286000" algn="l" defTabSz="914400">
+    <a:lvl6pPr xmlns:a="http://schemas.openxmlformats.org/drawingml/2006/main" marL="2286000" algn="l" defTabSz="914400">
       <a:buNone/>
       <a:defRPr sz="1800" kern="1200">
         <a:solidFill>
@@ -86,7 +86,7 @@
         <a:cs typeface="+mn-lt"/>
       </a:defRPr>
     </a:lvl6pPr>
-    <a:lvl7pPr marL="2743200" algn="l" defTabSz="914400">
+    <a:lvl7pPr xmlns:a="http://schemas.openxmlformats.org/drawingml/2006/main" marL="2743200" algn="l" defTabSz="914400">
       <a:buNone/>
       <a:defRPr sz="1800" kern="1200">
         <a:solidFill>
@@ -97,7 +97,7 @@
         <a:cs typeface="+mn-lt"/>
       </a:defRPr>
     </a:lvl7pPr>
-    <a:lvl8pPr marL="3200400" algn="l" defTabSz="914400">
+    <a:lvl8pPr xmlns:a="http://schemas.openxmlformats.org/drawingml/2006/main" marL="3200400" algn="l" defTabSz="914400">
       <a:buNone/>
       <a:defRPr sz="1800" kern="1200">
         <a:solidFill>
@@ -108,7 +108,7 @@
         <a:cs typeface="+mn-lt"/>
       </a:defRPr>
     </a:lvl8pPr>
-    <a:lvl9pPr marL="3657600" algn="l" defTabSz="914400">
+    <a:lvl9pPr xmlns:a="http://schemas.openxmlformats.org/drawingml/2006/main" marL="3657600" algn="l" defTabSz="914400">
       <a:buNone/>
       <a:defRPr sz="1800" kern="1200">
         <a:solidFill>
@@ -120,20 +120,15 @@
       </a:defRPr>
     </a:lvl9pPr>
   </p:defaultTextStyle>
-  <p:extLst>
-    <p:ext uri="{EFAFB233-063F-42B5-8137-9DF3F51BA10A}">
-      <p15:sldGuideLst xmlns:p15="http://schemas.microsoft.com/office/powerpoint/2012/main"/>
-    </p:ext>
-  </p:extLst>
 </p:presentation>
 </file>
 
 <file path=ppt/notesMasters/notesMaster1.xml><?xml version="1.0" encoding="utf-8"?>
-<p:notesMaster xmlns:a="http://schemas.openxmlformats.org/drawingml/2006/main" xmlns:r="http://schemas.openxmlformats.org/officeDocument/2006/relationships" xmlns:p="http://schemas.openxmlformats.org/presentationml/2006/main">
+<p:notesMaster xmlns:p="http://schemas.openxmlformats.org/presentationml/2006/main">
   <p:cSld>
     <p:bg>
       <p:bgRef idx="1001">
-        <a:schemeClr val="bg1"/>
+        <a:schemeClr xmlns:a="http://schemas.openxmlformats.org/drawingml/2006/main" val="bg1"/>
       </p:bgRef>
     </p:bg>
     <p:spTree>
@@ -143,164 +138,380 @@
         <p:nvPr/>
       </p:nvGrpSpPr>
       <p:grpSpPr>
-        <a:xfrm>
-          <a:off x="0" y="0"/>
-          <a:ext cx="0" cy="0"/>
-          <a:chOff x="0" y="0"/>
-          <a:chExt cx="0" cy="0"/>
-        </a:xfrm>
+        <a:xfrm xmlns:a="http://schemas.openxmlformats.org/drawingml/2006/main"/>
       </p:grpSpPr>
       <p:sp>
         <p:nvSpPr>
           <p:cNvPr id="2" name="Header Placeholder"/>
-          <p:cNvSpPr>
-            <a:spLocks noGrp="1"/>
-          </p:cNvSpPr>
+          <p:cNvSpPr/>
           <p:nvPr>
             <p:ph type="hdr" sz="quarter"/>
           </p:nvPr>
         </p:nvSpPr>
         <p:spPr>
-          <a:prstGeom prst="rect">
+          <a:prstGeom xmlns:a="http://schemas.openxmlformats.org/drawingml/2006/main" prst="rect">
             <a:avLst/>
           </a:prstGeom>
         </p:spPr>
         <p:txBody>
-          <a:bodyPr/>
-          <a:lstStyle/>
-          <a:p>
-            <a:endParaRPr/>
-          </a:p>
+          <a:bodyPr xmlns:a="http://schemas.openxmlformats.org/drawingml/2006/main"/>
+          <a:lstStyle xmlns:a="http://schemas.openxmlformats.org/drawingml/2006/main"/>
+          <a:p xmlns:a="http://schemas.openxmlformats.org/drawingml/2006/main"/>
         </p:txBody>
       </p:sp>
       <p:sp>
         <p:nvSpPr>
           <p:cNvPr id="3" name="Date Placeholder"/>
-          <p:cNvSpPr>
-            <a:spLocks noGrp="1"/>
-          </p:cNvSpPr>
+          <p:cNvSpPr/>
           <p:nvPr>
             <p:ph type="dt" sz="quarter" idx="1"/>
           </p:nvPr>
         </p:nvSpPr>
         <p:spPr>
-          <a:prstGeom prst="rect">
+          <a:prstGeom xmlns:a="http://schemas.openxmlformats.org/drawingml/2006/main" prst="rect">
             <a:avLst/>
           </a:prstGeom>
         </p:spPr>
         <p:txBody>
-          <a:bodyPr/>
-          <a:lstStyle/>
-          <a:p>
-            <a:endParaRPr/>
-          </a:p>
+          <a:bodyPr xmlns:a="http://schemas.openxmlformats.org/drawingml/2006/main"/>
+          <a:lstStyle xmlns:a="http://schemas.openxmlformats.org/drawingml/2006/main"/>
+          <a:p xmlns:a="http://schemas.openxmlformats.org/drawingml/2006/main"/>
         </p:txBody>
       </p:sp>
       <p:sp>
         <p:nvSpPr>
           <p:cNvPr id="4" name="Slide Image Placeholder"/>
-          <p:cNvSpPr>
-            <a:spLocks noGrp="1" noRot="1" noChangeAspect="1"/>
-          </p:cNvSpPr>
+          <p:cNvSpPr/>
           <p:nvPr>
             <p:ph type="sldImg" idx="2"/>
           </p:nvPr>
         </p:nvSpPr>
         <p:spPr>
-          <a:prstGeom prst="rect">
+          <a:prstGeom xmlns:a="http://schemas.openxmlformats.org/drawingml/2006/main" prst="rect">
             <a:avLst/>
           </a:prstGeom>
         </p:spPr>
         <p:txBody>
-          <a:bodyPr/>
-          <a:lstStyle/>
-          <a:p>
-            <a:endParaRPr/>
-          </a:p>
+          <a:bodyPr xmlns:a="http://schemas.openxmlformats.org/drawingml/2006/main"/>
+          <a:lstStyle xmlns:a="http://schemas.openxmlformats.org/drawingml/2006/main"/>
+          <a:p xmlns:a="http://schemas.openxmlformats.org/drawingml/2006/main"/>
         </p:txBody>
       </p:sp>
       <p:sp>
         <p:nvSpPr>
           <p:cNvPr id="5" name="Notes Placeholder"/>
-          <p:cNvSpPr>
-            <a:spLocks noGrp="1"/>
-          </p:cNvSpPr>
+          <p:cNvSpPr/>
           <p:nvPr>
             <p:ph type="body" sz="quarter" idx="3"/>
           </p:nvPr>
         </p:nvSpPr>
         <p:spPr>
-          <a:prstGeom prst="rect">
+          <a:prstGeom xmlns:a="http://schemas.openxmlformats.org/drawingml/2006/main" prst="rect">
             <a:avLst/>
           </a:prstGeom>
         </p:spPr>
         <p:txBody>
-          <a:bodyPr/>
-          <a:lstStyle/>
-          <a:p>
-            <a:endParaRPr/>
-          </a:p>
+          <a:bodyPr xmlns:a="http://schemas.openxmlformats.org/drawingml/2006/main"/>
+          <a:lstStyle xmlns:a="http://schemas.openxmlformats.org/drawingml/2006/main"/>
+          <a:p xmlns:a="http://schemas.openxmlformats.org/drawingml/2006/main"/>
         </p:txBody>
       </p:sp>
       <p:sp>
         <p:nvSpPr>
           <p:cNvPr id="6" name="Footer Placeholder"/>
-          <p:cNvSpPr>
-            <a:spLocks noGrp="1"/>
-          </p:cNvSpPr>
+          <p:cNvSpPr/>
           <p:nvPr>
             <p:ph type="ftr" sz="quarter" idx="4"/>
           </p:nvPr>
         </p:nvSpPr>
         <p:spPr>
-          <a:prstGeom prst="rect">
+          <a:prstGeom xmlns:a="http://schemas.openxmlformats.org/drawingml/2006/main" prst="rect">
             <a:avLst/>
           </a:prstGeom>
         </p:spPr>
         <p:txBody>
-          <a:bodyPr/>
-          <a:lstStyle/>
-          <a:p>
-            <a:endParaRPr/>
-          </a:p>
+          <a:bodyPr xmlns:a="http://schemas.openxmlformats.org/drawingml/2006/main"/>
+          <a:lstStyle xmlns:a="http://schemas.openxmlformats.org/drawingml/2006/main"/>
+          <a:p xmlns:a="http://schemas.openxmlformats.org/drawingml/2006/main"/>
         </p:txBody>
       </p:sp>
       <p:sp>
         <p:nvSpPr>
           <p:cNvPr id="7" name="Slide Number Placeholder"/>
-          <p:cNvSpPr>
-            <a:spLocks noGrp="1"/>
-          </p:cNvSpPr>
+          <p:cNvSpPr/>
           <p:nvPr>
             <p:ph type="sldNum" sz="quarter" idx="5"/>
           </p:nvPr>
         </p:nvSpPr>
         <p:spPr>
-          <a:prstGeom prst="rect">
+          <a:prstGeom xmlns:a="http://schemas.openxmlformats.org/drawingml/2006/main" prst="rect">
             <a:avLst/>
           </a:prstGeom>
         </p:spPr>
         <p:txBody>
-          <a:bodyPr/>
-          <a:lstStyle/>
-          <a:p>
-            <a:endParaRPr/>
-          </a:p>
+          <a:bodyPr xmlns:a="http://schemas.openxmlformats.org/drawingml/2006/main"/>
+          <a:lstStyle xmlns:a="http://schemas.openxmlformats.org/drawingml/2006/main"/>
+          <a:p xmlns:a="http://schemas.openxmlformats.org/drawingml/2006/main"/>
         </p:txBody>
       </p:sp>
     </p:spTree>
   </p:cSld>
   <p:clrMap bg1="lt1" tx1="dk1" bg2="lt2" tx2="dk2" accent1="accent1" accent2="accent2" accent3="accent3" accent4="accent4" accent5="accent5" accent6="accent6" hlink="hlink" folHlink="folHlink"/>
   <p:notesStyle>
-    <a:lvl1pPr marL="0" algn="l" defTabSz="914400" rtl="0" eaLnBrk="1" latinLnBrk="0" hangingPunct="1">
+    <a:lvl1pPr xmlns:a="http://schemas.openxmlformats.org/drawingml/2006/main" marL="0" algn="l" defTabSz="914400" rtl="0" eaLnBrk="1" latinLnBrk="0" hangingPunct="1">
       <a:defRPr sz="1200" kern="1200"/>
     </a:lvl1pPr>
   </p:notesStyle>
 </p:notesMaster>
 </file>
 
+<file path=ppt/notesMasters/theme/theme3.xml><?xml version="1.0" encoding="utf-8"?>
+<a:theme xmlns:a="http://schemas.openxmlformats.org/drawingml/2006/main" name="ChatGPT">
+  <a:themeElements>
+    <a:clrScheme name="ChatGPT">
+      <a:dk1>
+        <a:srgbClr val="000000"/>
+      </a:dk1>
+      <a:lt1>
+        <a:srgbClr val="FFFFFF"/>
+      </a:lt1>
+      <a:dk2>
+        <a:srgbClr val="0E2841"/>
+      </a:dk2>
+      <a:lt2>
+        <a:srgbClr val="E8E8E8"/>
+      </a:lt2>
+      <a:accent1>
+        <a:srgbClr val="156082"/>
+      </a:accent1>
+      <a:accent2>
+        <a:srgbClr val="E97132"/>
+      </a:accent2>
+      <a:accent3>
+        <a:srgbClr val="196B24"/>
+      </a:accent3>
+      <a:accent4>
+        <a:srgbClr val="0F9ED5"/>
+      </a:accent4>
+      <a:accent5>
+        <a:srgbClr val="A02B93"/>
+      </a:accent5>
+      <a:accent6>
+        <a:srgbClr val="4EA72E"/>
+      </a:accent6>
+      <a:hlink>
+        <a:srgbClr val="467886"/>
+      </a:hlink>
+      <a:folHlink>
+        <a:srgbClr val="96607D"/>
+      </a:folHlink>
+    </a:clrScheme>
+    <a:fontScheme name="">
+      <a:majorFont>
+        <a:latin typeface="Aptos"/>
+        <a:ea typeface=""/>
+        <a:cs typeface=""/>
+      </a:majorFont>
+      <a:minorFont>
+        <a:latin typeface="Aptos"/>
+        <a:ea typeface=""/>
+        <a:cs typeface=""/>
+      </a:minorFont>
+    </a:fontScheme>
+    <a:fmtScheme name="ChatGPT">
+      <a:fillStyleLst>
+        <a:solidFill>
+          <a:schemeClr val="phClr"/>
+        </a:solidFill>
+        <a:gradFill>
+          <a:gsLst>
+            <a:gs pos="0">
+              <a:schemeClr val="phClr">
+                <a:tint val="67000"/>
+                <a:lumMod val="110000"/>
+                <a:satMod val="105000"/>
+              </a:schemeClr>
+            </a:gs>
+            <a:gs pos="50000">
+              <a:schemeClr val="phClr">
+                <a:tint val="73000"/>
+                <a:lumMod val="105000"/>
+                <a:satMod val="103000"/>
+              </a:schemeClr>
+            </a:gs>
+            <a:gs pos="100000">
+              <a:schemeClr val="phClr">
+                <a:tint val="81000"/>
+                <a:lumMod val="105000"/>
+                <a:satMod val="109000"/>
+              </a:schemeClr>
+            </a:gs>
+          </a:gsLst>
+          <a:lin ang="5400000" scaled="0"/>
+        </a:gradFill>
+        <a:gradFill>
+          <a:gsLst>
+            <a:gs pos="0">
+              <a:schemeClr val="phClr">
+                <a:tint val="94000"/>
+                <a:lumMod val="102000"/>
+                <a:satMod val="103000"/>
+              </a:schemeClr>
+            </a:gs>
+            <a:gs pos="50000">
+              <a:schemeClr val="phClr">
+                <a:shade val="100000"/>
+                <a:lumMod val="100000"/>
+                <a:satMod val="110000"/>
+              </a:schemeClr>
+            </a:gs>
+            <a:gs pos="100000">
+              <a:schemeClr val="phClr">
+                <a:shade val="78000"/>
+                <a:lumMod val="99000"/>
+                <a:satMod val="120000"/>
+              </a:schemeClr>
+            </a:gs>
+          </a:gsLst>
+          <a:lin ang="5400000" scaled="0"/>
+        </a:gradFill>
+      </a:fillStyleLst>
+      <a:lnStyleLst>
+        <a:ln w="12700">
+          <a:solidFill>
+            <a:schemeClr val="phClr"/>
+          </a:solidFill>
+          <a:prstDash val="solid"/>
+        </a:ln>
+        <a:ln w="19050">
+          <a:solidFill>
+            <a:schemeClr val="phClr"/>
+          </a:solidFill>
+          <a:prstDash val="solid"/>
+        </a:ln>
+        <a:ln w="25400">
+          <a:solidFill>
+            <a:schemeClr val="phClr"/>
+          </a:solidFill>
+          <a:prstDash val="solid"/>
+        </a:ln>
+      </a:lnStyleLst>
+      <a:effectStyleLst>
+        <a:effectStyle>
+          <a:effectLst/>
+        </a:effectStyle>
+        <a:effectStyle>
+          <a:effectLst/>
+        </a:effectStyle>
+        <a:effectStyle>
+          <a:effectLst>
+            <a:outerShdw blurRad="57150" dist="19050" dir="5400000">
+              <a:srgbClr val="000000">
+                <a:alpha val="16000"/>
+              </a:srgbClr>
+            </a:outerShdw>
+          </a:effectLst>
+        </a:effectStyle>
+        <a:effectStyle>
+          <a:effectLst>
+            <a:outerShdw blurRad="19050" dist="9525" dir="5400000">
+              <a:srgbClr val="000000">
+                <a:alpha val="6000"/>
+              </a:srgbClr>
+            </a:outerShdw>
+          </a:effectLst>
+        </a:effectStyle>
+        <a:effectStyle>
+          <a:effectLst>
+            <a:outerShdw blurRad="28575" dist="9525" dir="5400000">
+              <a:srgbClr val="000000">
+                <a:alpha val="8000"/>
+              </a:srgbClr>
+            </a:outerShdw>
+          </a:effectLst>
+        </a:effectStyle>
+        <a:effectStyle>
+          <a:effectLst>
+            <a:outerShdw blurRad="57150" dist="19050" dir="5400000">
+              <a:srgbClr val="000000">
+                <a:alpha val="10000"/>
+              </a:srgbClr>
+            </a:outerShdw>
+          </a:effectLst>
+        </a:effectStyle>
+        <a:effectStyle>
+          <a:effectLst>
+            <a:outerShdw blurRad="114300" dist="38100" dir="5400000">
+              <a:srgbClr val="000000">
+                <a:alpha val="12000"/>
+              </a:srgbClr>
+            </a:outerShdw>
+          </a:effectLst>
+        </a:effectStyle>
+        <a:effectStyle>
+          <a:effectLst>
+            <a:outerShdw blurRad="171450" dist="57150" dir="5400000">
+              <a:srgbClr val="000000">
+                <a:alpha val="16000"/>
+              </a:srgbClr>
+            </a:outerShdw>
+          </a:effectLst>
+        </a:effectStyle>
+        <a:effectStyle>
+          <a:effectLst>
+            <a:outerShdw blurRad="266700" dist="95250" dir="5400000">
+              <a:srgbClr val="000000">
+                <a:alpha val="24000"/>
+              </a:srgbClr>
+            </a:outerShdw>
+          </a:effectLst>
+        </a:effectStyle>
+      </a:effectStyleLst>
+      <a:bgFillStyleLst>
+        <a:solidFill>
+          <a:schemeClr val="phClr"/>
+        </a:solidFill>
+        <a:solidFill>
+          <a:schemeClr val="phClr">
+            <a:tint val="95000"/>
+            <a:satMod val="170000"/>
+          </a:schemeClr>
+        </a:solidFill>
+        <a:gradFill>
+          <a:gsLst>
+            <a:gs pos="0">
+              <a:schemeClr val="phClr">
+                <a:tint val="93000"/>
+                <a:shade val="98000"/>
+                <a:lumMod val="102000"/>
+                <a:satMod val="150000"/>
+              </a:schemeClr>
+            </a:gs>
+            <a:gs pos="50000">
+              <a:schemeClr val="phClr">
+                <a:tint val="98000"/>
+                <a:shade val="90000"/>
+                <a:lumMod val="103000"/>
+                <a:satMod val="130000"/>
+              </a:schemeClr>
+            </a:gs>
+            <a:gs pos="100000">
+              <a:schemeClr val="phClr">
+                <a:shade val="63000"/>
+                <a:satMod val="120000"/>
+              </a:schemeClr>
+            </a:gs>
+          </a:gsLst>
+          <a:lin ang="5400000" scaled="0"/>
+        </a:gradFill>
+      </a:bgFillStyleLst>
+    </a:fmtScheme>
+  </a:themeElements>
+</a:theme>
+</file>
+
 <file path=ppt/notesSlides/notesSlide1.xml><?xml version="1.0" encoding="utf-8"?>
-<p:notes xmlns:a="http://schemas.openxmlformats.org/drawingml/2006/main" xmlns:r="http://schemas.openxmlformats.org/officeDocument/2006/relationships" xmlns:p="http://schemas.openxmlformats.org/presentationml/2006/main">
+<p:notes xmlns:p="http://schemas.openxmlformats.org/presentationml/2006/main">
   <p:cSld>
     <p:spTree>
       <p:nvGrpSpPr>
@@ -309,21 +520,16 @@
         <p:nvPr/>
       </p:nvGrpSpPr>
       <p:grpSpPr>
-        <a:xfrm>
-          <a:off x="0" y="0"/>
-          <a:ext cx="0" cy="0"/>
-          <a:chOff x="0" y="0"/>
-          <a:chExt cx="0" cy="0"/>
-        </a:xfrm>
+        <a:xfrm xmlns:a="http://schemas.openxmlformats.org/drawingml/2006/main"/>
       </p:grpSpPr>
       <p:sp>
         <p:nvSpPr>
           <p:cNvPr id="2" name="Slide Image Placeholder 1"/>
           <p:cNvSpPr>
-            <a:spLocks noGrp="1" noRot="1" noChangeAspect="1"/>
+            <a:spLocks xmlns:a="http://schemas.openxmlformats.org/drawingml/2006/main" noGrp="1"/>
           </p:cNvSpPr>
           <p:nvPr>
-            <p:ph type="sldImg"/>
+            <p:ph type="sldImg" idx="0"/>
           </p:nvPr>
         </p:nvSpPr>
         <p:spPr/>
@@ -332,7 +538,7 @@
         <p:nvSpPr>
           <p:cNvPr id="3" name="Notes Placeholder 2"/>
           <p:cNvSpPr>
-            <a:spLocks noGrp="1"/>
+            <a:spLocks xmlns:a="http://schemas.openxmlformats.org/drawingml/2006/main" noGrp="1"/>
           </p:cNvSpPr>
           <p:nvPr>
             <p:ph type="body" idx="1"/>
@@ -340,45 +546,38 @@
         </p:nvSpPr>
         <p:spPr/>
         <p:txBody>
-          <a:bodyPr/>
-          <a:lstStyle/>
-          <a:p>
-            <a:r>
-              <a:t>0:25–1:00, eigentlicher Produktpitch.</a:t>
+          <a:bodyPr xmlns:a="http://schemas.openxmlformats.org/drawingml/2006/main"/>
+          <a:lstStyle xmlns:a="http://schemas.openxmlformats.org/drawingml/2006/main"/>
+          <a:p xmlns:a="http://schemas.openxmlformats.org/drawingml/2006/main">
+            <a:r>
+              <a:t>Die erste Zahl ist der Gegenwert zu den 47,4 %, die sich im National Literacy Trust Annual Literacy Survey 2025 beim Präsentieren als gut oder sehr gut einschätzten. Befragt wurden 105.583 Kinder und Jugendliche im Alter von 8–18 Jahren. Die Aussage gilt für diese Befragten.</a:t>
             </a:r>
           </a:p>
-          <a:p>
+          <a:p xmlns:a="http://schemas.openxmlformats.org/drawingml/2006/main">
+            <a:r>
+              <a:t>Quelle: https://literacytrust.org.uk/research-services/research-reports/children-and-young-peoples-speaking-and-listening-in-2025/</a:t>
+            </a:r>
             <a:endParaRPr/>
           </a:p>
-          <a:p>
-            <a:r>
-              <a:t>Genau dafür bauen wir Pitch Practice. Ihr nehmt euren Vortrag mit Kamera und Mikrofon auf. Unser Prototyp beobachtet sichtbare Haltung und Gesten und analysiert Sprechmerkmale wie Pausen, Tempo und Lautstärke. Danach zeigt er Hinweise an konkreten Stellen im Video. Mit hochgeladenen Unterlagen lassen sich Aussagen gegen Quellen vergleichen. Anschließend stellt ein Fragebot Rückfragen zum Vortrag. So wird aus einer Aufnahme ein konkreter nächster Übungsschritt.</a:t>
+          <a:p xmlns:a="http://schemas.openxmlformats.org/drawingml/2006/main">
+            <a:r>
+              <a:t/>
             </a:r>
           </a:p>
-          <a:p>
+          <a:p xmlns:a="http://schemas.openxmlformats.org/drawingml/2006/main">
+            <a:r>
+              <a:t>89,3 % von 1.135 befragten Studierenden wünschten sich Lehrangebote zur Verbesserung des öffentlichen Sprechens. Diese Zahl bezieht sich auf Studierende, nicht auf Schulkinder.</a:t>
+            </a:r>
             <a:endParaRPr/>
           </a:p>
-          <a:p>
-            <a:r>
-              <a:t>Bei 1:00 Aufnahme stoppen und in die App wechseln. Bis 1:15 eine Auswertung öffnen. Falls der aktuelle Take noch verarbeitet wird: ausdrücklich als vorab aufgenommen bezeichneten Durchlauf zeigen.</a:t>
+          <a:p xmlns:a="http://schemas.openxmlformats.org/drawingml/2006/main">
+            <a:r>
+              <a:t>Quelle: Marinho et al., Fear of Public Speaking: Perception of College Students and Correlates (2017), https://pubmed.ncbi.nlm.nih.gov/26898522/ , DOI: 10.1016/j.jvoice.2015.12.012.</a:t>
             </a:r>
           </a:p>
-          <a:p>
-            <a:r>
-              <a:t>1:15–1:55: einen markierten Moment anklicken und kurz wiedergeben.</a:t>
-            </a:r>
-          </a:p>
-          <a:p>
-            <a:r>
-              <a:t>1:55–2:35: Practice questions öffnen, eine Botfrage anhören und kurz beantworten. Danach Gespräch beenden.</a:t>
-            </a:r>
-          </a:p>
-          <a:p>
-            <a:endParaRPr/>
-          </a:p>
-          <a:p>
-            <a:r>
-              <a:t>Quellen: frontend/src/components/live/LiveReview.tsx, backend/app/factcheck/pipeline.py, backend/app/questions/agent.py, Stand de15410. Quellenzitatprüfung ist keine Garantie für ein korrektes Modellurteil. Der direkte ElevenLabs-Dialog besitzt nicht denselben Zitatverifier wie getippte Antworten.</a:t>
+          <a:p xmlns:a="http://schemas.openxmlformats.org/drawingml/2006/main">
+            <a:r>
+              <a:t>Die möglichen Folgen sind unsere Einordnung, keine durch diese Umfragen belegte Kausalwirkung.</a:t>
             </a:r>
           </a:p>
         </p:txBody>
@@ -387,7 +586,7 @@
         <p:nvSpPr>
           <p:cNvPr id="4" name="Slide Number Placeholder 3"/>
           <p:cNvSpPr>
-            <a:spLocks noGrp="1"/>
+            <a:spLocks xmlns:a="http://schemas.openxmlformats.org/drawingml/2006/main" noGrp="1"/>
           </p:cNvSpPr>
           <p:nvPr>
             <p:ph type="sldNum" idx="5"/>
@@ -395,23 +594,21 @@
         </p:nvSpPr>
         <p:spPr/>
         <p:txBody>
-          <a:bodyPr/>
-          <a:lstStyle/>
-          <a:p>
-            <a:endParaRPr/>
-          </a:p>
+          <a:bodyPr xmlns:a="http://schemas.openxmlformats.org/drawingml/2006/main"/>
+          <a:lstStyle xmlns:a="http://schemas.openxmlformats.org/drawingml/2006/main"/>
+          <a:p xmlns:a="http://schemas.openxmlformats.org/drawingml/2006/main"/>
         </p:txBody>
       </p:sp>
     </p:spTree>
   </p:cSld>
   <p:clrMapOvr>
-    <a:masterClrMapping/>
+    <a:masterClrMapping xmlns:a="http://schemas.openxmlformats.org/drawingml/2006/main"/>
   </p:clrMapOvr>
 </p:notes>
 </file>
 
 <file path=ppt/notesSlides/notesSlide2.xml><?xml version="1.0" encoding="utf-8"?>
-<p:notes xmlns:a="http://schemas.openxmlformats.org/drawingml/2006/main" xmlns:r="http://schemas.openxmlformats.org/officeDocument/2006/relationships" xmlns:p="http://schemas.openxmlformats.org/presentationml/2006/main">
+<p:notes xmlns:p="http://schemas.openxmlformats.org/presentationml/2006/main">
   <p:cSld>
     <p:spTree>
       <p:nvGrpSpPr>
@@ -420,21 +617,16 @@
         <p:nvPr/>
       </p:nvGrpSpPr>
       <p:grpSpPr>
-        <a:xfrm>
-          <a:off x="0" y="0"/>
-          <a:ext cx="0" cy="0"/>
-          <a:chOff x="0" y="0"/>
-          <a:chExt cx="0" cy="0"/>
-        </a:xfrm>
+        <a:xfrm xmlns:a="http://schemas.openxmlformats.org/drawingml/2006/main"/>
       </p:grpSpPr>
       <p:sp>
         <p:nvSpPr>
           <p:cNvPr id="2" name="Slide Image Placeholder 1"/>
           <p:cNvSpPr>
-            <a:spLocks noGrp="1" noRot="1" noChangeAspect="1"/>
+            <a:spLocks xmlns:a="http://schemas.openxmlformats.org/drawingml/2006/main" noGrp="1"/>
           </p:cNvSpPr>
           <p:nvPr>
-            <p:ph type="sldImg"/>
+            <p:ph type="sldImg" idx="0"/>
           </p:nvPr>
         </p:nvSpPr>
         <p:spPr/>
@@ -443,7 +635,7 @@
         <p:nvSpPr>
           <p:cNvPr id="3" name="Notes Placeholder 2"/>
           <p:cNvSpPr>
-            <a:spLocks noGrp="1"/>
+            <a:spLocks xmlns:a="http://schemas.openxmlformats.org/drawingml/2006/main" noGrp="1"/>
           </p:cNvSpPr>
           <p:nvPr>
             <p:ph type="body" idx="1"/>
@@ -451,17 +643,17 @@
         </p:nvSpPr>
         <p:spPr/>
         <p:txBody>
-          <a:bodyPr/>
-          <a:lstStyle/>
-          <a:p>
+          <a:bodyPr xmlns:a="http://schemas.openxmlformats.org/drawingml/2006/main"/>
+          <a:lstStyle xmlns:a="http://schemas.openxmlformats.org/drawingml/2006/main"/>
+          <a:p xmlns:a="http://schemas.openxmlformats.org/drawingml/2006/main">
             <a:r>
               <a:t>0:00–0:35. Viele üben ihre Folien, bekommen aber wenig konkretes Feedback zum Vortrag. Pitch Practice verbindet fünf Funktionen: Wir beobachten sichtbare Haltung und Gesten, analysieren Sprache und vergleichen Aussagen mit hochgeladenen Unterlagen. In der Auswertung führt jeder Hinweis zur passenden Stelle im Video. Danach stellt ein Fragebot Rückfragen zum Vortrag. So wird sichtbar, was ich beim nächsten Versuch gezielt üben kann.</a:t>
             </a:r>
           </a:p>
-          <a:p>
+          <a:p xmlns:a="http://schemas.openxmlformats.org/drawingml/2006/main">
             <a:endParaRPr/>
           </a:p>
-          <a:p>
+          <a:p xmlns:a="http://schemas.openxmlformats.org/drawingml/2006/main">
             <a:r>
               <a:t>Aufnahme ab dem Anfang laufen lassen. Die Abbildung ist eine echte Ansicht der vorhandenen synthetischen Demo, kein Ergebnis des aktuellen Vortrags. Quellen: frontend/src/components/live/LiveReview.tsx, backend/app/factcheck/pipeline.py, backend/app/questions/agent.py, Stand de15410. Kameraheuristiken sind unvalidiert. Sprache umfasst Transkript, Pausen, Tempo, Füllwörter, Lautstärke und Tonhöhenvariation. Kopforientierung ist kein gemessener Blickkontakt.</a:t>
             </a:r>
@@ -472,7 +664,7 @@
         <p:nvSpPr>
           <p:cNvPr id="4" name="Slide Number Placeholder 3"/>
           <p:cNvSpPr>
-            <a:spLocks noGrp="1"/>
+            <a:spLocks xmlns:a="http://schemas.openxmlformats.org/drawingml/2006/main" noGrp="1"/>
           </p:cNvSpPr>
           <p:nvPr>
             <p:ph type="sldNum" idx="5"/>
@@ -480,23 +672,21 @@
         </p:nvSpPr>
         <p:spPr/>
         <p:txBody>
-          <a:bodyPr/>
-          <a:lstStyle/>
-          <a:p>
-            <a:endParaRPr/>
-          </a:p>
+          <a:bodyPr xmlns:a="http://schemas.openxmlformats.org/drawingml/2006/main"/>
+          <a:lstStyle xmlns:a="http://schemas.openxmlformats.org/drawingml/2006/main"/>
+          <a:p xmlns:a="http://schemas.openxmlformats.org/drawingml/2006/main"/>
         </p:txBody>
       </p:sp>
     </p:spTree>
   </p:cSld>
   <p:clrMapOvr>
-    <a:masterClrMapping/>
+    <a:masterClrMapping xmlns:a="http://schemas.openxmlformats.org/drawingml/2006/main"/>
   </p:clrMapOvr>
 </p:notes>
 </file>
 
 <file path=ppt/notesSlides/notesSlide3.xml><?xml version="1.0" encoding="utf-8"?>
-<p:notes xmlns:a="http://schemas.openxmlformats.org/drawingml/2006/main" xmlns:r="http://schemas.openxmlformats.org/officeDocument/2006/relationships" xmlns:p="http://schemas.openxmlformats.org/presentationml/2006/main">
+<p:notes xmlns:p="http://schemas.openxmlformats.org/presentationml/2006/main">
   <p:cSld>
     <p:spTree>
       <p:nvGrpSpPr>
@@ -505,21 +695,16 @@
         <p:nvPr/>
       </p:nvGrpSpPr>
       <p:grpSpPr>
-        <a:xfrm>
-          <a:off x="0" y="0"/>
-          <a:ext cx="0" cy="0"/>
-          <a:chOff x="0" y="0"/>
-          <a:chExt cx="0" cy="0"/>
-        </a:xfrm>
+        <a:xfrm xmlns:a="http://schemas.openxmlformats.org/drawingml/2006/main"/>
       </p:grpSpPr>
       <p:sp>
         <p:nvSpPr>
           <p:cNvPr id="2" name="Slide Image Placeholder 1"/>
           <p:cNvSpPr>
-            <a:spLocks noGrp="1" noRot="1" noChangeAspect="1"/>
+            <a:spLocks xmlns:a="http://schemas.openxmlformats.org/drawingml/2006/main" noGrp="1"/>
           </p:cNvSpPr>
           <p:nvPr>
-            <p:ph type="sldImg"/>
+            <p:ph type="sldImg" idx="0"/>
           </p:nvPr>
         </p:nvSpPr>
         <p:spPr/>
@@ -528,7 +713,7 @@
         <p:nvSpPr>
           <p:cNvPr id="3" name="Notes Placeholder 2"/>
           <p:cNvSpPr>
-            <a:spLocks noGrp="1"/>
+            <a:spLocks xmlns:a="http://schemas.openxmlformats.org/drawingml/2006/main" noGrp="1"/>
           </p:cNvSpPr>
           <p:nvPr>
             <p:ph type="body" idx="1"/>
@@ -536,19 +721,32 @@
         </p:nvSpPr>
         <p:spPr/>
         <p:txBody>
-          <a:bodyPr/>
-          <a:lstStyle/>
-          <a:p>
+          <a:bodyPr xmlns:a="http://schemas.openxmlformats.org/drawingml/2006/main"/>
+          <a:lstStyle xmlns:a="http://schemas.openxmlformats.org/drawingml/2006/main"/>
+          <a:p xmlns:a="http://schemas.openxmlformats.org/drawingml/2006/main">
             <a:r>
               <a:t>0:35–1:05. Im Produkt hilft KI bei Körperpunkten, Transkription, Quellenvergleich und Rückfragen. Den Sprachdialog ermöglicht ElevenLabs. Beim Entwickeln nutzten wir Codex und Claude Code für Architektur, Code, Recherche und Fehlersuche. Das Team legte Ziele fest und korrigierte Vorschläge. Ein konkretes Beispiel: Ein vorgeschlagener Docker-Tag war nicht verfügbar und wurde nach Prüfung korrigiert. Unsere wichtigste Grenze: Auch ein gültiges Zitat garantiert noch kein richtiges KI-Urteil.</a:t>
             </a:r>
           </a:p>
-          <a:p>
+          <a:p xmlns:a="http://schemas.openxmlformats.org/drawingml/2006/main">
+            <a:r>
+              <a:t/>
+            </a:r>
             <a:endParaRPr/>
           </a:p>
-          <a:p>
+          <a:p xmlns:a="http://schemas.openxmlformats.org/drawingml/2006/main">
             <a:r>
               <a:t>Quellen: docs/02-ai-decision-log.md, Einträge zu Compose, Sprachanalyse, RAG, Codex und Claude Code. Der Log nennt die Korrektur des SeaweedFS-Tags 4.49 auf das verfügbare 4.48. Provider werden anhand des vorhandenen Codes genannt. Signalmerkmale wie RMS/YIN sind zusätzlich regelbasierte Verfahren und werden nicht pauschal als lernende KI ausgegeben. Bei ElevenLabs wird kein bestimmtes Dialogmodell behauptet. Die getippte Quellenprüfung und der direkte Sprachdialog besitzen unterschiedliche Verifikationsgrenzen.</a:t>
+            </a:r>
+          </a:p>
+          <a:p xmlns:a="http://schemas.openxmlformats.org/drawingml/2006/main">
+            <a:r>
+              <a:t/>
+            </a:r>
+          </a:p>
+          <a:p xmlns:a="http://schemas.openxmlformats.org/drawingml/2006/main">
+            <a:r>
+              <a:t>Aktuelle Präzisierung: faster-whisper ist die lokale Standard-Transkription. Deepgram EU ist optional. Jina Embeddings laufen lokal und unterstützen die Quellensuche. Gemini übernimmt Quellenurteile und den separaten Text-Fragenpfad. Der gesprochene Dialog läuft über ElevenLabs. Silero VAD erkennt zusätzlich Sprachaktivität. Nachweise: backend/app/transcription/transcriber.py, backend/app/sources/embeddings.py, backend/app/questions/agent.py, docs/02-ai-decision-log.md und compose.yaml.</a:t>
             </a:r>
           </a:p>
         </p:txBody>
@@ -557,7 +755,7 @@
         <p:nvSpPr>
           <p:cNvPr id="4" name="Slide Number Placeholder 3"/>
           <p:cNvSpPr>
-            <a:spLocks noGrp="1"/>
+            <a:spLocks xmlns:a="http://schemas.openxmlformats.org/drawingml/2006/main" noGrp="1"/>
           </p:cNvSpPr>
           <p:nvPr>
             <p:ph type="sldNum" idx="5"/>
@@ -565,23 +763,21 @@
         </p:nvSpPr>
         <p:spPr/>
         <p:txBody>
-          <a:bodyPr/>
-          <a:lstStyle/>
-          <a:p>
-            <a:endParaRPr/>
-          </a:p>
+          <a:bodyPr xmlns:a="http://schemas.openxmlformats.org/drawingml/2006/main"/>
+          <a:lstStyle xmlns:a="http://schemas.openxmlformats.org/drawingml/2006/main"/>
+          <a:p xmlns:a="http://schemas.openxmlformats.org/drawingml/2006/main"/>
         </p:txBody>
       </p:sp>
     </p:spTree>
   </p:cSld>
   <p:clrMapOvr>
-    <a:masterClrMapping/>
+    <a:masterClrMapping xmlns:a="http://schemas.openxmlformats.org/drawingml/2006/main"/>
   </p:clrMapOvr>
 </p:notes>
 </file>
 
 <file path=ppt/notesSlides/notesSlide4.xml><?xml version="1.0" encoding="utf-8"?>
-<p:notes xmlns:a="http://schemas.openxmlformats.org/drawingml/2006/main" xmlns:r="http://schemas.openxmlformats.org/officeDocument/2006/relationships" xmlns:p="http://schemas.openxmlformats.org/presentationml/2006/main">
+<p:notes xmlns:p="http://schemas.openxmlformats.org/presentationml/2006/main">
   <p:cSld>
     <p:spTree>
       <p:nvGrpSpPr>
@@ -590,21 +786,16 @@
         <p:nvPr/>
       </p:nvGrpSpPr>
       <p:grpSpPr>
-        <a:xfrm>
-          <a:off x="0" y="0"/>
-          <a:ext cx="0" cy="0"/>
-          <a:chOff x="0" y="0"/>
-          <a:chExt cx="0" cy="0"/>
-        </a:xfrm>
+        <a:xfrm xmlns:a="http://schemas.openxmlformats.org/drawingml/2006/main"/>
       </p:grpSpPr>
       <p:sp>
         <p:nvSpPr>
           <p:cNvPr id="2" name="Slide Image Placeholder 1"/>
           <p:cNvSpPr>
-            <a:spLocks noGrp="1" noRot="1" noChangeAspect="1"/>
+            <a:spLocks xmlns:a="http://schemas.openxmlformats.org/drawingml/2006/main" noGrp="1"/>
           </p:cNvSpPr>
           <p:nvPr>
-            <p:ph type="sldImg"/>
+            <p:ph type="sldImg" idx="0"/>
           </p:nvPr>
         </p:nvSpPr>
         <p:spPr/>
@@ -613,7 +804,7 @@
         <p:nvSpPr>
           <p:cNvPr id="3" name="Notes Placeholder 2"/>
           <p:cNvSpPr>
-            <a:spLocks noGrp="1"/>
+            <a:spLocks xmlns:a="http://schemas.openxmlformats.org/drawingml/2006/main" noGrp="1"/>
           </p:cNvSpPr>
           <p:nvPr>
             <p:ph type="body" idx="1"/>
@@ -621,27 +812,33 @@
         </p:nvSpPr>
         <p:spPr/>
         <p:txBody>
-          <a:bodyPr/>
-          <a:lstStyle/>
-          <a:p>
+          <a:bodyPr xmlns:a="http://schemas.openxmlformats.org/drawingml/2006/main"/>
+          <a:lstStyle xmlns:a="http://schemas.openxmlformats.org/drawingml/2006/main"/>
+          <a:p xmlns:a="http://schemas.openxmlformats.org/drawingml/2006/main">
             <a:r>
               <a:t>1:05–1:10. Jetzt zeigen wir das an unserem eigenen Pitch: erst die Auswertung, dann eine Rückfrage des Bots.</a:t>
             </a:r>
           </a:p>
-          <a:p>
+          <a:p xmlns:a="http://schemas.openxmlformats.org/drawingml/2006/main">
+            <a:r>
+              <a:t/>
+            </a:r>
             <a:endParaRPr/>
           </a:p>
-          <a:p>
+          <a:p xmlns:a="http://schemas.openxmlformats.org/drawingml/2006/main">
             <a:r>
               <a:t>Aufnahme stoppen und zur App wechseln. Bis 1:50 einen echten Review-Moment auswählen, drei bis fünf Sekunden wiedergeben und den tatsächlich sichtbaren Hinweis erklären. Bis 2:35 eine Botfrage und eine kurze Antwort zeigen. Spätestens dann Gespräch beenden. Abschluss bis 2:45: Pitch Practice macht konkrete Stellen im Vortrag nachvollziehbar und hilft, die nächste Übung vorzubereiten. Vielen Dank. 15 Sekunden Reserve.</a:t>
             </a:r>
           </a:p>
-          <a:p>
+          <a:p xmlns:a="http://schemas.openxmlformats.org/drawingml/2006/main">
+            <a:r>
+              <a:t/>
+            </a:r>
             <a:endParaRPr/>
           </a:p>
-          <a:p>
-            <a:r>
-              <a:t>Verarbeitungszeit ist nicht garantiert. Falls die neue Aufnahme nicht rechtzeitig bereit ist, eine vorbereitete Session zeigen und ausdrücklich als vorab aufgenommen bezeichnen. Kein vorberechnetes Ergebnis als aktuelle Analyse ausgeben. Die Szene auf dieser Folie ist eine KI-generierte Illustration, keine echte Projektaufnahme. Erstellt mit dem eingebauten Bildgenerator. Bild und Prompt: assets-v2/BILDQUELLEN.md. Quellen zum Ablauf: vorhandene Review- und Fragenoberfläche auf de15410.</a:t>
+          <a:p xmlns:a="http://schemas.openxmlformats.org/drawingml/2006/main">
+            <a:r>
+              <a:t>Verarbeitungszeit ist nicht garantiert. Falls die neue Aufnahme nicht rechtzeitig bereit ist, eine vorbereitete Session zeigen und ausdrücklich als vorab aufgenommen bezeichnen. Kein vorberechnetes Ergebnis als aktuelle Analyse ausgeben. Quellen zum Ablauf: vorhandene Review- und Fragenoberfläche auf de15410.</a:t>
             </a:r>
           </a:p>
         </p:txBody>
@@ -650,7 +847,7 @@
         <p:nvSpPr>
           <p:cNvPr id="4" name="Slide Number Placeholder 3"/>
           <p:cNvSpPr>
-            <a:spLocks noGrp="1"/>
+            <a:spLocks xmlns:a="http://schemas.openxmlformats.org/drawingml/2006/main" noGrp="1"/>
           </p:cNvSpPr>
           <p:nvPr>
             <p:ph type="sldNum" idx="5"/>
@@ -658,23 +855,21 @@
         </p:nvSpPr>
         <p:spPr/>
         <p:txBody>
-          <a:bodyPr/>
-          <a:lstStyle/>
-          <a:p>
-            <a:endParaRPr/>
-          </a:p>
+          <a:bodyPr xmlns:a="http://schemas.openxmlformats.org/drawingml/2006/main"/>
+          <a:lstStyle xmlns:a="http://schemas.openxmlformats.org/drawingml/2006/main"/>
+          <a:p xmlns:a="http://schemas.openxmlformats.org/drawingml/2006/main"/>
         </p:txBody>
       </p:sp>
     </p:spTree>
   </p:cSld>
   <p:clrMapOvr>
-    <a:masterClrMapping/>
+    <a:masterClrMapping xmlns:a="http://schemas.openxmlformats.org/drawingml/2006/main"/>
   </p:clrMapOvr>
 </p:notes>
 </file>
 
 <file path=ppt/notesSlides/notesSlide5.xml><?xml version="1.0" encoding="utf-8"?>
-<p:notes xmlns:a="http://schemas.openxmlformats.org/drawingml/2006/main" xmlns:r="http://schemas.openxmlformats.org/officeDocument/2006/relationships" xmlns:p="http://schemas.openxmlformats.org/presentationml/2006/main">
+<p:notes xmlns:p="http://schemas.openxmlformats.org/presentationml/2006/main">
   <p:cSld>
     <p:spTree>
       <p:nvGrpSpPr>
@@ -683,21 +878,16 @@
         <p:nvPr/>
       </p:nvGrpSpPr>
       <p:grpSpPr>
-        <a:xfrm>
-          <a:off x="0" y="0"/>
-          <a:ext cx="0" cy="0"/>
-          <a:chOff x="0" y="0"/>
-          <a:chExt cx="0" cy="0"/>
-        </a:xfrm>
+        <a:xfrm xmlns:a="http://schemas.openxmlformats.org/drawingml/2006/main"/>
       </p:grpSpPr>
       <p:sp>
         <p:nvSpPr>
           <p:cNvPr id="2" name="Slide Image Placeholder 1"/>
           <p:cNvSpPr>
-            <a:spLocks noGrp="1" noRot="1" noChangeAspect="1"/>
+            <a:spLocks xmlns:a="http://schemas.openxmlformats.org/drawingml/2006/main" noGrp="1"/>
           </p:cNvSpPr>
           <p:nvPr>
-            <p:ph type="sldImg"/>
+            <p:ph type="sldImg" idx="0"/>
           </p:nvPr>
         </p:nvSpPr>
         <p:spPr/>
@@ -706,7 +896,7 @@
         <p:nvSpPr>
           <p:cNvPr id="3" name="Notes Placeholder 2"/>
           <p:cNvSpPr>
-            <a:spLocks noGrp="1"/>
+            <a:spLocks xmlns:a="http://schemas.openxmlformats.org/drawingml/2006/main" noGrp="1"/>
           </p:cNvSpPr>
           <p:nvPr>
             <p:ph type="body" idx="1"/>
@@ -714,11 +904,16 @@
         </p:nvSpPr>
         <p:spPr/>
         <p:txBody>
-          <a:bodyPr/>
-          <a:lstStyle/>
-          <a:p>
-            <a:r>
-              <a:t>Erwarteter Nutzen, kein Nachweis gemessener Wirkung. Für Lernende wünschen wir uns mehr Sicherheit, nachvollziehbaren Übungsbedarf und selbstständiges Üben. Für Lehrende wünschen wir uns besser vorbereitete Vorträge und mehr Raum, fachliche Inhalte zu besprechen. Konkrete Videostellen können als Gesprächsgrundlage dienen. Unser Ziel ist, Präsentationskompetenz zu stärken, damit Fachwissen besser zur Geltung kommt. Die Anwendung ersetzt weder Lehrkräfte noch eine fachliche Bewertung. Diese Folie formuliert Ziele des Prototyps, keine bereits empirisch belegten Effekte.</a:t>
+          <a:bodyPr xmlns:a="http://schemas.openxmlformats.org/drawingml/2006/main"/>
+          <a:lstStyle xmlns:a="http://schemas.openxmlformats.org/drawingml/2006/main"/>
+          <a:p xmlns:a="http://schemas.openxmlformats.org/drawingml/2006/main">
+            <a:r>
+              <a:t>Hoque et al. untersuchten 2013 das System MACH mit 90 MIT-Studierenden in zwei simulierten Bewerbungsgesprächen. Drei randomisierte Gruppen erhielten ein Tipps-Video, Übung mit eigenem Video oder Übung mit eigenem Video und automatischem Feedback. Nur die Feedback-Gruppe zeigte eine signifikante Verbesserung in den berichteten Bewertungen. Keine signifikante Veränderung bedeutet nicht, dass überhaupt keine Veränderung auftrat. Die Studie untersucht ein anderes System und Bewerbungsgespräche. Sie belegt keine Wirkung unseres Präsentationstrainers.</a:t>
+            </a:r>
+          </a:p>
+          <a:p xmlns:a="http://schemas.openxmlformats.org/drawingml/2006/main">
+            <a:r>
+              <a:t>Quelle: MIT News (14.06.2013), https://news.mit.edu/2013/automated-coach-could-help-with-social-interactions-0614</a:t>
             </a:r>
           </a:p>
         </p:txBody>
@@ -727,7 +922,7 @@
         <p:nvSpPr>
           <p:cNvPr id="4" name="Slide Number Placeholder 3"/>
           <p:cNvSpPr>
-            <a:spLocks noGrp="1"/>
+            <a:spLocks xmlns:a="http://schemas.openxmlformats.org/drawingml/2006/main" noGrp="1"/>
           </p:cNvSpPr>
           <p:nvPr>
             <p:ph type="sldNum" idx="5"/>
@@ -735,23 +930,21 @@
         </p:nvSpPr>
         <p:spPr/>
         <p:txBody>
-          <a:bodyPr/>
-          <a:lstStyle/>
-          <a:p>
-            <a:endParaRPr/>
-          </a:p>
+          <a:bodyPr xmlns:a="http://schemas.openxmlformats.org/drawingml/2006/main"/>
+          <a:lstStyle xmlns:a="http://schemas.openxmlformats.org/drawingml/2006/main"/>
+          <a:p xmlns:a="http://schemas.openxmlformats.org/drawingml/2006/main"/>
         </p:txBody>
       </p:sp>
     </p:spTree>
   </p:cSld>
   <p:clrMapOvr>
-    <a:masterClrMapping/>
+    <a:masterClrMapping xmlns:a="http://schemas.openxmlformats.org/drawingml/2006/main"/>
   </p:clrMapOvr>
 </p:notes>
 </file>
 
 <file path=ppt/slideLayouts/slideLayout1.xml><?xml version="1.0" encoding="utf-8"?>
-<p:sldLayout xmlns:a="http://schemas.openxmlformats.org/drawingml/2006/main" xmlns:r="http://schemas.openxmlformats.org/officeDocument/2006/relationships" xmlns:p="http://schemas.openxmlformats.org/presentationml/2006/main">
+<p:sldLayout xmlns:p="http://schemas.openxmlformats.org/presentationml/2006/main">
   <p:cSld name="Section Header">
     <p:spTree>
       <p:nvGrpSpPr>
@@ -760,48 +953,43 @@
         <p:nvPr/>
       </p:nvGrpSpPr>
       <p:grpSpPr>
-        <a:xfrm>
-          <a:off x="0" y="0"/>
-          <a:ext cx="0" cy="0"/>
-          <a:chOff x="0" y="0"/>
-          <a:chExt cx="0" cy="0"/>
-        </a:xfrm>
+        <a:xfrm xmlns:a="http://schemas.openxmlformats.org/drawingml/2006/main"/>
       </p:grpSpPr>
       <p:sp>
         <p:nvSpPr>
           <p:cNvPr id="2" name="Section title">
-            <a:extLst>
+            <a:extLst xmlns:a="http://schemas.openxmlformats.org/drawingml/2006/main">
               <a:ext uri="{FF2B5EF4-FFF2-40B4-BE49-F238E27FC236}">
                 <a16:creationId xmlns:a16="http://schemas.microsoft.com/office/drawing/2014/main" id="{C0B9952C-D05B-4592-A812-B68C4771EE29}"/>
               </a:ext>
             </a:extLst>
           </p:cNvPr>
           <p:cNvSpPr>
-            <a:spLocks noGrp="1"/>
+            <a:spLocks xmlns:a="http://schemas.openxmlformats.org/drawingml/2006/main" noGrp="1"/>
           </p:cNvSpPr>
           <p:nvPr>
-            <p:ph type="title"/>
+            <p:ph type="title" idx="0"/>
           </p:nvPr>
         </p:nvSpPr>
         <p:spPr>
-          <a:xfrm>
+          <a:xfrm xmlns:a="http://schemas.openxmlformats.org/drawingml/2006/main">
             <a:off x="1219200" y="2857500"/>
             <a:ext cx="9753600" cy="1143000"/>
           </a:xfrm>
-          <a:prstGeom prst="rect">
+          <a:prstGeom xmlns:a="http://schemas.openxmlformats.org/drawingml/2006/main" prst="rect">
             <a:avLst/>
           </a:prstGeom>
-          <a:noFill/>
-          <a:ln>
+          <a:noFill xmlns:a="http://schemas.openxmlformats.org/drawingml/2006/main"/>
+          <a:ln xmlns:a="http://schemas.openxmlformats.org/drawingml/2006/main">
             <a:noFill/>
             <a:prstDash val="solid"/>
           </a:ln>
         </p:spPr>
         <p:txBody>
-          <a:bodyPr wrap="square" lIns="0" tIns="0" rIns="0" bIns="0" anchor="ctr">
+          <a:bodyPr xmlns:a="http://schemas.openxmlformats.org/drawingml/2006/main" wrap="square" lIns="0" tIns="0" rIns="0" bIns="0" anchor="ctr">
             <a:normAutofit/>
           </a:bodyPr>
-          <a:lstStyle>
+          <a:lstStyle xmlns:a="http://schemas.openxmlformats.org/drawingml/2006/main">
             <a:defPPr algn="ctr">
               <a:defRPr sz="4200" b="1">
                 <a:solidFill>
@@ -993,21 +1181,18 @@
               </a:defRPr>
             </a:lvl9pPr>
           </a:lstStyle>
-          <a:p>
+          <a:p xmlns:a="http://schemas.openxmlformats.org/drawingml/2006/main">
             <a:endParaRPr/>
           </a:p>
         </p:txBody>
       </p:sp>
     </p:spTree>
   </p:cSld>
-  <p:clrMapOvr>
-    <a:masterClrMapping/>
-  </p:clrMapOvr>
 </p:sldLayout>
 </file>
 
 <file path=ppt/slideLayouts/slideLayout2.xml><?xml version="1.0" encoding="utf-8"?>
-<p:sldLayout xmlns:a="http://schemas.openxmlformats.org/drawingml/2006/main" xmlns:r="http://schemas.openxmlformats.org/officeDocument/2006/relationships" xmlns:p="http://schemas.openxmlformats.org/presentationml/2006/main">
+<p:sldLayout xmlns:p="http://schemas.openxmlformats.org/presentationml/2006/main">
   <p:cSld name="Title and Body">
     <p:spTree>
       <p:nvGrpSpPr>
@@ -1016,48 +1201,43 @@
         <p:nvPr/>
       </p:nvGrpSpPr>
       <p:grpSpPr>
-        <a:xfrm>
-          <a:off x="0" y="0"/>
-          <a:ext cx="0" cy="0"/>
-          <a:chOff x="0" y="0"/>
-          <a:chExt cx="0" cy="0"/>
-        </a:xfrm>
+        <a:xfrm xmlns:a="http://schemas.openxmlformats.org/drawingml/2006/main"/>
       </p:grpSpPr>
       <p:sp>
         <p:nvSpPr>
           <p:cNvPr id="3" name="Title">
-            <a:extLst>
+            <a:extLst xmlns:a="http://schemas.openxmlformats.org/drawingml/2006/main">
               <a:ext uri="{FF2B5EF4-FFF2-40B4-BE49-F238E27FC236}">
                 <a16:creationId xmlns:a16="http://schemas.microsoft.com/office/drawing/2014/main" id="{0EBE1FC4-8CC8-441A-A91E-136B83EBE9DC}"/>
               </a:ext>
             </a:extLst>
           </p:cNvPr>
           <p:cNvSpPr>
-            <a:spLocks noGrp="1"/>
+            <a:spLocks xmlns:a="http://schemas.openxmlformats.org/drawingml/2006/main" noGrp="1"/>
           </p:cNvSpPr>
           <p:nvPr>
-            <p:ph type="title"/>
+            <p:ph type="title" idx="0"/>
           </p:nvPr>
         </p:nvSpPr>
         <p:spPr>
-          <a:xfrm>
+          <a:xfrm xmlns:a="http://schemas.openxmlformats.org/drawingml/2006/main">
             <a:off x="685800" y="533400"/>
             <a:ext cx="10820400" cy="838200"/>
           </a:xfrm>
-          <a:prstGeom prst="rect">
+          <a:prstGeom xmlns:a="http://schemas.openxmlformats.org/drawingml/2006/main" prst="rect">
             <a:avLst/>
           </a:prstGeom>
-          <a:noFill/>
-          <a:ln>
+          <a:noFill xmlns:a="http://schemas.openxmlformats.org/drawingml/2006/main"/>
+          <a:ln xmlns:a="http://schemas.openxmlformats.org/drawingml/2006/main">
             <a:noFill/>
             <a:prstDash val="solid"/>
           </a:ln>
         </p:spPr>
         <p:txBody>
-          <a:bodyPr wrap="square" lIns="0" tIns="0" rIns="0" bIns="0" anchor="t">
+          <a:bodyPr xmlns:a="http://schemas.openxmlformats.org/drawingml/2006/main" wrap="square" lIns="0" tIns="0" rIns="0" bIns="0" anchor="t">
             <a:normAutofit/>
           </a:bodyPr>
-          <a:lstStyle>
+          <a:lstStyle xmlns:a="http://schemas.openxmlformats.org/drawingml/2006/main">
             <a:defPPr algn="l">
               <a:defRPr sz="3300" b="1">
                 <a:solidFill>
@@ -1249,7 +1429,7 @@
               </a:defRPr>
             </a:lvl9pPr>
           </a:lstStyle>
-          <a:p>
+          <a:p xmlns:a="http://schemas.openxmlformats.org/drawingml/2006/main">
             <a:endParaRPr/>
           </a:p>
         </p:txBody>
@@ -1257,38 +1437,38 @@
       <p:sp>
         <p:nvSpPr>
           <p:cNvPr id="2" name="Body">
-            <a:extLst>
+            <a:extLst xmlns:a="http://schemas.openxmlformats.org/drawingml/2006/main">
               <a:ext uri="{FF2B5EF4-FFF2-40B4-BE49-F238E27FC236}">
                 <a16:creationId xmlns:a16="http://schemas.microsoft.com/office/drawing/2014/main" id="{30B90830-8FB6-4ABE-B9E5-AB0B44054EC7}"/>
               </a:ext>
             </a:extLst>
           </p:cNvPr>
           <p:cNvSpPr>
-            <a:spLocks noGrp="1"/>
+            <a:spLocks xmlns:a="http://schemas.openxmlformats.org/drawingml/2006/main" noGrp="1"/>
           </p:cNvSpPr>
           <p:nvPr>
             <p:ph type="body" idx="1"/>
           </p:nvPr>
         </p:nvSpPr>
         <p:spPr>
-          <a:xfrm>
+          <a:xfrm xmlns:a="http://schemas.openxmlformats.org/drawingml/2006/main">
             <a:off x="685800" y="1905000"/>
             <a:ext cx="10820400" cy="4267200"/>
           </a:xfrm>
-          <a:prstGeom prst="rect">
+          <a:prstGeom xmlns:a="http://schemas.openxmlformats.org/drawingml/2006/main" prst="rect">
             <a:avLst/>
           </a:prstGeom>
-          <a:noFill/>
-          <a:ln>
+          <a:noFill xmlns:a="http://schemas.openxmlformats.org/drawingml/2006/main"/>
+          <a:ln xmlns:a="http://schemas.openxmlformats.org/drawingml/2006/main">
             <a:noFill/>
             <a:prstDash val="solid"/>
           </a:ln>
         </p:spPr>
         <p:txBody>
-          <a:bodyPr wrap="square" lIns="0" tIns="0" rIns="0" bIns="0" anchor="t">
+          <a:bodyPr xmlns:a="http://schemas.openxmlformats.org/drawingml/2006/main" wrap="square" lIns="0" tIns="0" rIns="0" bIns="0" anchor="t">
             <a:normAutofit/>
           </a:bodyPr>
-          <a:lstStyle>
+          <a:lstStyle xmlns:a="http://schemas.openxmlformats.org/drawingml/2006/main">
             <a:defPPr algn="l">
               <a:defRPr sz="2250" b="0">
                 <a:solidFill>
@@ -1480,21 +1660,18 @@
               </a:defRPr>
             </a:lvl9pPr>
           </a:lstStyle>
-          <a:p>
+          <a:p xmlns:a="http://schemas.openxmlformats.org/drawingml/2006/main">
             <a:endParaRPr/>
           </a:p>
         </p:txBody>
       </p:sp>
     </p:spTree>
   </p:cSld>
-  <p:clrMapOvr>
-    <a:masterClrMapping/>
-  </p:clrMapOvr>
 </p:sldLayout>
 </file>
 
 <file path=ppt/slideLayouts/slideLayout3.xml><?xml version="1.0" encoding="utf-8"?>
-<p:sldLayout xmlns:a="http://schemas.openxmlformats.org/drawingml/2006/main" xmlns:r="http://schemas.openxmlformats.org/officeDocument/2006/relationships" xmlns:p="http://schemas.openxmlformats.org/presentationml/2006/main">
+<p:sldLayout xmlns:p="http://schemas.openxmlformats.org/presentationml/2006/main">
   <p:cSld name="Title and Two Column">
     <p:spTree>
       <p:nvGrpSpPr>
@@ -1503,48 +1680,43 @@
         <p:nvPr/>
       </p:nvGrpSpPr>
       <p:grpSpPr>
-        <a:xfrm>
-          <a:off x="0" y="0"/>
-          <a:ext cx="0" cy="0"/>
-          <a:chOff x="0" y="0"/>
-          <a:chExt cx="0" cy="0"/>
-        </a:xfrm>
+        <a:xfrm xmlns:a="http://schemas.openxmlformats.org/drawingml/2006/main"/>
       </p:grpSpPr>
       <p:sp>
         <p:nvSpPr>
           <p:cNvPr id="4" name="Title">
-            <a:extLst>
+            <a:extLst xmlns:a="http://schemas.openxmlformats.org/drawingml/2006/main">
               <a:ext uri="{FF2B5EF4-FFF2-40B4-BE49-F238E27FC236}">
                 <a16:creationId xmlns:a16="http://schemas.microsoft.com/office/drawing/2014/main" id="{9C379B94-7D46-4B0F-B146-FB6734308554}"/>
               </a:ext>
             </a:extLst>
           </p:cNvPr>
           <p:cNvSpPr>
-            <a:spLocks noGrp="1"/>
+            <a:spLocks xmlns:a="http://schemas.openxmlformats.org/drawingml/2006/main" noGrp="1"/>
           </p:cNvSpPr>
           <p:nvPr>
-            <p:ph type="title"/>
+            <p:ph type="title" idx="0"/>
           </p:nvPr>
         </p:nvSpPr>
         <p:spPr>
-          <a:xfrm>
+          <a:xfrm xmlns:a="http://schemas.openxmlformats.org/drawingml/2006/main">
             <a:off x="685800" y="533400"/>
             <a:ext cx="10820400" cy="838200"/>
           </a:xfrm>
-          <a:prstGeom prst="rect">
+          <a:prstGeom xmlns:a="http://schemas.openxmlformats.org/drawingml/2006/main" prst="rect">
             <a:avLst/>
           </a:prstGeom>
-          <a:noFill/>
-          <a:ln>
+          <a:noFill xmlns:a="http://schemas.openxmlformats.org/drawingml/2006/main"/>
+          <a:ln xmlns:a="http://schemas.openxmlformats.org/drawingml/2006/main">
             <a:noFill/>
             <a:prstDash val="solid"/>
           </a:ln>
         </p:spPr>
         <p:txBody>
-          <a:bodyPr wrap="square" lIns="0" tIns="0" rIns="0" bIns="0" anchor="t">
+          <a:bodyPr xmlns:a="http://schemas.openxmlformats.org/drawingml/2006/main" wrap="square" lIns="0" tIns="0" rIns="0" bIns="0" anchor="t">
             <a:normAutofit/>
           </a:bodyPr>
-          <a:lstStyle>
+          <a:lstStyle xmlns:a="http://schemas.openxmlformats.org/drawingml/2006/main">
             <a:defPPr algn="l">
               <a:defRPr sz="3300" b="1">
                 <a:solidFill>
@@ -1736,7 +1908,7 @@
               </a:defRPr>
             </a:lvl9pPr>
           </a:lstStyle>
-          <a:p>
+          <a:p xmlns:a="http://schemas.openxmlformats.org/drawingml/2006/main">
             <a:endParaRPr/>
           </a:p>
         </p:txBody>
@@ -1744,38 +1916,38 @@
       <p:sp>
         <p:nvSpPr>
           <p:cNvPr id="2" name="Left column">
-            <a:extLst>
+            <a:extLst xmlns:a="http://schemas.openxmlformats.org/drawingml/2006/main">
               <a:ext uri="{FF2B5EF4-FFF2-40B4-BE49-F238E27FC236}">
                 <a16:creationId xmlns:a16="http://schemas.microsoft.com/office/drawing/2014/main" id="{5F3FFBB1-9705-4D9C-A3C2-46B043CF870F}"/>
               </a:ext>
             </a:extLst>
           </p:cNvPr>
           <p:cNvSpPr>
-            <a:spLocks noGrp="1"/>
+            <a:spLocks xmlns:a="http://schemas.openxmlformats.org/drawingml/2006/main" noGrp="1"/>
           </p:cNvSpPr>
           <p:nvPr>
             <p:ph type="body" idx="1"/>
           </p:nvPr>
         </p:nvSpPr>
         <p:spPr>
-          <a:xfrm>
+          <a:xfrm xmlns:a="http://schemas.openxmlformats.org/drawingml/2006/main">
             <a:off x="685800" y="1905000"/>
             <a:ext cx="5029200" cy="4267200"/>
           </a:xfrm>
-          <a:prstGeom prst="rect">
+          <a:prstGeom xmlns:a="http://schemas.openxmlformats.org/drawingml/2006/main" prst="rect">
             <a:avLst/>
           </a:prstGeom>
-          <a:noFill/>
-          <a:ln>
+          <a:noFill xmlns:a="http://schemas.openxmlformats.org/drawingml/2006/main"/>
+          <a:ln xmlns:a="http://schemas.openxmlformats.org/drawingml/2006/main">
             <a:noFill/>
             <a:prstDash val="solid"/>
           </a:ln>
         </p:spPr>
         <p:txBody>
-          <a:bodyPr wrap="square" lIns="0" tIns="0" rIns="0" bIns="0" anchor="t">
+          <a:bodyPr xmlns:a="http://schemas.openxmlformats.org/drawingml/2006/main" wrap="square" lIns="0" tIns="0" rIns="0" bIns="0" anchor="t">
             <a:normAutofit/>
           </a:bodyPr>
-          <a:lstStyle>
+          <a:lstStyle xmlns:a="http://schemas.openxmlformats.org/drawingml/2006/main">
             <a:defPPr algn="l">
               <a:defRPr sz="2100" b="0">
                 <a:solidFill>
@@ -1967,7 +2139,7 @@
               </a:defRPr>
             </a:lvl9pPr>
           </a:lstStyle>
-          <a:p>
+          <a:p xmlns:a="http://schemas.openxmlformats.org/drawingml/2006/main">
             <a:endParaRPr/>
           </a:p>
         </p:txBody>
@@ -1975,38 +2147,38 @@
       <p:sp>
         <p:nvSpPr>
           <p:cNvPr id="3" name="Right column">
-            <a:extLst>
+            <a:extLst xmlns:a="http://schemas.openxmlformats.org/drawingml/2006/main">
               <a:ext uri="{FF2B5EF4-FFF2-40B4-BE49-F238E27FC236}">
                 <a16:creationId xmlns:a16="http://schemas.microsoft.com/office/drawing/2014/main" id="{D66DFD9C-9B21-4C25-8664-395E2F53B2C9}"/>
               </a:ext>
             </a:extLst>
           </p:cNvPr>
           <p:cNvSpPr>
-            <a:spLocks noGrp="1"/>
+            <a:spLocks xmlns:a="http://schemas.openxmlformats.org/drawingml/2006/main" noGrp="1"/>
           </p:cNvSpPr>
           <p:nvPr>
             <p:ph type="body" idx="2"/>
           </p:nvPr>
         </p:nvSpPr>
         <p:spPr>
-          <a:xfrm>
+          <a:xfrm xmlns:a="http://schemas.openxmlformats.org/drawingml/2006/main">
             <a:off x="6477000" y="1905000"/>
             <a:ext cx="5029200" cy="4267200"/>
           </a:xfrm>
-          <a:prstGeom prst="rect">
+          <a:prstGeom xmlns:a="http://schemas.openxmlformats.org/drawingml/2006/main" prst="rect">
             <a:avLst/>
           </a:prstGeom>
-          <a:noFill/>
-          <a:ln>
+          <a:noFill xmlns:a="http://schemas.openxmlformats.org/drawingml/2006/main"/>
+          <a:ln xmlns:a="http://schemas.openxmlformats.org/drawingml/2006/main">
             <a:noFill/>
             <a:prstDash val="solid"/>
           </a:ln>
         </p:spPr>
         <p:txBody>
-          <a:bodyPr wrap="square" lIns="0" tIns="0" rIns="0" bIns="0" anchor="t">
+          <a:bodyPr xmlns:a="http://schemas.openxmlformats.org/drawingml/2006/main" wrap="square" lIns="0" tIns="0" rIns="0" bIns="0" anchor="t">
             <a:normAutofit/>
           </a:bodyPr>
-          <a:lstStyle>
+          <a:lstStyle xmlns:a="http://schemas.openxmlformats.org/drawingml/2006/main">
             <a:defPPr algn="l">
               <a:defRPr sz="2100" b="0">
                 <a:solidFill>
@@ -2198,21 +2370,18 @@
               </a:defRPr>
             </a:lvl9pPr>
           </a:lstStyle>
-          <a:p>
+          <a:p xmlns:a="http://schemas.openxmlformats.org/drawingml/2006/main">
             <a:endParaRPr/>
           </a:p>
         </p:txBody>
       </p:sp>
     </p:spTree>
   </p:cSld>
-  <p:clrMapOvr>
-    <a:masterClrMapping/>
-  </p:clrMapOvr>
 </p:sldLayout>
 </file>
 
 <file path=ppt/slideLayouts/slideLayout4.xml><?xml version="1.0" encoding="utf-8"?>
-<p:sldLayout xmlns:a="http://schemas.openxmlformats.org/drawingml/2006/main" xmlns:r="http://schemas.openxmlformats.org/officeDocument/2006/relationships" xmlns:p="http://schemas.openxmlformats.org/presentationml/2006/main">
+<p:sldLayout xmlns:p="http://schemas.openxmlformats.org/presentationml/2006/main">
   <p:cSld name="Title and One Column">
     <p:spTree>
       <p:nvGrpSpPr>
@@ -2221,48 +2390,43 @@
         <p:nvPr/>
       </p:nvGrpSpPr>
       <p:grpSpPr>
-        <a:xfrm>
-          <a:off x="0" y="0"/>
-          <a:ext cx="0" cy="0"/>
-          <a:chOff x="0" y="0"/>
-          <a:chExt cx="0" cy="0"/>
-        </a:xfrm>
+        <a:xfrm xmlns:a="http://schemas.openxmlformats.org/drawingml/2006/main"/>
       </p:grpSpPr>
       <p:sp>
         <p:nvSpPr>
           <p:cNvPr id="3" name="Title">
-            <a:extLst>
+            <a:extLst xmlns:a="http://schemas.openxmlformats.org/drawingml/2006/main">
               <a:ext uri="{FF2B5EF4-FFF2-40B4-BE49-F238E27FC236}">
                 <a16:creationId xmlns:a16="http://schemas.microsoft.com/office/drawing/2014/main" id="{6E0FB8AC-EFDF-42F3-A6E8-41DA37A719AA}"/>
               </a:ext>
             </a:extLst>
           </p:cNvPr>
           <p:cNvSpPr>
-            <a:spLocks noGrp="1"/>
+            <a:spLocks xmlns:a="http://schemas.openxmlformats.org/drawingml/2006/main" noGrp="1"/>
           </p:cNvSpPr>
           <p:nvPr>
-            <p:ph type="title"/>
+            <p:ph type="title" idx="0"/>
           </p:nvPr>
         </p:nvSpPr>
         <p:spPr>
-          <a:xfrm>
+          <a:xfrm xmlns:a="http://schemas.openxmlformats.org/drawingml/2006/main">
             <a:off x="685800" y="533400"/>
             <a:ext cx="10820400" cy="838200"/>
           </a:xfrm>
-          <a:prstGeom prst="rect">
+          <a:prstGeom xmlns:a="http://schemas.openxmlformats.org/drawingml/2006/main" prst="rect">
             <a:avLst/>
           </a:prstGeom>
-          <a:noFill/>
-          <a:ln>
+          <a:noFill xmlns:a="http://schemas.openxmlformats.org/drawingml/2006/main"/>
+          <a:ln xmlns:a="http://schemas.openxmlformats.org/drawingml/2006/main">
             <a:noFill/>
             <a:prstDash val="solid"/>
           </a:ln>
         </p:spPr>
         <p:txBody>
-          <a:bodyPr wrap="square" lIns="0" tIns="0" rIns="0" bIns="0" anchor="t">
+          <a:bodyPr xmlns:a="http://schemas.openxmlformats.org/drawingml/2006/main" wrap="square" lIns="0" tIns="0" rIns="0" bIns="0" anchor="t">
             <a:normAutofit/>
           </a:bodyPr>
-          <a:lstStyle>
+          <a:lstStyle xmlns:a="http://schemas.openxmlformats.org/drawingml/2006/main">
             <a:defPPr algn="l">
               <a:defRPr sz="3300" b="1">
                 <a:solidFill>
@@ -2454,7 +2618,7 @@
               </a:defRPr>
             </a:lvl9pPr>
           </a:lstStyle>
-          <a:p>
+          <a:p xmlns:a="http://schemas.openxmlformats.org/drawingml/2006/main">
             <a:endParaRPr/>
           </a:p>
         </p:txBody>
@@ -2462,38 +2626,38 @@
       <p:sp>
         <p:nvSpPr>
           <p:cNvPr id="2" name="Left column">
-            <a:extLst>
+            <a:extLst xmlns:a="http://schemas.openxmlformats.org/drawingml/2006/main">
               <a:ext uri="{FF2B5EF4-FFF2-40B4-BE49-F238E27FC236}">
                 <a16:creationId xmlns:a16="http://schemas.microsoft.com/office/drawing/2014/main" id="{D6AC0253-CC2A-4FF0-BD9E-AD5046D606A9}"/>
               </a:ext>
             </a:extLst>
           </p:cNvPr>
           <p:cNvSpPr>
-            <a:spLocks noGrp="1"/>
+            <a:spLocks xmlns:a="http://schemas.openxmlformats.org/drawingml/2006/main" noGrp="1"/>
           </p:cNvSpPr>
           <p:nvPr>
             <p:ph type="body" idx="1"/>
           </p:nvPr>
         </p:nvSpPr>
         <p:spPr>
-          <a:xfrm>
+          <a:xfrm xmlns:a="http://schemas.openxmlformats.org/drawingml/2006/main">
             <a:off x="685800" y="1905000"/>
             <a:ext cx="5029200" cy="4267200"/>
           </a:xfrm>
-          <a:prstGeom prst="rect">
+          <a:prstGeom xmlns:a="http://schemas.openxmlformats.org/drawingml/2006/main" prst="rect">
             <a:avLst/>
           </a:prstGeom>
-          <a:noFill/>
-          <a:ln>
+          <a:noFill xmlns:a="http://schemas.openxmlformats.org/drawingml/2006/main"/>
+          <a:ln xmlns:a="http://schemas.openxmlformats.org/drawingml/2006/main">
             <a:noFill/>
             <a:prstDash val="solid"/>
           </a:ln>
         </p:spPr>
         <p:txBody>
-          <a:bodyPr wrap="square" lIns="0" tIns="0" rIns="0" bIns="0" anchor="t">
+          <a:bodyPr xmlns:a="http://schemas.openxmlformats.org/drawingml/2006/main" wrap="square" lIns="0" tIns="0" rIns="0" bIns="0" anchor="t">
             <a:normAutofit/>
           </a:bodyPr>
-          <a:lstStyle>
+          <a:lstStyle xmlns:a="http://schemas.openxmlformats.org/drawingml/2006/main">
             <a:defPPr algn="l">
               <a:defRPr sz="2250" b="0">
                 <a:solidFill>
@@ -2685,21 +2849,18 @@
               </a:defRPr>
             </a:lvl9pPr>
           </a:lstStyle>
-          <a:p>
+          <a:p xmlns:a="http://schemas.openxmlformats.org/drawingml/2006/main">
             <a:endParaRPr/>
           </a:p>
         </p:txBody>
       </p:sp>
     </p:spTree>
   </p:cSld>
-  <p:clrMapOvr>
-    <a:masterClrMapping/>
-  </p:clrMapOvr>
 </p:sldLayout>
 </file>
 
 <file path=ppt/slideLayouts/slideLayout5.xml><?xml version="1.0" encoding="utf-8"?>
-<p:sldLayout xmlns:a="http://schemas.openxmlformats.org/drawingml/2006/main" xmlns:r="http://schemas.openxmlformats.org/officeDocument/2006/relationships" xmlns:p="http://schemas.openxmlformats.org/presentationml/2006/main" type="blank">
+<p:sldLayout xmlns:p="http://schemas.openxmlformats.org/presentationml/2006/main" type="blank">
   <p:cSld name="Blank">
     <p:spTree>
       <p:nvGrpSpPr>
@@ -2708,27 +2869,19 @@
         <p:nvPr/>
       </p:nvGrpSpPr>
       <p:grpSpPr>
-        <a:xfrm>
-          <a:off x="0" y="0"/>
-          <a:ext cx="0" cy="0"/>
-          <a:chOff x="0" y="0"/>
-          <a:chExt cx="0" cy="0"/>
-        </a:xfrm>
+        <a:xfrm xmlns:a="http://schemas.openxmlformats.org/drawingml/2006/main"/>
       </p:grpSpPr>
     </p:spTree>
   </p:cSld>
-  <p:clrMapOvr>
-    <a:masterClrMapping/>
-  </p:clrMapOvr>
 </p:sldLayout>
 </file>
 
 <file path=ppt/slideMasters/slideMaster1.xml><?xml version="1.0" encoding="utf-8"?>
-<p:sldMaster xmlns:a="http://schemas.openxmlformats.org/drawingml/2006/main" xmlns:r="http://schemas.openxmlformats.org/officeDocument/2006/relationships" xmlns:p="http://schemas.openxmlformats.org/presentationml/2006/main">
+<p:sldMaster xmlns:p="http://schemas.openxmlformats.org/presentationml/2006/main">
   <p:cSld name="Master">
     <p:bg>
       <p:bgRef idx="1001">
-        <a:schemeClr val="bg1"/>
+        <a:schemeClr xmlns:a="http://schemas.openxmlformats.org/drawingml/2006/main" val="bg1"/>
       </p:bgRef>
     </p:bg>
     <p:spTree>
@@ -2738,26 +2891,21 @@
         <p:nvPr/>
       </p:nvGrpSpPr>
       <p:grpSpPr>
-        <a:xfrm>
-          <a:off x="0" y="0"/>
-          <a:ext cx="0" cy="0"/>
-          <a:chOff x="0" y="0"/>
-          <a:chExt cx="0" cy="0"/>
-        </a:xfrm>
+        <a:xfrm xmlns:a="http://schemas.openxmlformats.org/drawingml/2006/main"/>
       </p:grpSpPr>
     </p:spTree>
   </p:cSld>
   <p:clrMap bg1="lt1" tx1="dk1" bg2="lt2" tx2="dk2" accent1="accent1" accent2="accent2" accent3="accent3" accent4="accent4" accent5="accent5" accent6="accent6" hlink="hlink" folHlink="folHlink"/>
   <p:sldLayoutIdLst>
-    <p:sldLayoutId id="2147483649" r:id="rId1"/>
-    <p:sldLayoutId id="2147483650" r:id="rId2"/>
-    <p:sldLayoutId id="2147483651" r:id="rId3"/>
-    <p:sldLayoutId id="2147483652" r:id="rId4"/>
-    <p:sldLayoutId id="2147483653" r:id="rId5"/>
+    <p:sldLayoutId xmlns:r="http://schemas.openxmlformats.org/officeDocument/2006/relationships" id="2147483649" r:id="Rf7463ec4b5f643ce"/>
+    <p:sldLayoutId xmlns:r="http://schemas.openxmlformats.org/officeDocument/2006/relationships" id="2147483650" r:id="R18f25240cf514775"/>
+    <p:sldLayoutId xmlns:r="http://schemas.openxmlformats.org/officeDocument/2006/relationships" id="2147483651" r:id="Ra7d3a116a07a4ce0"/>
+    <p:sldLayoutId xmlns:r="http://schemas.openxmlformats.org/officeDocument/2006/relationships" id="2147483652" r:id="R7add245b32674015"/>
+    <p:sldLayoutId xmlns:r="http://schemas.openxmlformats.org/officeDocument/2006/relationships" id="2147483653" r:id="Rc8926096c7de4db9"/>
   </p:sldLayoutIdLst>
   <p:txStyles>
     <p:titleStyle>
-      <a:lvl1pPr algn="l">
+      <a:lvl1pPr xmlns:a="http://schemas.openxmlformats.org/drawingml/2006/main" algn="l">
         <a:lnSpc>
           <a:spcPct val="90000"/>
         </a:lnSpc>
@@ -2776,7 +2924,7 @@
       </a:lvl1pPr>
     </p:titleStyle>
     <p:bodyStyle>
-      <a:lvl1pPr marL="228600" indent="-228600" algn="l">
+      <a:lvl1pPr xmlns:a="http://schemas.openxmlformats.org/drawingml/2006/main" marL="228600" indent="-228600" algn="l">
         <a:lnSpc>
           <a:spcPct val="90000"/>
         </a:lnSpc>
@@ -2793,7 +2941,7 @@
           <a:cs typeface="+mn-lt"/>
         </a:defRPr>
       </a:lvl1pPr>
-      <a:lvl2pPr marL="685800" indent="-228600" algn="l">
+      <a:lvl2pPr xmlns:a="http://schemas.openxmlformats.org/drawingml/2006/main" marL="685800" indent="-228600" algn="l">
         <a:lnSpc>
           <a:spcPct val="90000"/>
         </a:lnSpc>
@@ -2810,7 +2958,7 @@
           <a:cs typeface="+mn-lt"/>
         </a:defRPr>
       </a:lvl2pPr>
-      <a:lvl3pPr marL="1143000" indent="-228600" algn="l">
+      <a:lvl3pPr xmlns:a="http://schemas.openxmlformats.org/drawingml/2006/main" marL="1143000" indent="-228600" algn="l">
         <a:lnSpc>
           <a:spcPct val="90000"/>
         </a:lnSpc>
@@ -2827,7 +2975,7 @@
           <a:cs typeface="+mn-lt"/>
         </a:defRPr>
       </a:lvl3pPr>
-      <a:lvl4pPr marL="1600200" indent="-228600" algn="l">
+      <a:lvl4pPr xmlns:a="http://schemas.openxmlformats.org/drawingml/2006/main" marL="1600200" indent="-228600" algn="l">
         <a:lnSpc>
           <a:spcPct val="90000"/>
         </a:lnSpc>
@@ -2844,7 +2992,7 @@
           <a:cs typeface="+mn-lt"/>
         </a:defRPr>
       </a:lvl4pPr>
-      <a:lvl5pPr marL="2057400" indent="-228600" algn="l">
+      <a:lvl5pPr xmlns:a="http://schemas.openxmlformats.org/drawingml/2006/main" marL="2057400" indent="-228600" algn="l">
         <a:lnSpc>
           <a:spcPct val="90000"/>
         </a:lnSpc>
@@ -2861,7 +3009,7 @@
           <a:cs typeface="+mn-lt"/>
         </a:defRPr>
       </a:lvl5pPr>
-      <a:lvl6pPr marL="2514600" indent="-228600" algn="l">
+      <a:lvl6pPr xmlns:a="http://schemas.openxmlformats.org/drawingml/2006/main" marL="2514600" indent="-228600" algn="l">
         <a:lnSpc>
           <a:spcPct val="90000"/>
         </a:lnSpc>
@@ -2878,7 +3026,7 @@
           <a:cs typeface="+mn-lt"/>
         </a:defRPr>
       </a:lvl6pPr>
-      <a:lvl7pPr marL="2971800" indent="-228600" algn="l">
+      <a:lvl7pPr xmlns:a="http://schemas.openxmlformats.org/drawingml/2006/main" marL="2971800" indent="-228600" algn="l">
         <a:lnSpc>
           <a:spcPct val="90000"/>
         </a:lnSpc>
@@ -2895,7 +3043,7 @@
           <a:cs typeface="+mn-lt"/>
         </a:defRPr>
       </a:lvl7pPr>
-      <a:lvl8pPr marL="3429000" indent="-228600" algn="l">
+      <a:lvl8pPr xmlns:a="http://schemas.openxmlformats.org/drawingml/2006/main" marL="3429000" indent="-228600" algn="l">
         <a:lnSpc>
           <a:spcPct val="90000"/>
         </a:lnSpc>
@@ -2912,7 +3060,7 @@
           <a:cs typeface="+mn-lt"/>
         </a:defRPr>
       </a:lvl8pPr>
-      <a:lvl9pPr marL="3886200" indent="-228600" algn="l">
+      <a:lvl9pPr xmlns:a="http://schemas.openxmlformats.org/drawingml/2006/main" marL="3886200" indent="-228600" algn="l">
         <a:lnSpc>
           <a:spcPct val="90000"/>
         </a:lnSpc>
@@ -2931,7 +3079,7 @@
       </a:lvl9pPr>
     </p:bodyStyle>
     <p:otherStyle>
-      <a:lvl1pPr marL="0" algn="l">
+      <a:lvl1pPr xmlns:a="http://schemas.openxmlformats.org/drawingml/2006/main" marL="0" algn="l">
         <a:buNone/>
         <a:defRPr sz="1800">
           <a:solidFill>
@@ -2942,7 +3090,7 @@
           <a:cs typeface="+mn-lt"/>
         </a:defRPr>
       </a:lvl1pPr>
-      <a:lvl2pPr marL="457200" algn="l">
+      <a:lvl2pPr xmlns:a="http://schemas.openxmlformats.org/drawingml/2006/main" marL="457200" algn="l">
         <a:buNone/>
         <a:defRPr sz="1800">
           <a:solidFill>
@@ -2953,7 +3101,7 @@
           <a:cs typeface="+mn-lt"/>
         </a:defRPr>
       </a:lvl2pPr>
-      <a:lvl3pPr marL="914400" algn="l">
+      <a:lvl3pPr xmlns:a="http://schemas.openxmlformats.org/drawingml/2006/main" marL="914400" algn="l">
         <a:buNone/>
         <a:defRPr sz="1800">
           <a:solidFill>
@@ -2964,7 +3112,7 @@
           <a:cs typeface="+mn-lt"/>
         </a:defRPr>
       </a:lvl3pPr>
-      <a:lvl4pPr marL="1371600" algn="l">
+      <a:lvl4pPr xmlns:a="http://schemas.openxmlformats.org/drawingml/2006/main" marL="1371600" algn="l">
         <a:buNone/>
         <a:defRPr sz="1800">
           <a:solidFill>
@@ -2975,7 +3123,7 @@
           <a:cs typeface="+mn-lt"/>
         </a:defRPr>
       </a:lvl4pPr>
-      <a:lvl5pPr marL="1828800" algn="l">
+      <a:lvl5pPr xmlns:a="http://schemas.openxmlformats.org/drawingml/2006/main" marL="1828800" algn="l">
         <a:buNone/>
         <a:defRPr sz="1800">
           <a:solidFill>
@@ -2986,7 +3134,7 @@
           <a:cs typeface="+mn-lt"/>
         </a:defRPr>
       </a:lvl5pPr>
-      <a:lvl6pPr marL="2286000" algn="l">
+      <a:lvl6pPr xmlns:a="http://schemas.openxmlformats.org/drawingml/2006/main" marL="2286000" algn="l">
         <a:buNone/>
         <a:defRPr sz="1800">
           <a:solidFill>
@@ -2997,7 +3145,7 @@
           <a:cs typeface="+mn-lt"/>
         </a:defRPr>
       </a:lvl6pPr>
-      <a:lvl7pPr marL="2743200" algn="l">
+      <a:lvl7pPr xmlns:a="http://schemas.openxmlformats.org/drawingml/2006/main" marL="2743200" algn="l">
         <a:buNone/>
         <a:defRPr sz="1800">
           <a:solidFill>
@@ -3008,7 +3156,7 @@
           <a:cs typeface="+mn-lt"/>
         </a:defRPr>
       </a:lvl7pPr>
-      <a:lvl8pPr marL="3200400" algn="l">
+      <a:lvl8pPr xmlns:a="http://schemas.openxmlformats.org/drawingml/2006/main" marL="3200400" algn="l">
         <a:buNone/>
         <a:defRPr sz="1800">
           <a:solidFill>
@@ -3019,7 +3167,7 @@
           <a:cs typeface="+mn-lt"/>
         </a:defRPr>
       </a:lvl8pPr>
-      <a:lvl9pPr marL="3657600" algn="l">
+      <a:lvl9pPr xmlns:a="http://schemas.openxmlformats.org/drawingml/2006/main" marL="3657600" algn="l">
         <a:buNone/>
         <a:defRPr sz="1800">
           <a:solidFill>
@@ -3035,8 +3183,253 @@
 </p:sldMaster>
 </file>
 
+<file path=ppt/slideMasters/theme/theme2.xml><?xml version="1.0" encoding="utf-8"?>
+<a:theme xmlns:a="http://schemas.openxmlformats.org/drawingml/2006/main" name="ChatGPT">
+  <a:themeElements>
+    <a:clrScheme name="ChatGPT">
+      <a:dk1>
+        <a:srgbClr val="000000"/>
+      </a:dk1>
+      <a:lt1>
+        <a:srgbClr val="FFFFFF"/>
+      </a:lt1>
+      <a:dk2>
+        <a:srgbClr val="0E2841"/>
+      </a:dk2>
+      <a:lt2>
+        <a:srgbClr val="E8E8E8"/>
+      </a:lt2>
+      <a:accent1>
+        <a:srgbClr val="156082"/>
+      </a:accent1>
+      <a:accent2>
+        <a:srgbClr val="E97132"/>
+      </a:accent2>
+      <a:accent3>
+        <a:srgbClr val="196B24"/>
+      </a:accent3>
+      <a:accent4>
+        <a:srgbClr val="0F9ED5"/>
+      </a:accent4>
+      <a:accent5>
+        <a:srgbClr val="A02B93"/>
+      </a:accent5>
+      <a:accent6>
+        <a:srgbClr val="4EA72E"/>
+      </a:accent6>
+      <a:hlink>
+        <a:srgbClr val="467886"/>
+      </a:hlink>
+      <a:folHlink>
+        <a:srgbClr val="96607D"/>
+      </a:folHlink>
+    </a:clrScheme>
+    <a:fontScheme name="">
+      <a:majorFont>
+        <a:latin typeface="Aptos"/>
+        <a:ea typeface=""/>
+        <a:cs typeface=""/>
+      </a:majorFont>
+      <a:minorFont>
+        <a:latin typeface="Aptos"/>
+        <a:ea typeface=""/>
+        <a:cs typeface=""/>
+      </a:minorFont>
+    </a:fontScheme>
+    <a:fmtScheme name="ChatGPT">
+      <a:fillStyleLst>
+        <a:solidFill>
+          <a:schemeClr val="phClr"/>
+        </a:solidFill>
+        <a:gradFill>
+          <a:gsLst>
+            <a:gs pos="0">
+              <a:schemeClr val="phClr">
+                <a:tint val="67000"/>
+                <a:lumMod val="110000"/>
+                <a:satMod val="105000"/>
+              </a:schemeClr>
+            </a:gs>
+            <a:gs pos="50000">
+              <a:schemeClr val="phClr">
+                <a:tint val="73000"/>
+                <a:lumMod val="105000"/>
+                <a:satMod val="103000"/>
+              </a:schemeClr>
+            </a:gs>
+            <a:gs pos="100000">
+              <a:schemeClr val="phClr">
+                <a:tint val="81000"/>
+                <a:lumMod val="105000"/>
+                <a:satMod val="109000"/>
+              </a:schemeClr>
+            </a:gs>
+          </a:gsLst>
+          <a:lin ang="5400000" scaled="0"/>
+        </a:gradFill>
+        <a:gradFill>
+          <a:gsLst>
+            <a:gs pos="0">
+              <a:schemeClr val="phClr">
+                <a:tint val="94000"/>
+                <a:lumMod val="102000"/>
+                <a:satMod val="103000"/>
+              </a:schemeClr>
+            </a:gs>
+            <a:gs pos="50000">
+              <a:schemeClr val="phClr">
+                <a:shade val="100000"/>
+                <a:lumMod val="100000"/>
+                <a:satMod val="110000"/>
+              </a:schemeClr>
+            </a:gs>
+            <a:gs pos="100000">
+              <a:schemeClr val="phClr">
+                <a:shade val="78000"/>
+                <a:lumMod val="99000"/>
+                <a:satMod val="120000"/>
+              </a:schemeClr>
+            </a:gs>
+          </a:gsLst>
+          <a:lin ang="5400000" scaled="0"/>
+        </a:gradFill>
+      </a:fillStyleLst>
+      <a:lnStyleLst>
+        <a:ln w="12700">
+          <a:solidFill>
+            <a:schemeClr val="phClr"/>
+          </a:solidFill>
+          <a:prstDash val="solid"/>
+        </a:ln>
+        <a:ln w="19050">
+          <a:solidFill>
+            <a:schemeClr val="phClr"/>
+          </a:solidFill>
+          <a:prstDash val="solid"/>
+        </a:ln>
+        <a:ln w="25400">
+          <a:solidFill>
+            <a:schemeClr val="phClr"/>
+          </a:solidFill>
+          <a:prstDash val="solid"/>
+        </a:ln>
+      </a:lnStyleLst>
+      <a:effectStyleLst>
+        <a:effectStyle>
+          <a:effectLst/>
+        </a:effectStyle>
+        <a:effectStyle>
+          <a:effectLst/>
+        </a:effectStyle>
+        <a:effectStyle>
+          <a:effectLst>
+            <a:outerShdw blurRad="57150" dist="19050" dir="5400000">
+              <a:srgbClr val="000000">
+                <a:alpha val="16000"/>
+              </a:srgbClr>
+            </a:outerShdw>
+          </a:effectLst>
+        </a:effectStyle>
+        <a:effectStyle>
+          <a:effectLst>
+            <a:outerShdw blurRad="19050" dist="9525" dir="5400000">
+              <a:srgbClr val="000000">
+                <a:alpha val="6000"/>
+              </a:srgbClr>
+            </a:outerShdw>
+          </a:effectLst>
+        </a:effectStyle>
+        <a:effectStyle>
+          <a:effectLst>
+            <a:outerShdw blurRad="28575" dist="9525" dir="5400000">
+              <a:srgbClr val="000000">
+                <a:alpha val="8000"/>
+              </a:srgbClr>
+            </a:outerShdw>
+          </a:effectLst>
+        </a:effectStyle>
+        <a:effectStyle>
+          <a:effectLst>
+            <a:outerShdw blurRad="57150" dist="19050" dir="5400000">
+              <a:srgbClr val="000000">
+                <a:alpha val="10000"/>
+              </a:srgbClr>
+            </a:outerShdw>
+          </a:effectLst>
+        </a:effectStyle>
+        <a:effectStyle>
+          <a:effectLst>
+            <a:outerShdw blurRad="114300" dist="38100" dir="5400000">
+              <a:srgbClr val="000000">
+                <a:alpha val="12000"/>
+              </a:srgbClr>
+            </a:outerShdw>
+          </a:effectLst>
+        </a:effectStyle>
+        <a:effectStyle>
+          <a:effectLst>
+            <a:outerShdw blurRad="171450" dist="57150" dir="5400000">
+              <a:srgbClr val="000000">
+                <a:alpha val="16000"/>
+              </a:srgbClr>
+            </a:outerShdw>
+          </a:effectLst>
+        </a:effectStyle>
+        <a:effectStyle>
+          <a:effectLst>
+            <a:outerShdw blurRad="266700" dist="95250" dir="5400000">
+              <a:srgbClr val="000000">
+                <a:alpha val="24000"/>
+              </a:srgbClr>
+            </a:outerShdw>
+          </a:effectLst>
+        </a:effectStyle>
+      </a:effectStyleLst>
+      <a:bgFillStyleLst>
+        <a:solidFill>
+          <a:schemeClr val="phClr"/>
+        </a:solidFill>
+        <a:solidFill>
+          <a:schemeClr val="phClr">
+            <a:tint val="95000"/>
+            <a:satMod val="170000"/>
+          </a:schemeClr>
+        </a:solidFill>
+        <a:gradFill>
+          <a:gsLst>
+            <a:gs pos="0">
+              <a:schemeClr val="phClr">
+                <a:tint val="93000"/>
+                <a:shade val="98000"/>
+                <a:lumMod val="102000"/>
+                <a:satMod val="150000"/>
+              </a:schemeClr>
+            </a:gs>
+            <a:gs pos="50000">
+              <a:schemeClr val="phClr">
+                <a:tint val="98000"/>
+                <a:shade val="90000"/>
+                <a:lumMod val="103000"/>
+                <a:satMod val="130000"/>
+              </a:schemeClr>
+            </a:gs>
+            <a:gs pos="100000">
+              <a:schemeClr val="phClr">
+                <a:shade val="63000"/>
+                <a:satMod val="120000"/>
+              </a:schemeClr>
+            </a:gs>
+          </a:gsLst>
+          <a:lin ang="5400000" scaled="0"/>
+        </a:gradFill>
+      </a:bgFillStyleLst>
+    </a:fmtScheme>
+  </a:themeElements>
+</a:theme>
+</file>
+
 <file path=ppt/slides/slide1.xml><?xml version="1.0" encoding="utf-8"?>
-<p:sld xmlns:a="http://schemas.openxmlformats.org/drawingml/2006/main" xmlns:r="http://schemas.openxmlformats.org/officeDocument/2006/relationships" xmlns:p="http://schemas.openxmlformats.org/presentationml/2006/main">
+<p:sld xmlns:p="http://schemas.openxmlformats.org/presentationml/2006/main">
   <p:cSld>
     <p:spTree>
       <p:nvGrpSpPr>
@@ -3045,43 +3438,38 @@
         <p:nvPr/>
       </p:nvGrpSpPr>
       <p:grpSpPr>
-        <a:xfrm>
-          <a:off x="0" y="0"/>
-          <a:ext cx="0" cy="0"/>
-          <a:chOff x="0" y="0"/>
-          <a:chExt cx="0" cy="0"/>
-        </a:xfrm>
+        <a:xfrm xmlns:a="http://schemas.openxmlformats.org/drawingml/2006/main"/>
       </p:grpSpPr>
       <p:sp>
         <p:nvSpPr>
           <p:cNvPr id="2" name="solution-title">
-            <a:extLst>
+            <a:extLst xmlns:a="http://schemas.openxmlformats.org/drawingml/2006/main">
               <a:ext uri="{FF2B5EF4-FFF2-40B4-BE49-F238E27FC236}">
                 <a16:creationId xmlns:a16="http://schemas.microsoft.com/office/drawing/2014/main" id="{8EC16773-DB61-448B-9B60-B88886C357DE}"/>
               </a:ext>
             </a:extLst>
           </p:cNvPr>
           <p:cNvSpPr>
-            <a:spLocks noGrp="1"/>
+            <a:spLocks xmlns:a="http://schemas.openxmlformats.org/drawingml/2006/main" noGrp="1"/>
           </p:cNvSpPr>
           <p:nvPr/>
         </p:nvSpPr>
         <p:spPr>
-          <a:xfrm>
+          <a:xfrm xmlns:a="http://schemas.openxmlformats.org/drawingml/2006/main">
             <a:off x="723900" y="581025"/>
             <a:ext cx="10477500" cy="857250"/>
           </a:xfrm>
-          <a:prstGeom prst="rect">
+          <a:prstGeom xmlns:a="http://schemas.openxmlformats.org/drawingml/2006/main" prst="rect">
             <a:avLst/>
           </a:prstGeom>
-          <a:noFill/>
-          <a:ln w="0">
+          <a:noFill xmlns:a="http://schemas.openxmlformats.org/drawingml/2006/main"/>
+          <a:ln xmlns:a="http://schemas.openxmlformats.org/drawingml/2006/main" w="0">
             <a:noFill/>
           </a:ln>
         </p:spPr>
         <p:txBody>
-          <a:bodyPr lIns="0" tIns="0" rIns="0" bIns="0"/>
-          <a:lstStyle>
+          <a:bodyPr xmlns:a="http://schemas.openxmlformats.org/drawingml/2006/main" lIns="0" tIns="0" rIns="0" bIns="0"/>
+          <a:lstStyle xmlns:a="http://schemas.openxmlformats.org/drawingml/2006/main">
             <a:defPPr>
               <a:defRPr sz="4800" b="1">
                 <a:solidFill>
@@ -3162,7 +3550,7 @@
               </a:defRPr>
             </a:lvl9pPr>
           </a:lstStyle>
-          <a:p>
+          <a:p xmlns:a="http://schemas.openxmlformats.org/drawingml/2006/main">
             <a:pPr>
               <a:buNone/>
               <a:defRPr sz="4800" b="1">
@@ -3172,7 +3560,7 @@
               </a:defRPr>
             </a:pPr>
             <a:r>
-              <a:rPr b="1" dirty="0">
+              <a:rPr b="1">
                 <a:solidFill>
                   <a:srgbClr val="3803BF"/>
                 </a:solidFill>
@@ -3185,33 +3573,33 @@
       <p:sp>
         <p:nvSpPr>
           <p:cNvPr id="4" name="during-title">
-            <a:extLst>
+            <a:extLst xmlns:a="http://schemas.openxmlformats.org/drawingml/2006/main">
               <a:ext uri="{FF2B5EF4-FFF2-40B4-BE49-F238E27FC236}">
                 <a16:creationId xmlns:a16="http://schemas.microsoft.com/office/drawing/2014/main" id="{BA8497C2-8DFA-49C5-A2F9-537E8566F42A}"/>
               </a:ext>
             </a:extLst>
           </p:cNvPr>
           <p:cNvSpPr>
-            <a:spLocks noGrp="1"/>
+            <a:spLocks xmlns:a="http://schemas.openxmlformats.org/drawingml/2006/main" noGrp="1"/>
           </p:cNvSpPr>
           <p:nvPr/>
         </p:nvSpPr>
         <p:spPr>
-          <a:xfrm>
+          <a:xfrm xmlns:a="http://schemas.openxmlformats.org/drawingml/2006/main">
             <a:off x="723900" y="2258929"/>
             <a:ext cx="5143500" cy="533400"/>
           </a:xfrm>
-          <a:prstGeom prst="rect">
+          <a:prstGeom xmlns:a="http://schemas.openxmlformats.org/drawingml/2006/main" prst="rect">
             <a:avLst/>
           </a:prstGeom>
-          <a:noFill/>
-          <a:ln w="0">
+          <a:noFill xmlns:a="http://schemas.openxmlformats.org/drawingml/2006/main"/>
+          <a:ln xmlns:a="http://schemas.openxmlformats.org/drawingml/2006/main" w="0">
             <a:noFill/>
           </a:ln>
         </p:spPr>
         <p:txBody>
-          <a:bodyPr lIns="0" tIns="0" rIns="0" bIns="0"/>
-          <a:lstStyle>
+          <a:bodyPr xmlns:a="http://schemas.openxmlformats.org/drawingml/2006/main" lIns="0" tIns="0" rIns="0" bIns="0"/>
+          <a:lstStyle xmlns:a="http://schemas.openxmlformats.org/drawingml/2006/main">
             <a:defPPr>
               <a:defRPr sz="2400" b="1">
                 <a:solidFill>
@@ -3292,7 +3680,7 @@
               </a:defRPr>
             </a:lvl9pPr>
           </a:lstStyle>
-          <a:p>
+          <a:p xmlns:a="http://schemas.openxmlformats.org/drawingml/2006/main">
             <a:pPr>
               <a:buNone/>
               <a:defRPr sz="2400" b="1">
@@ -3302,7 +3690,7 @@
               </a:defRPr>
             </a:pPr>
             <a:r>
-              <a:rPr sz="3200" b="1" dirty="0">
+              <a:rPr sz="3200" b="1">
                 <a:solidFill>
                   <a:srgbClr val="3803BF"/>
                 </a:solidFill>
@@ -3315,38 +3703,43 @@
       <p:sp>
         <p:nvSpPr>
           <p:cNvPr id="5" name="during-body">
-            <a:extLst>
+            <a:extLst xmlns:a="http://schemas.openxmlformats.org/drawingml/2006/main">
               <a:ext uri="{FF2B5EF4-FFF2-40B4-BE49-F238E27FC236}">
                 <a16:creationId xmlns:a16="http://schemas.microsoft.com/office/drawing/2014/main" id="{57F6B05E-440E-44E2-A9B1-1BEE2FEB96E3}"/>
               </a:ext>
             </a:extLst>
           </p:cNvPr>
           <p:cNvSpPr>
-            <a:spLocks noGrp="1"/>
+            <a:spLocks xmlns:a="http://schemas.openxmlformats.org/drawingml/2006/main" noGrp="1"/>
           </p:cNvSpPr>
           <p:nvPr/>
         </p:nvSpPr>
         <p:spPr>
-          <a:xfrm>
-            <a:off x="723900" y="2992354"/>
-            <a:ext cx="5095875" cy="1524000"/>
+          <a:xfrm xmlns:a="http://schemas.openxmlformats.org/drawingml/2006/main">
+            <a:off x="723900" y="2992374"/>
+            <a:ext cx="5238750" cy="1762125"/>
           </a:xfrm>
-          <a:prstGeom prst="rect">
+          <a:prstGeom xmlns:a="http://schemas.openxmlformats.org/drawingml/2006/main" prst="rect">
             <a:avLst/>
           </a:prstGeom>
-          <a:noFill/>
-          <a:ln w="0">
+          <a:noFill xmlns:a="http://schemas.openxmlformats.org/drawingml/2006/main"/>
+          <a:ln xmlns:a="http://schemas.openxmlformats.org/drawingml/2006/main" w="0">
             <a:noFill/>
           </a:ln>
         </p:spPr>
         <p:txBody>
-          <a:bodyPr lIns="0" tIns="0" rIns="0" bIns="0"/>
-          <a:lstStyle>
+          <a:bodyPr xmlns:a="http://schemas.openxmlformats.org/drawingml/2006/main" lIns="0" tIns="0" rIns="0" bIns="0">
+            <a:noAutofit/>
+          </a:bodyPr>
+          <a:lstStyle xmlns:a="http://schemas.openxmlformats.org/drawingml/2006/main">
             <a:defPPr>
-              <a:defRPr sz="2400" b="0">
+              <a:defRPr sz="2800" b="0">
                 <a:solidFill>
                   <a:srgbClr val="34303E"/>
                 </a:solidFill>
+                <a:latin typeface="Aptos"/>
+                <a:ea typeface="Aptos"/>
+                <a:cs typeface="Aptos"/>
               </a:defRPr>
             </a:defPPr>
             <a:lvl1pPr>
@@ -3422,75 +3815,72 @@
               </a:defRPr>
             </a:lvl9pPr>
           </a:lstStyle>
-          <a:p>
-            <a:r>
-              <a:rPr lang="de-DE" sz="2800" b="1" dirty="0">
-                <a:solidFill>
-                  <a:srgbClr val="3702BF"/>
-                </a:solidFill>
+          <a:p xmlns:a="http://schemas.openxmlformats.org/drawingml/2006/main">
+            <a:pPr>
+              <a:defRPr sz="2800" b="0">
+                <a:solidFill>
+                  <a:srgbClr val="34303E"/>
+                </a:solidFill>
+                <a:latin typeface="Aptos"/>
+                <a:ea typeface="Aptos"/>
+                <a:cs typeface="Aptos"/>
+              </a:defRPr>
+            </a:pPr>
+            <a:r>
+              <a:rPr sz="2800" b="0">
+                <a:solidFill>
+                  <a:srgbClr val="34303E"/>
+                </a:solidFill>
+                <a:latin typeface="Aptos"/>
+                <a:ea typeface="Aptos"/>
+                <a:cs typeface="Aptos"/>
               </a:rPr>
-              <a:t>52,6 % </a:t>
-            </a:r>
-            <a:r>
-              <a:rPr lang="de-DE" sz="2800" dirty="0">
-                <a:solidFill>
-                  <a:schemeClr val="tx1"/>
-                </a:solidFill>
+              <a:t>52,6 %</a:t>
+            </a:r>
+            <a:r>
+              <a:rPr sz="2800" b="0">
+                <a:solidFill>
+                  <a:srgbClr val="34303E"/>
+                </a:solidFill>
+                <a:latin typeface="Aptos"/>
+                <a:ea typeface="Aptos"/>
+                <a:cs typeface="Aptos"/>
               </a:rPr>
-              <a:t>a</a:t>
-            </a:r>
-            <a:r>
-              <a:rPr lang="de-DE" sz="2800" dirty="0"/>
-              <a:t>ller Schüler schätzen ihre Präsentationsfähigkeit nicht als gut oder sehr gut ein.</a:t>
-            </a:r>
-          </a:p>
-          <a:p>
-            <a:pPr>
-              <a:buNone/>
-              <a:defRPr sz="2400" b="0">
-                <a:solidFill>
-                  <a:srgbClr val="34303E"/>
-                </a:solidFill>
-              </a:defRPr>
-            </a:pPr>
-            <a:endParaRPr sz="2400" b="0" dirty="0">
-              <a:solidFill>
-                <a:srgbClr val="34303E"/>
-              </a:solidFill>
-            </a:endParaRPr>
+              <a:t> der Befragten bewerten ihr Präsentieren nicht als gut oder sehr gut.</a:t>
+            </a:r>
           </a:p>
         </p:txBody>
       </p:sp>
       <p:sp>
         <p:nvSpPr>
           <p:cNvPr id="6" name="after-title">
-            <a:extLst>
+            <a:extLst xmlns:a="http://schemas.openxmlformats.org/drawingml/2006/main">
               <a:ext uri="{FF2B5EF4-FFF2-40B4-BE49-F238E27FC236}">
                 <a16:creationId xmlns:a16="http://schemas.microsoft.com/office/drawing/2014/main" id="{662B3A84-E61D-425A-8855-CBBE614FEF73}"/>
               </a:ext>
             </a:extLst>
           </p:cNvPr>
           <p:cNvSpPr>
-            <a:spLocks noGrp="1"/>
+            <a:spLocks xmlns:a="http://schemas.openxmlformats.org/drawingml/2006/main" noGrp="1"/>
           </p:cNvSpPr>
           <p:nvPr/>
         </p:nvSpPr>
         <p:spPr>
-          <a:xfrm>
+          <a:xfrm xmlns:a="http://schemas.openxmlformats.org/drawingml/2006/main">
             <a:off x="6534150" y="2258929"/>
             <a:ext cx="4857750" cy="533400"/>
           </a:xfrm>
-          <a:prstGeom prst="rect">
+          <a:prstGeom xmlns:a="http://schemas.openxmlformats.org/drawingml/2006/main" prst="rect">
             <a:avLst/>
           </a:prstGeom>
-          <a:noFill/>
-          <a:ln w="0">
+          <a:noFill xmlns:a="http://schemas.openxmlformats.org/drawingml/2006/main"/>
+          <a:ln xmlns:a="http://schemas.openxmlformats.org/drawingml/2006/main" w="0">
             <a:noFill/>
           </a:ln>
         </p:spPr>
         <p:txBody>
-          <a:bodyPr lIns="0" tIns="0" rIns="0" bIns="0"/>
-          <a:lstStyle>
+          <a:bodyPr xmlns:a="http://schemas.openxmlformats.org/drawingml/2006/main" lIns="0" tIns="0" rIns="0" bIns="0"/>
+          <a:lstStyle xmlns:a="http://schemas.openxmlformats.org/drawingml/2006/main">
             <a:defPPr>
               <a:defRPr sz="2400" b="1">
                 <a:solidFill>
@@ -3571,7 +3961,7 @@
               </a:defRPr>
             </a:lvl9pPr>
           </a:lstStyle>
-          <a:p>
+          <a:p xmlns:a="http://schemas.openxmlformats.org/drawingml/2006/main">
             <a:pPr>
               <a:buNone/>
               <a:defRPr sz="2400" b="1">
@@ -3581,14 +3971,14 @@
               </a:defRPr>
             </a:pPr>
             <a:r>
-              <a:rPr sz="3200" b="1" dirty="0" err="1">
+              <a:rPr sz="3200" b="1">
                 <a:solidFill>
                   <a:srgbClr val="3803BF"/>
                 </a:solidFill>
               </a:rPr>
-              <a:t>Folgen</a:t>
-            </a:r>
-            <a:endParaRPr sz="2400" b="1" dirty="0">
+              <a:t>Mögliche Folgen</a:t>
+            </a:r>
+            <a:endParaRPr sz="2400" b="1">
               <a:solidFill>
                 <a:srgbClr val="3803BF"/>
               </a:solidFill>
@@ -3599,33 +3989,33 @@
       <p:sp>
         <p:nvSpPr>
           <p:cNvPr id="7" name="after-body">
-            <a:extLst>
+            <a:extLst xmlns:a="http://schemas.openxmlformats.org/drawingml/2006/main">
               <a:ext uri="{FF2B5EF4-FFF2-40B4-BE49-F238E27FC236}">
                 <a16:creationId xmlns:a16="http://schemas.microsoft.com/office/drawing/2014/main" id="{A1C20363-ADE9-40E8-86AD-F55E38295249}"/>
               </a:ext>
             </a:extLst>
           </p:cNvPr>
           <p:cNvSpPr>
-            <a:spLocks noGrp="1"/>
+            <a:spLocks xmlns:a="http://schemas.openxmlformats.org/drawingml/2006/main" noGrp="1"/>
           </p:cNvSpPr>
           <p:nvPr/>
         </p:nvSpPr>
         <p:spPr>
-          <a:xfrm>
+          <a:xfrm xmlns:a="http://schemas.openxmlformats.org/drawingml/2006/main">
             <a:off x="6534150" y="2951222"/>
             <a:ext cx="5014161" cy="1809750"/>
           </a:xfrm>
-          <a:prstGeom prst="rect">
+          <a:prstGeom xmlns:a="http://schemas.openxmlformats.org/drawingml/2006/main" prst="rect">
             <a:avLst/>
           </a:prstGeom>
-          <a:noFill/>
-          <a:ln w="0">
+          <a:noFill xmlns:a="http://schemas.openxmlformats.org/drawingml/2006/main"/>
+          <a:ln xmlns:a="http://schemas.openxmlformats.org/drawingml/2006/main" w="0">
             <a:noFill/>
           </a:ln>
         </p:spPr>
         <p:txBody>
-          <a:bodyPr lIns="0" tIns="0" rIns="0" bIns="0"/>
-          <a:lstStyle>
+          <a:bodyPr xmlns:a="http://schemas.openxmlformats.org/drawingml/2006/main" lIns="0" tIns="0" rIns="0" bIns="0"/>
+          <a:lstStyle xmlns:a="http://schemas.openxmlformats.org/drawingml/2006/main">
             <a:defPPr>
               <a:defRPr sz="2250" b="0">
                 <a:solidFill>
@@ -3706,8 +4096,9 @@
               </a:defRPr>
             </a:lvl9pPr>
           </a:lstStyle>
-          <a:p>
+          <a:p xmlns:a="http://schemas.openxmlformats.org/drawingml/2006/main">
             <a:pPr>
+              <a:buNone/>
               <a:defRPr sz="2250" b="0">
                 <a:solidFill>
                   <a:srgbClr val="34303E"/>
@@ -3715,12 +4106,13 @@
               </a:defRPr>
             </a:pPr>
             <a:r>
-              <a:rPr lang="de-DE" sz="2800" dirty="0"/>
-              <a:t>geringere Beteiligung, fehlende</a:t>
+              <a:rPr sz="2800"/>
+              <a:t>Weniger Beteiligung</a:t>
             </a:r>
           </a:p>
-          <a:p>
+          <a:p xmlns:a="http://schemas.openxmlformats.org/drawingml/2006/main">
             <a:pPr>
+              <a:buNone/>
               <a:defRPr sz="2250" b="0">
                 <a:solidFill>
                   <a:srgbClr val="34303E"/>
@@ -3728,12 +4120,13 @@
               </a:defRPr>
             </a:pPr>
             <a:r>
-              <a:rPr lang="de-DE" sz="2800" dirty="0"/>
-              <a:t>Übung und Nachteile beim Aufbau wichtiger </a:t>
+              <a:rPr sz="2800"/>
+              <a:t>und weniger Übung</a:t>
             </a:r>
           </a:p>
-          <a:p>
+          <a:p xmlns:a="http://schemas.openxmlformats.org/drawingml/2006/main">
             <a:pPr>
+              <a:buNone/>
               <a:defRPr sz="2250" b="0">
                 <a:solidFill>
                   <a:srgbClr val="34303E"/>
@@ -3741,10 +4134,10 @@
               </a:defRPr>
             </a:pPr>
             <a:r>
-              <a:rPr lang="de-DE" sz="2800" dirty="0"/>
-              <a:t>Kommunikationskompetenzen.</a:t>
-            </a:r>
-            <a:endParaRPr sz="2800" b="0" dirty="0">
+              <a:rPr sz="2800"/>
+              <a:t>im freien Sprechen.</a:t>
+            </a:r>
+            <a:endParaRPr sz="2800" b="0">
               <a:solidFill>
                 <a:srgbClr val="34303E"/>
               </a:solidFill>
@@ -3755,91 +4148,166 @@
       <p:sp>
         <p:nvSpPr>
           <p:cNvPr id="8" name="Rechteck 7">
-            <a:extLst>
+            <a:extLst xmlns:a="http://schemas.openxmlformats.org/drawingml/2006/main">
               <a:ext uri="{FF2B5EF4-FFF2-40B4-BE49-F238E27FC236}">
                 <a16:creationId xmlns:a16="http://schemas.microsoft.com/office/drawing/2014/main" id="{43A96B1E-E7F5-9C4A-8791-96BCDF9100FA}"/>
               </a:ext>
             </a:extLst>
           </p:cNvPr>
-          <p:cNvSpPr/>
+          <p:cNvSpPr>
+            <a:spLocks xmlns:a="http://schemas.openxmlformats.org/drawingml/2006/main" noGrp="1"/>
+          </p:cNvSpPr>
           <p:nvPr/>
         </p:nvSpPr>
         <p:spPr>
-          <a:xfrm>
-            <a:off x="0" y="6231100"/>
-            <a:ext cx="11875168" cy="923330"/>
+          <a:xfrm xmlns:a="http://schemas.openxmlformats.org/drawingml/2006/main">
+            <a:off x="723900" y="6115050"/>
+            <a:ext cx="10820400" cy="640080"/>
           </a:xfrm>
-          <a:prstGeom prst="rect">
+          <a:prstGeom xmlns:a="http://schemas.openxmlformats.org/drawingml/2006/main" prst="rect">
             <a:avLst/>
           </a:prstGeom>
         </p:spPr>
         <p:txBody>
-          <a:bodyPr wrap="square">
+          <a:bodyPr xmlns:a="http://schemas.openxmlformats.org/drawingml/2006/main" wrap="square">
             <a:spAutoFit/>
           </a:bodyPr>
-          <a:lstStyle/>
-          <a:p>
-            <a:r>
-              <a:rPr lang="de-DE" dirty="0">
-                <a:hlinkClick r:id="rId3"/>
+          <a:lstStyle xmlns:a="http://schemas.openxmlformats.org/drawingml/2006/main">
+            <a:defPPr>
+              <a:defRPr sz="1800" b="0" u="none">
+                <a:solidFill>
+                  <a:srgbClr val="5B5365"/>
+                </a:solidFill>
+                <a:latin typeface="Aptos"/>
+                <a:ea typeface="Aptos"/>
+                <a:cs typeface="Aptos"/>
+              </a:defRPr>
+            </a:defPPr>
+          </a:lstStyle>
+          <a:p xmlns:a="http://schemas.openxmlformats.org/drawingml/2006/main">
+            <a:pPr>
+              <a:defRPr sz="1800" b="0" u="none">
+                <a:solidFill>
+                  <a:srgbClr val="5B5365"/>
+                </a:solidFill>
+                <a:latin typeface="Aptos"/>
+                <a:ea typeface="Aptos"/>
+                <a:cs typeface="Aptos"/>
+              </a:defRPr>
+            </a:pPr>
+            <a:r>
+              <a:rPr sz="1800" b="0" u="none">
+                <a:solidFill>
+                  <a:srgbClr val="5B5365"/>
+                </a:solidFill>
+                <a:latin typeface="Aptos"/>
+                <a:ea typeface="Aptos"/>
+                <a:cs typeface="Aptos"/>
+                <a:hlinkClick xmlns:r="http://schemas.openxmlformats.org/officeDocument/2006/relationships" r:id="Rda673dcb037f4dfd"/>
               </a:rPr>
-              <a:t>https://literacytrust.org.uk/research-services/research-reports/children-and-young-peoples-speaking-and-listening-in-2025/</a:t>
-            </a:r>
-            <a:endParaRPr lang="de-DE" dirty="0"/>
+              <a:t>National Literacy Trust (2025), Befragte von 8–18 Jahren</a:t>
+            </a:r>
+            <a:endParaRPr/>
           </a:p>
-          <a:p>
-            <a:r>
-              <a:rPr lang="de-DE" dirty="0">
-                <a:hlinkClick r:id="rId4"/>
+          <a:p xmlns:a="http://schemas.openxmlformats.org/drawingml/2006/main">
+            <a:pPr>
+              <a:defRPr sz="1800" b="0" u="none">
+                <a:solidFill>
+                  <a:srgbClr val="5B5365"/>
+                </a:solidFill>
+                <a:latin typeface="Aptos"/>
+                <a:ea typeface="Aptos"/>
+                <a:cs typeface="Aptos"/>
+              </a:defRPr>
+            </a:pPr>
+            <a:r>
+              <a:rPr sz="1800" b="0" u="none">
+                <a:solidFill>
+                  <a:srgbClr val="5B5365"/>
+                </a:solidFill>
+                <a:latin typeface="Aptos"/>
+                <a:ea typeface="Aptos"/>
+                <a:cs typeface="Aptos"/>
+                <a:hlinkClick xmlns:r="http://schemas.openxmlformats.org/officeDocument/2006/relationships" r:id="Redee3e6bcf5f4102"/>
               </a:rPr>
-              <a:t>https://pubmed.ncbi.nlm.nih.gov/26898522/</a:t>
-            </a:r>
-            <a:endParaRPr lang="de-DE" dirty="0"/>
-          </a:p>
-          <a:p>
-            <a:endParaRPr lang="de-DE" dirty="0"/>
+              <a:t>Marinho et al. (2017), 1.135 Studierende</a:t>
+            </a:r>
+            <a:endParaRPr/>
           </a:p>
         </p:txBody>
       </p:sp>
       <p:sp>
         <p:nvSpPr>
           <p:cNvPr id="9" name="Textfeld 8">
-            <a:extLst>
+            <a:extLst xmlns:a="http://schemas.openxmlformats.org/drawingml/2006/main">
               <a:ext uri="{FF2B5EF4-FFF2-40B4-BE49-F238E27FC236}">
                 <a16:creationId xmlns:a16="http://schemas.microsoft.com/office/drawing/2014/main" id="{F614D8A4-469D-764C-A2B1-D87E361F77ED}"/>
               </a:ext>
             </a:extLst>
           </p:cNvPr>
-          <p:cNvSpPr txBox="1"/>
+          <p:cNvSpPr>
+            <a:spLocks xmlns:a="http://schemas.openxmlformats.org/drawingml/2006/main" noGrp="1"/>
+          </p:cNvSpPr>
           <p:nvPr/>
         </p:nvSpPr>
         <p:spPr>
-          <a:xfrm>
-            <a:off x="723900" y="5266921"/>
-            <a:ext cx="10824411" cy="523220"/>
+          <a:xfrm xmlns:a="http://schemas.openxmlformats.org/drawingml/2006/main">
+            <a:off x="723900" y="5095875"/>
+            <a:ext cx="10820400" cy="944880"/>
           </a:xfrm>
-          <a:prstGeom prst="rect">
+          <a:prstGeom xmlns:a="http://schemas.openxmlformats.org/drawingml/2006/main" prst="rect">
             <a:avLst/>
           </a:prstGeom>
-          <a:noFill/>
+          <a:noFill xmlns:a="http://schemas.openxmlformats.org/drawingml/2006/main"/>
         </p:spPr>
         <p:txBody>
-          <a:bodyPr wrap="square" rtlCol="0">
-            <a:spAutoFit/>
+          <a:bodyPr xmlns:a="http://schemas.openxmlformats.org/drawingml/2006/main" wrap="square">
+            <a:noAutofit/>
           </a:bodyPr>
-          <a:lstStyle/>
-          <a:p>
-            <a:r>
-              <a:rPr lang="de-DE" sz="2800" b="1" dirty="0">
-                <a:solidFill>
-                  <a:srgbClr val="3702BF"/>
-                </a:solidFill>
+          <a:lstStyle xmlns:a="http://schemas.openxmlformats.org/drawingml/2006/main">
+            <a:defPPr>
+              <a:defRPr sz="2800" b="0">
+                <a:solidFill>
+                  <a:srgbClr val="34303E"/>
+                </a:solidFill>
+                <a:latin typeface="Aptos"/>
+                <a:ea typeface="Aptos"/>
+                <a:cs typeface="Aptos"/>
+              </a:defRPr>
+            </a:defPPr>
+          </a:lstStyle>
+          <a:p xmlns:a="http://schemas.openxmlformats.org/drawingml/2006/main">
+            <a:pPr>
+              <a:defRPr sz="2800" b="0">
+                <a:solidFill>
+                  <a:srgbClr val="34303E"/>
+                </a:solidFill>
+                <a:latin typeface="Aptos"/>
+                <a:ea typeface="Aptos"/>
+                <a:cs typeface="Aptos"/>
+              </a:defRPr>
+            </a:pPr>
+            <a:r>
+              <a:rPr sz="2800" b="0">
+                <a:solidFill>
+                  <a:srgbClr val="34303E"/>
+                </a:solidFill>
+                <a:latin typeface="Aptos"/>
+                <a:ea typeface="Aptos"/>
+                <a:cs typeface="Aptos"/>
               </a:rPr>
-              <a:t>89,3% </a:t>
-            </a:r>
-            <a:r>
-              <a:rPr lang="de-DE" sz="2800" dirty="0"/>
-              <a:t>aller befragter Schüler wünschen sich Training für Kommunikation</a:t>
+              <a:t>89,3 %</a:t>
+            </a:r>
+            <a:r>
+              <a:rPr sz="2800" b="0">
+                <a:solidFill>
+                  <a:srgbClr val="34303E"/>
+                </a:solidFill>
+                <a:latin typeface="Aptos"/>
+                <a:ea typeface="Aptos"/>
+                <a:cs typeface="Aptos"/>
+              </a:rPr>
+              <a:t> der befragten Studierenden wünschen sich Vortragstraining.</a:t>
             </a:r>
           </a:p>
         </p:txBody>
@@ -3851,21 +4319,17 @@
       </p:ext>
     </p:extLst>
   </p:cSld>
-  <p:clrMapOvr>
-    <a:masterClrMapping/>
-  </p:clrMapOvr>
 </p:sld>
 </file>
 
 <file path=ppt/slides/slide2.xml><?xml version="1.0" encoding="utf-8"?>
-<p:sld xmlns:a="http://schemas.openxmlformats.org/drawingml/2006/main" xmlns:r="http://schemas.openxmlformats.org/officeDocument/2006/relationships" xmlns:p="http://schemas.openxmlformats.org/presentationml/2006/main">
+<p:sld xmlns:p="http://schemas.openxmlformats.org/presentationml/2006/main">
   <p:cSld>
     <p:bg>
       <p:bgPr>
-        <a:solidFill>
+        <a:solidFill xmlns:a="http://schemas.openxmlformats.org/drawingml/2006/main">
           <a:srgbClr val="0C0C15"/>
         </a:solidFill>
-        <a:effectLst/>
       </p:bgPr>
     </p:bg>
     <p:spTree>
@@ -3875,43 +4339,38 @@
         <p:nvPr/>
       </p:nvGrpSpPr>
       <p:grpSpPr>
-        <a:xfrm>
-          <a:off x="0" y="0"/>
-          <a:ext cx="0" cy="0"/>
-          <a:chOff x="0" y="0"/>
-          <a:chExt cx="0" cy="0"/>
-        </a:xfrm>
+        <a:xfrm xmlns:a="http://schemas.openxmlformats.org/drawingml/2006/main"/>
       </p:grpSpPr>
       <p:sp>
         <p:nvSpPr>
           <p:cNvPr id="2" name="product-name">
-            <a:extLst>
+            <a:extLst xmlns:a="http://schemas.openxmlformats.org/drawingml/2006/main">
               <a:ext uri="{FF2B5EF4-FFF2-40B4-BE49-F238E27FC236}">
                 <a16:creationId xmlns:a16="http://schemas.microsoft.com/office/drawing/2014/main" id="{CDA635EC-5318-4565-B9AC-FB3D2DD5AD21}"/>
               </a:ext>
             </a:extLst>
           </p:cNvPr>
           <p:cNvSpPr>
-            <a:spLocks noGrp="1"/>
+            <a:spLocks xmlns:a="http://schemas.openxmlformats.org/drawingml/2006/main" noGrp="1"/>
           </p:cNvSpPr>
           <p:nvPr/>
         </p:nvSpPr>
         <p:spPr>
-          <a:xfrm>
+          <a:xfrm xmlns:a="http://schemas.openxmlformats.org/drawingml/2006/main">
             <a:off x="685800" y="333375"/>
             <a:ext cx="9525000" cy="361950"/>
           </a:xfrm>
-          <a:prstGeom prst="rect">
+          <a:prstGeom xmlns:a="http://schemas.openxmlformats.org/drawingml/2006/main" prst="rect">
             <a:avLst/>
           </a:prstGeom>
-          <a:noFill/>
-          <a:ln w="0">
+          <a:noFill xmlns:a="http://schemas.openxmlformats.org/drawingml/2006/main"/>
+          <a:ln xmlns:a="http://schemas.openxmlformats.org/drawingml/2006/main" w="0">
             <a:noFill/>
           </a:ln>
         </p:spPr>
         <p:txBody>
-          <a:bodyPr lIns="0" tIns="0" rIns="0" bIns="0"/>
-          <a:lstStyle>
+          <a:bodyPr xmlns:a="http://schemas.openxmlformats.org/drawingml/2006/main" lIns="0" tIns="0" rIns="0" bIns="0"/>
+          <a:lstStyle xmlns:a="http://schemas.openxmlformats.org/drawingml/2006/main">
             <a:defPPr>
               <a:defRPr sz="1800" b="1">
                 <a:solidFill>
@@ -3992,7 +4451,7 @@
               </a:defRPr>
             </a:lvl9pPr>
           </a:lstStyle>
-          <a:p>
+          <a:p xmlns:a="http://schemas.openxmlformats.org/drawingml/2006/main">
             <a:pPr>
               <a:buNone/>
               <a:defRPr sz="1800" b="1">
@@ -4002,7 +4461,7 @@
               </a:defRPr>
             </a:pPr>
             <a:r>
-              <a:rPr sz="2000" b="1" dirty="0">
+              <a:rPr sz="2000" b="1">
                 <a:solidFill>
                   <a:srgbClr val="B69CFF"/>
                 </a:solidFill>
@@ -4015,33 +4474,33 @@
       <p:sp>
         <p:nvSpPr>
           <p:cNvPr id="3" name="capabilities-title">
-            <a:extLst>
+            <a:extLst xmlns:a="http://schemas.openxmlformats.org/drawingml/2006/main">
               <a:ext uri="{FF2B5EF4-FFF2-40B4-BE49-F238E27FC236}">
                 <a16:creationId xmlns:a16="http://schemas.microsoft.com/office/drawing/2014/main" id="{669BD113-597A-4ACD-BC3C-21FE8DDFF343}"/>
               </a:ext>
             </a:extLst>
           </p:cNvPr>
           <p:cNvSpPr>
-            <a:spLocks noGrp="1"/>
+            <a:spLocks xmlns:a="http://schemas.openxmlformats.org/drawingml/2006/main" noGrp="1"/>
           </p:cNvSpPr>
           <p:nvPr/>
         </p:nvSpPr>
         <p:spPr>
-          <a:xfrm>
+          <a:xfrm xmlns:a="http://schemas.openxmlformats.org/drawingml/2006/main">
             <a:off x="685800" y="914400"/>
             <a:ext cx="10820400" cy="857250"/>
           </a:xfrm>
-          <a:prstGeom prst="rect">
+          <a:prstGeom xmlns:a="http://schemas.openxmlformats.org/drawingml/2006/main" prst="rect">
             <a:avLst/>
           </a:prstGeom>
-          <a:noFill/>
-          <a:ln w="0">
+          <a:noFill xmlns:a="http://schemas.openxmlformats.org/drawingml/2006/main"/>
+          <a:ln xmlns:a="http://schemas.openxmlformats.org/drawingml/2006/main" w="0">
             <a:noFill/>
           </a:ln>
         </p:spPr>
         <p:txBody>
-          <a:bodyPr lIns="0" tIns="0" rIns="0" bIns="0"/>
-          <a:lstStyle>
+          <a:bodyPr xmlns:a="http://schemas.openxmlformats.org/drawingml/2006/main" lIns="0" tIns="0" rIns="0" bIns="0"/>
+          <a:lstStyle xmlns:a="http://schemas.openxmlformats.org/drawingml/2006/main">
             <a:defPPr>
               <a:defRPr sz="4350" b="1">
                 <a:solidFill>
@@ -4122,7 +4581,7 @@
               </a:defRPr>
             </a:lvl9pPr>
           </a:lstStyle>
-          <a:p>
+          <a:p xmlns:a="http://schemas.openxmlformats.org/drawingml/2006/main">
             <a:pPr>
               <a:buNone/>
               <a:defRPr sz="4350" b="1">
@@ -4132,7 +4591,7 @@
               </a:defRPr>
             </a:pPr>
             <a:r>
-              <a:rPr sz="4800" b="1" dirty="0" err="1">
+              <a:rPr sz="4800" b="1">
                 <a:solidFill>
                   <a:srgbClr val="FFFFFF"/>
                 </a:solidFill>
@@ -4140,7 +4599,7 @@
               <a:t>Unsere</a:t>
             </a:r>
             <a:r>
-              <a:rPr sz="4800" b="1" dirty="0">
+              <a:rPr sz="4800" b="1">
                 <a:solidFill>
                   <a:srgbClr val="FFFFFF"/>
                 </a:solidFill>
@@ -4148,14 +4607,14 @@
               <a:t> </a:t>
             </a:r>
             <a:r>
-              <a:rPr sz="4800" b="1" dirty="0" err="1">
+              <a:rPr sz="4800" b="1">
                 <a:solidFill>
                   <a:srgbClr val="B69DFF"/>
                 </a:solidFill>
               </a:rPr>
               <a:t>Lösung</a:t>
             </a:r>
-            <a:endParaRPr sz="4800" b="1" dirty="0">
+            <a:endParaRPr sz="4800" b="1">
               <a:solidFill>
                 <a:srgbClr val="B69DFF"/>
               </a:solidFill>
@@ -4166,33 +4625,33 @@
       <p:sp>
         <p:nvSpPr>
           <p:cNvPr id="4" name="feature-number-0">
-            <a:extLst>
+            <a:extLst xmlns:a="http://schemas.openxmlformats.org/drawingml/2006/main">
               <a:ext uri="{FF2B5EF4-FFF2-40B4-BE49-F238E27FC236}">
                 <a16:creationId xmlns:a16="http://schemas.microsoft.com/office/drawing/2014/main" id="{03CF29D1-4B11-4B51-BDCF-741BD6CE5466}"/>
               </a:ext>
             </a:extLst>
           </p:cNvPr>
           <p:cNvSpPr>
-            <a:spLocks noGrp="1"/>
+            <a:spLocks xmlns:a="http://schemas.openxmlformats.org/drawingml/2006/main" noGrp="1"/>
           </p:cNvSpPr>
           <p:nvPr/>
         </p:nvSpPr>
         <p:spPr>
-          <a:xfrm>
+          <a:xfrm xmlns:a="http://schemas.openxmlformats.org/drawingml/2006/main">
             <a:off x="685800" y="2028825"/>
             <a:ext cx="476250" cy="400050"/>
           </a:xfrm>
-          <a:prstGeom prst="rect">
+          <a:prstGeom xmlns:a="http://schemas.openxmlformats.org/drawingml/2006/main" prst="rect">
             <a:avLst/>
           </a:prstGeom>
-          <a:noFill/>
-          <a:ln w="0">
+          <a:noFill xmlns:a="http://schemas.openxmlformats.org/drawingml/2006/main"/>
+          <a:ln xmlns:a="http://schemas.openxmlformats.org/drawingml/2006/main" w="0">
             <a:noFill/>
           </a:ln>
         </p:spPr>
         <p:txBody>
-          <a:bodyPr lIns="0" tIns="0" rIns="0" bIns="0"/>
-          <a:lstStyle>
+          <a:bodyPr xmlns:a="http://schemas.openxmlformats.org/drawingml/2006/main" lIns="0" tIns="0" rIns="0" bIns="0"/>
+          <a:lstStyle xmlns:a="http://schemas.openxmlformats.org/drawingml/2006/main">
             <a:defPPr>
               <a:defRPr sz="1950" b="1">
                 <a:solidFill>
@@ -4273,7 +4732,7 @@
               </a:defRPr>
             </a:lvl9pPr>
           </a:lstStyle>
-          <a:p>
+          <a:p xmlns:a="http://schemas.openxmlformats.org/drawingml/2006/main">
             <a:pPr>
               <a:buNone/>
               <a:defRPr sz="1950" b="1">
@@ -4296,33 +4755,33 @@
       <p:sp>
         <p:nvSpPr>
           <p:cNvPr id="5" name="feature-title-0">
-            <a:extLst>
+            <a:extLst xmlns:a="http://schemas.openxmlformats.org/drawingml/2006/main">
               <a:ext uri="{FF2B5EF4-FFF2-40B4-BE49-F238E27FC236}">
                 <a16:creationId xmlns:a16="http://schemas.microsoft.com/office/drawing/2014/main" id="{1D5E4F31-3E90-4753-831C-17C961032283}"/>
               </a:ext>
             </a:extLst>
           </p:cNvPr>
           <p:cNvSpPr>
-            <a:spLocks noGrp="1"/>
+            <a:spLocks xmlns:a="http://schemas.openxmlformats.org/drawingml/2006/main" noGrp="1"/>
           </p:cNvSpPr>
           <p:nvPr/>
         </p:nvSpPr>
         <p:spPr>
-          <a:xfrm>
+          <a:xfrm xmlns:a="http://schemas.openxmlformats.org/drawingml/2006/main">
             <a:off x="1323975" y="2000250"/>
             <a:ext cx="4619625" cy="409575"/>
           </a:xfrm>
-          <a:prstGeom prst="rect">
+          <a:prstGeom xmlns:a="http://schemas.openxmlformats.org/drawingml/2006/main" prst="rect">
             <a:avLst/>
           </a:prstGeom>
-          <a:noFill/>
-          <a:ln w="0">
+          <a:noFill xmlns:a="http://schemas.openxmlformats.org/drawingml/2006/main"/>
+          <a:ln xmlns:a="http://schemas.openxmlformats.org/drawingml/2006/main" w="0">
             <a:noFill/>
           </a:ln>
         </p:spPr>
         <p:txBody>
-          <a:bodyPr lIns="0" tIns="0" rIns="0" bIns="0"/>
-          <a:lstStyle>
+          <a:bodyPr xmlns:a="http://schemas.openxmlformats.org/drawingml/2006/main" lIns="0" tIns="0" rIns="0" bIns="0"/>
+          <a:lstStyle xmlns:a="http://schemas.openxmlformats.org/drawingml/2006/main">
             <a:defPPr>
               <a:defRPr sz="2400" b="1">
                 <a:solidFill>
@@ -4403,7 +4862,7 @@
               </a:defRPr>
             </a:lvl9pPr>
           </a:lstStyle>
-          <a:p>
+          <a:p xmlns:a="http://schemas.openxmlformats.org/drawingml/2006/main">
             <a:pPr>
               <a:buNone/>
               <a:defRPr sz="2400" b="1">
@@ -4413,7 +4872,7 @@
               </a:defRPr>
             </a:pPr>
             <a:r>
-              <a:rPr sz="2800" b="1" dirty="0" err="1">
+              <a:rPr sz="2800" b="1">
                 <a:solidFill>
                   <a:srgbClr val="FFFFFF"/>
                 </a:solidFill>
@@ -4421,7 +4880,7 @@
               <a:t>Haltung</a:t>
             </a:r>
             <a:r>
-              <a:rPr sz="2800" b="1" dirty="0">
+              <a:rPr sz="2800" b="1">
                 <a:solidFill>
                   <a:srgbClr val="FFFFFF"/>
                 </a:solidFill>
@@ -4429,14 +4888,14 @@
               <a:t> und </a:t>
             </a:r>
             <a:r>
-              <a:rPr sz="2800" b="1" dirty="0" err="1">
+              <a:rPr sz="2800" b="1">
                 <a:solidFill>
                   <a:srgbClr val="FFFFFF"/>
                 </a:solidFill>
               </a:rPr>
               <a:t>Gestik</a:t>
             </a:r>
-            <a:endParaRPr sz="2800" b="1" dirty="0">
+            <a:endParaRPr sz="2800" b="1">
               <a:solidFill>
                 <a:srgbClr val="FFFFFF"/>
               </a:solidFill>
@@ -4447,33 +4906,33 @@
       <p:sp>
         <p:nvSpPr>
           <p:cNvPr id="6" name="feature-detail-0">
-            <a:extLst>
+            <a:extLst xmlns:a="http://schemas.openxmlformats.org/drawingml/2006/main">
               <a:ext uri="{FF2B5EF4-FFF2-40B4-BE49-F238E27FC236}">
                 <a16:creationId xmlns:a16="http://schemas.microsoft.com/office/drawing/2014/main" id="{D302A9E0-7255-4A4B-9A3A-983786FDBEDE}"/>
               </a:ext>
             </a:extLst>
           </p:cNvPr>
           <p:cNvSpPr>
-            <a:spLocks noGrp="1"/>
+            <a:spLocks xmlns:a="http://schemas.openxmlformats.org/drawingml/2006/main" noGrp="1"/>
           </p:cNvSpPr>
           <p:nvPr/>
         </p:nvSpPr>
         <p:spPr>
-          <a:xfrm>
+          <a:xfrm xmlns:a="http://schemas.openxmlformats.org/drawingml/2006/main">
             <a:off x="1323975" y="2381250"/>
             <a:ext cx="4638675" cy="342900"/>
           </a:xfrm>
-          <a:prstGeom prst="rect">
+          <a:prstGeom xmlns:a="http://schemas.openxmlformats.org/drawingml/2006/main" prst="rect">
             <a:avLst/>
           </a:prstGeom>
-          <a:noFill/>
-          <a:ln w="0">
+          <a:noFill xmlns:a="http://schemas.openxmlformats.org/drawingml/2006/main"/>
+          <a:ln xmlns:a="http://schemas.openxmlformats.org/drawingml/2006/main" w="0">
             <a:noFill/>
           </a:ln>
         </p:spPr>
         <p:txBody>
-          <a:bodyPr lIns="0" tIns="0" rIns="0" bIns="0"/>
-          <a:lstStyle>
+          <a:bodyPr xmlns:a="http://schemas.openxmlformats.org/drawingml/2006/main" lIns="0" tIns="0" rIns="0" bIns="0"/>
+          <a:lstStyle xmlns:a="http://schemas.openxmlformats.org/drawingml/2006/main">
             <a:defPPr>
               <a:defRPr sz="1725" b="0">
                 <a:solidFill>
@@ -4554,7 +5013,7 @@
               </a:defRPr>
             </a:lvl9pPr>
           </a:lstStyle>
-          <a:p>
+          <a:p xmlns:a="http://schemas.openxmlformats.org/drawingml/2006/main">
             <a:pPr>
               <a:buNone/>
               <a:defRPr sz="1725" b="0">
@@ -4564,7 +5023,7 @@
               </a:defRPr>
             </a:pPr>
             <a:r>
-              <a:rPr sz="2000" b="0" dirty="0" err="1">
+              <a:rPr sz="2000" b="0">
                 <a:solidFill>
                   <a:srgbClr val="AFAABA"/>
                 </a:solidFill>
@@ -4572,7 +5031,7 @@
               <a:t>Bewegungen</a:t>
             </a:r>
             <a:r>
-              <a:rPr sz="2000" b="0" dirty="0">
+              <a:rPr sz="2000" b="0">
                 <a:solidFill>
                   <a:srgbClr val="AFAABA"/>
                 </a:solidFill>
@@ -4580,14 +5039,14 @@
               <a:t> und </a:t>
             </a:r>
             <a:r>
-              <a:rPr sz="2000" b="0" dirty="0" err="1">
+              <a:rPr sz="2000" b="0">
                 <a:solidFill>
                   <a:srgbClr val="AFAABA"/>
                 </a:solidFill>
               </a:rPr>
               <a:t>Kopforientierung</a:t>
             </a:r>
-            <a:endParaRPr sz="2000" b="0" dirty="0">
+            <a:endParaRPr sz="2000" b="0">
               <a:solidFill>
                 <a:srgbClr val="AFAABA"/>
               </a:solidFill>
@@ -4598,33 +5057,33 @@
       <p:sp>
         <p:nvSpPr>
           <p:cNvPr id="7" name="feature-number-1">
-            <a:extLst>
+            <a:extLst xmlns:a="http://schemas.openxmlformats.org/drawingml/2006/main">
               <a:ext uri="{FF2B5EF4-FFF2-40B4-BE49-F238E27FC236}">
                 <a16:creationId xmlns:a16="http://schemas.microsoft.com/office/drawing/2014/main" id="{B37E0B78-4AAA-4FDF-99CE-0D11AA21CE45}"/>
               </a:ext>
             </a:extLst>
           </p:cNvPr>
           <p:cNvSpPr>
-            <a:spLocks noGrp="1"/>
+            <a:spLocks xmlns:a="http://schemas.openxmlformats.org/drawingml/2006/main" noGrp="1"/>
           </p:cNvSpPr>
           <p:nvPr/>
         </p:nvSpPr>
         <p:spPr>
-          <a:xfrm>
+          <a:xfrm xmlns:a="http://schemas.openxmlformats.org/drawingml/2006/main">
             <a:off x="685800" y="2819400"/>
             <a:ext cx="476250" cy="400050"/>
           </a:xfrm>
-          <a:prstGeom prst="rect">
+          <a:prstGeom xmlns:a="http://schemas.openxmlformats.org/drawingml/2006/main" prst="rect">
             <a:avLst/>
           </a:prstGeom>
-          <a:noFill/>
-          <a:ln w="0">
+          <a:noFill xmlns:a="http://schemas.openxmlformats.org/drawingml/2006/main"/>
+          <a:ln xmlns:a="http://schemas.openxmlformats.org/drawingml/2006/main" w="0">
             <a:noFill/>
           </a:ln>
         </p:spPr>
         <p:txBody>
-          <a:bodyPr lIns="0" tIns="0" rIns="0" bIns="0"/>
-          <a:lstStyle>
+          <a:bodyPr xmlns:a="http://schemas.openxmlformats.org/drawingml/2006/main" lIns="0" tIns="0" rIns="0" bIns="0"/>
+          <a:lstStyle xmlns:a="http://schemas.openxmlformats.org/drawingml/2006/main">
             <a:defPPr>
               <a:defRPr sz="1950" b="1">
                 <a:solidFill>
@@ -4705,7 +5164,7 @@
               </a:defRPr>
             </a:lvl9pPr>
           </a:lstStyle>
-          <a:p>
+          <a:p xmlns:a="http://schemas.openxmlformats.org/drawingml/2006/main">
             <a:pPr>
               <a:buNone/>
               <a:defRPr sz="1950" b="1">
@@ -4728,33 +5187,33 @@
       <p:sp>
         <p:nvSpPr>
           <p:cNvPr id="8" name="feature-title-1">
-            <a:extLst>
+            <a:extLst xmlns:a="http://schemas.openxmlformats.org/drawingml/2006/main">
               <a:ext uri="{FF2B5EF4-FFF2-40B4-BE49-F238E27FC236}">
                 <a16:creationId xmlns:a16="http://schemas.microsoft.com/office/drawing/2014/main" id="{73918E85-FF62-45A9-BA85-1432A9520534}"/>
               </a:ext>
             </a:extLst>
           </p:cNvPr>
           <p:cNvSpPr>
-            <a:spLocks noGrp="1"/>
+            <a:spLocks xmlns:a="http://schemas.openxmlformats.org/drawingml/2006/main" noGrp="1"/>
           </p:cNvSpPr>
           <p:nvPr/>
         </p:nvSpPr>
         <p:spPr>
-          <a:xfrm>
+          <a:xfrm xmlns:a="http://schemas.openxmlformats.org/drawingml/2006/main">
             <a:off x="1323975" y="2790825"/>
             <a:ext cx="4619625" cy="409575"/>
           </a:xfrm>
-          <a:prstGeom prst="rect">
+          <a:prstGeom xmlns:a="http://schemas.openxmlformats.org/drawingml/2006/main" prst="rect">
             <a:avLst/>
           </a:prstGeom>
-          <a:noFill/>
-          <a:ln w="0">
+          <a:noFill xmlns:a="http://schemas.openxmlformats.org/drawingml/2006/main"/>
+          <a:ln xmlns:a="http://schemas.openxmlformats.org/drawingml/2006/main" w="0">
             <a:noFill/>
           </a:ln>
         </p:spPr>
         <p:txBody>
-          <a:bodyPr lIns="0" tIns="0" rIns="0" bIns="0"/>
-          <a:lstStyle>
+          <a:bodyPr xmlns:a="http://schemas.openxmlformats.org/drawingml/2006/main" lIns="0" tIns="0" rIns="0" bIns="0"/>
+          <a:lstStyle xmlns:a="http://schemas.openxmlformats.org/drawingml/2006/main">
             <a:defPPr>
               <a:defRPr sz="2400" b="1">
                 <a:solidFill>
@@ -4835,7 +5294,7 @@
               </a:defRPr>
             </a:lvl9pPr>
           </a:lstStyle>
-          <a:p>
+          <a:p xmlns:a="http://schemas.openxmlformats.org/drawingml/2006/main">
             <a:pPr>
               <a:buNone/>
               <a:defRPr sz="2400" b="1">
@@ -4845,14 +5304,14 @@
               </a:defRPr>
             </a:pPr>
             <a:r>
-              <a:rPr sz="2800" b="1" dirty="0" err="1">
+              <a:rPr sz="2800" b="1">
                 <a:solidFill>
                   <a:srgbClr val="FFFFFF"/>
                 </a:solidFill>
               </a:rPr>
               <a:t>Sprache</a:t>
             </a:r>
-            <a:endParaRPr sz="2400" b="1" dirty="0">
+            <a:endParaRPr sz="2400" b="1">
               <a:solidFill>
                 <a:srgbClr val="FFFFFF"/>
               </a:solidFill>
@@ -4863,33 +5322,33 @@
       <p:sp>
         <p:nvSpPr>
           <p:cNvPr id="9" name="feature-detail-1">
-            <a:extLst>
+            <a:extLst xmlns:a="http://schemas.openxmlformats.org/drawingml/2006/main">
               <a:ext uri="{FF2B5EF4-FFF2-40B4-BE49-F238E27FC236}">
                 <a16:creationId xmlns:a16="http://schemas.microsoft.com/office/drawing/2014/main" id="{89720D10-B1A4-440B-9A93-E95489698BB6}"/>
               </a:ext>
             </a:extLst>
           </p:cNvPr>
           <p:cNvSpPr>
-            <a:spLocks noGrp="1"/>
+            <a:spLocks xmlns:a="http://schemas.openxmlformats.org/drawingml/2006/main" noGrp="1"/>
           </p:cNvSpPr>
           <p:nvPr/>
         </p:nvSpPr>
         <p:spPr>
-          <a:xfrm>
+          <a:xfrm xmlns:a="http://schemas.openxmlformats.org/drawingml/2006/main">
             <a:off x="1323975" y="3171825"/>
             <a:ext cx="4638675" cy="342900"/>
           </a:xfrm>
-          <a:prstGeom prst="rect">
+          <a:prstGeom xmlns:a="http://schemas.openxmlformats.org/drawingml/2006/main" prst="rect">
             <a:avLst/>
           </a:prstGeom>
-          <a:noFill/>
-          <a:ln w="0">
+          <a:noFill xmlns:a="http://schemas.openxmlformats.org/drawingml/2006/main"/>
+          <a:ln xmlns:a="http://schemas.openxmlformats.org/drawingml/2006/main" w="0">
             <a:noFill/>
           </a:ln>
         </p:spPr>
         <p:txBody>
-          <a:bodyPr lIns="0" tIns="0" rIns="0" bIns="0"/>
-          <a:lstStyle>
+          <a:bodyPr xmlns:a="http://schemas.openxmlformats.org/drawingml/2006/main" lIns="0" tIns="0" rIns="0" bIns="0"/>
+          <a:lstStyle xmlns:a="http://schemas.openxmlformats.org/drawingml/2006/main">
             <a:defPPr>
               <a:defRPr sz="1725" b="0">
                 <a:solidFill>
@@ -4970,7 +5429,7 @@
               </a:defRPr>
             </a:lvl9pPr>
           </a:lstStyle>
-          <a:p>
+          <a:p xmlns:a="http://schemas.openxmlformats.org/drawingml/2006/main">
             <a:pPr>
               <a:buNone/>
               <a:defRPr sz="1725" b="0">
@@ -4980,7 +5439,7 @@
               </a:defRPr>
             </a:pPr>
             <a:r>
-              <a:rPr sz="2000" b="0" dirty="0" err="1">
+              <a:rPr sz="2000" b="0">
                 <a:solidFill>
                   <a:srgbClr val="AFAABA"/>
                 </a:solidFill>
@@ -4988,7 +5447,7 @@
               <a:t>Transkript</a:t>
             </a:r>
             <a:r>
-              <a:rPr sz="2000" b="0" dirty="0">
+              <a:rPr sz="2000" b="0">
                 <a:solidFill>
                   <a:srgbClr val="AFAABA"/>
                 </a:solidFill>
@@ -4996,7 +5455,7 @@
               <a:t>, Tempo, </a:t>
             </a:r>
             <a:r>
-              <a:rPr sz="2000" b="0" dirty="0" err="1">
+              <a:rPr sz="2000" b="0">
                 <a:solidFill>
                   <a:srgbClr val="AFAABA"/>
                 </a:solidFill>
@@ -5004,7 +5463,7 @@
               <a:t>Pausen</a:t>
             </a:r>
             <a:r>
-              <a:rPr sz="2000" b="0" dirty="0">
+              <a:rPr sz="2000" b="0">
                 <a:solidFill>
                   <a:srgbClr val="AFAABA"/>
                 </a:solidFill>
@@ -5012,14 +5471,14 @@
               <a:t> und </a:t>
             </a:r>
             <a:r>
-              <a:rPr sz="2000" b="0" dirty="0" err="1">
+              <a:rPr sz="2000" b="0">
                 <a:solidFill>
                   <a:srgbClr val="AFAABA"/>
                 </a:solidFill>
               </a:rPr>
               <a:t>Stimme</a:t>
             </a:r>
-            <a:endParaRPr sz="2000" b="0" dirty="0">
+            <a:endParaRPr sz="2000" b="0">
               <a:solidFill>
                 <a:srgbClr val="AFAABA"/>
               </a:solidFill>
@@ -5030,33 +5489,33 @@
       <p:sp>
         <p:nvSpPr>
           <p:cNvPr id="10" name="feature-number-2">
-            <a:extLst>
+            <a:extLst xmlns:a="http://schemas.openxmlformats.org/drawingml/2006/main">
               <a:ext uri="{FF2B5EF4-FFF2-40B4-BE49-F238E27FC236}">
                 <a16:creationId xmlns:a16="http://schemas.microsoft.com/office/drawing/2014/main" id="{983577D1-DE84-49F6-A680-28EA688E3DBA}"/>
               </a:ext>
             </a:extLst>
           </p:cNvPr>
           <p:cNvSpPr>
-            <a:spLocks noGrp="1"/>
+            <a:spLocks xmlns:a="http://schemas.openxmlformats.org/drawingml/2006/main" noGrp="1"/>
           </p:cNvSpPr>
           <p:nvPr/>
         </p:nvSpPr>
         <p:spPr>
-          <a:xfrm>
+          <a:xfrm xmlns:a="http://schemas.openxmlformats.org/drawingml/2006/main">
             <a:off x="685800" y="3609975"/>
             <a:ext cx="476250" cy="400050"/>
           </a:xfrm>
-          <a:prstGeom prst="rect">
+          <a:prstGeom xmlns:a="http://schemas.openxmlformats.org/drawingml/2006/main" prst="rect">
             <a:avLst/>
           </a:prstGeom>
-          <a:noFill/>
-          <a:ln w="0">
+          <a:noFill xmlns:a="http://schemas.openxmlformats.org/drawingml/2006/main"/>
+          <a:ln xmlns:a="http://schemas.openxmlformats.org/drawingml/2006/main" w="0">
             <a:noFill/>
           </a:ln>
         </p:spPr>
         <p:txBody>
-          <a:bodyPr lIns="0" tIns="0" rIns="0" bIns="0"/>
-          <a:lstStyle>
+          <a:bodyPr xmlns:a="http://schemas.openxmlformats.org/drawingml/2006/main" lIns="0" tIns="0" rIns="0" bIns="0"/>
+          <a:lstStyle xmlns:a="http://schemas.openxmlformats.org/drawingml/2006/main">
             <a:defPPr>
               <a:defRPr sz="1950" b="1">
                 <a:solidFill>
@@ -5137,7 +5596,7 @@
               </a:defRPr>
             </a:lvl9pPr>
           </a:lstStyle>
-          <a:p>
+          <a:p xmlns:a="http://schemas.openxmlformats.org/drawingml/2006/main">
             <a:pPr>
               <a:buNone/>
               <a:defRPr sz="1950" b="1">
@@ -5160,33 +5619,33 @@
       <p:sp>
         <p:nvSpPr>
           <p:cNvPr id="11" name="feature-title-2">
-            <a:extLst>
+            <a:extLst xmlns:a="http://schemas.openxmlformats.org/drawingml/2006/main">
               <a:ext uri="{FF2B5EF4-FFF2-40B4-BE49-F238E27FC236}">
                 <a16:creationId xmlns:a16="http://schemas.microsoft.com/office/drawing/2014/main" id="{9CCE9A92-BD9A-4F9F-9D9F-9DF50C2C4A0D}"/>
               </a:ext>
             </a:extLst>
           </p:cNvPr>
           <p:cNvSpPr>
-            <a:spLocks noGrp="1"/>
+            <a:spLocks xmlns:a="http://schemas.openxmlformats.org/drawingml/2006/main" noGrp="1"/>
           </p:cNvSpPr>
           <p:nvPr/>
         </p:nvSpPr>
         <p:spPr>
-          <a:xfrm>
+          <a:xfrm xmlns:a="http://schemas.openxmlformats.org/drawingml/2006/main">
             <a:off x="1323975" y="3581400"/>
             <a:ext cx="4619625" cy="409575"/>
           </a:xfrm>
-          <a:prstGeom prst="rect">
+          <a:prstGeom xmlns:a="http://schemas.openxmlformats.org/drawingml/2006/main" prst="rect">
             <a:avLst/>
           </a:prstGeom>
-          <a:noFill/>
-          <a:ln w="0">
+          <a:noFill xmlns:a="http://schemas.openxmlformats.org/drawingml/2006/main"/>
+          <a:ln xmlns:a="http://schemas.openxmlformats.org/drawingml/2006/main" w="0">
             <a:noFill/>
           </a:ln>
         </p:spPr>
         <p:txBody>
-          <a:bodyPr lIns="0" tIns="0" rIns="0" bIns="0"/>
-          <a:lstStyle>
+          <a:bodyPr xmlns:a="http://schemas.openxmlformats.org/drawingml/2006/main" lIns="0" tIns="0" rIns="0" bIns="0"/>
+          <a:lstStyle xmlns:a="http://schemas.openxmlformats.org/drawingml/2006/main">
             <a:defPPr>
               <a:defRPr sz="2400" b="1">
                 <a:solidFill>
@@ -5267,7 +5726,7 @@
               </a:defRPr>
             </a:lvl9pPr>
           </a:lstStyle>
-          <a:p>
+          <a:p xmlns:a="http://schemas.openxmlformats.org/drawingml/2006/main">
             <a:pPr>
               <a:buNone/>
               <a:defRPr sz="2400" b="1">
@@ -5277,14 +5736,14 @@
               </a:defRPr>
             </a:pPr>
             <a:r>
-              <a:rPr sz="2800" b="1" dirty="0" err="1">
+              <a:rPr sz="2800" b="1">
                 <a:solidFill>
                   <a:srgbClr val="FFFFFF"/>
                 </a:solidFill>
               </a:rPr>
               <a:t>Quellencheck</a:t>
             </a:r>
-            <a:endParaRPr sz="2400" b="1" dirty="0">
+            <a:endParaRPr sz="2400" b="1">
               <a:solidFill>
                 <a:srgbClr val="FFFFFF"/>
               </a:solidFill>
@@ -5295,33 +5754,33 @@
       <p:sp>
         <p:nvSpPr>
           <p:cNvPr id="12" name="feature-detail-2">
-            <a:extLst>
+            <a:extLst xmlns:a="http://schemas.openxmlformats.org/drawingml/2006/main">
               <a:ext uri="{FF2B5EF4-FFF2-40B4-BE49-F238E27FC236}">
                 <a16:creationId xmlns:a16="http://schemas.microsoft.com/office/drawing/2014/main" id="{7D8F4C59-9EAA-4E2C-94D0-C18B357CB168}"/>
               </a:ext>
             </a:extLst>
           </p:cNvPr>
           <p:cNvSpPr>
-            <a:spLocks noGrp="1"/>
+            <a:spLocks xmlns:a="http://schemas.openxmlformats.org/drawingml/2006/main" noGrp="1"/>
           </p:cNvSpPr>
           <p:nvPr/>
         </p:nvSpPr>
         <p:spPr>
-          <a:xfrm>
+          <a:xfrm xmlns:a="http://schemas.openxmlformats.org/drawingml/2006/main">
             <a:off x="1323975" y="3962400"/>
             <a:ext cx="4638675" cy="342900"/>
           </a:xfrm>
-          <a:prstGeom prst="rect">
+          <a:prstGeom xmlns:a="http://schemas.openxmlformats.org/drawingml/2006/main" prst="rect">
             <a:avLst/>
           </a:prstGeom>
-          <a:noFill/>
-          <a:ln w="0">
+          <a:noFill xmlns:a="http://schemas.openxmlformats.org/drawingml/2006/main"/>
+          <a:ln xmlns:a="http://schemas.openxmlformats.org/drawingml/2006/main" w="0">
             <a:noFill/>
           </a:ln>
         </p:spPr>
         <p:txBody>
-          <a:bodyPr lIns="0" tIns="0" rIns="0" bIns="0"/>
-          <a:lstStyle>
+          <a:bodyPr xmlns:a="http://schemas.openxmlformats.org/drawingml/2006/main" lIns="0" tIns="0" rIns="0" bIns="0"/>
+          <a:lstStyle xmlns:a="http://schemas.openxmlformats.org/drawingml/2006/main">
             <a:defPPr>
               <a:defRPr sz="1725" b="0">
                 <a:solidFill>
@@ -5402,7 +5861,7 @@
               </a:defRPr>
             </a:lvl9pPr>
           </a:lstStyle>
-          <a:p>
+          <a:p xmlns:a="http://schemas.openxmlformats.org/drawingml/2006/main">
             <a:pPr>
               <a:buNone/>
               <a:defRPr sz="1725" b="0">
@@ -5412,7 +5871,7 @@
               </a:defRPr>
             </a:pPr>
             <a:r>
-              <a:rPr sz="2000" b="0" dirty="0" err="1">
+              <a:rPr sz="2000" b="0">
                 <a:solidFill>
                   <a:srgbClr val="AFAABA"/>
                 </a:solidFill>
@@ -5420,7 +5879,7 @@
               <a:t>Aussagen</a:t>
             </a:r>
             <a:r>
-              <a:rPr sz="2000" b="0" dirty="0">
+              <a:rPr sz="2000" b="0">
                 <a:solidFill>
                   <a:srgbClr val="AFAABA"/>
                 </a:solidFill>
@@ -5428,7 +5887,7 @@
               <a:t> </a:t>
             </a:r>
             <a:r>
-              <a:rPr sz="2000" b="0" dirty="0" err="1">
+              <a:rPr sz="2000" b="0">
                 <a:solidFill>
                   <a:srgbClr val="AFAABA"/>
                 </a:solidFill>
@@ -5436,7 +5895,7 @@
               <a:t>mit</a:t>
             </a:r>
             <a:r>
-              <a:rPr sz="2000" b="0" dirty="0">
+              <a:rPr sz="2000" b="0">
                 <a:solidFill>
                   <a:srgbClr val="AFAABA"/>
                 </a:solidFill>
@@ -5444,7 +5903,7 @@
               <a:t> </a:t>
             </a:r>
             <a:r>
-              <a:rPr sz="2000" b="0" dirty="0" err="1">
+              <a:rPr sz="2000" b="0">
                 <a:solidFill>
                   <a:srgbClr val="AFAABA"/>
                 </a:solidFill>
@@ -5452,7 +5911,7 @@
               <a:t>Unterlagen</a:t>
             </a:r>
             <a:r>
-              <a:rPr sz="2000" b="0" dirty="0">
+              <a:rPr sz="2000" b="0">
                 <a:solidFill>
                   <a:srgbClr val="AFAABA"/>
                 </a:solidFill>
@@ -5460,14 +5919,14 @@
               <a:t> </a:t>
             </a:r>
             <a:r>
-              <a:rPr sz="2000" b="0" dirty="0" err="1">
+              <a:rPr sz="2000" b="0">
                 <a:solidFill>
                   <a:srgbClr val="AFAABA"/>
                 </a:solidFill>
               </a:rPr>
               <a:t>vergleichen</a:t>
             </a:r>
-            <a:endParaRPr sz="2000" b="0" dirty="0">
+            <a:endParaRPr sz="2000" b="0">
               <a:solidFill>
                 <a:srgbClr val="AFAABA"/>
               </a:solidFill>
@@ -5478,33 +5937,33 @@
       <p:sp>
         <p:nvSpPr>
           <p:cNvPr id="13" name="feature-number-3">
-            <a:extLst>
+            <a:extLst xmlns:a="http://schemas.openxmlformats.org/drawingml/2006/main">
               <a:ext uri="{FF2B5EF4-FFF2-40B4-BE49-F238E27FC236}">
                 <a16:creationId xmlns:a16="http://schemas.microsoft.com/office/drawing/2014/main" id="{297BEE6C-C6D8-412D-B29C-9AB0884F16E5}"/>
               </a:ext>
             </a:extLst>
           </p:cNvPr>
           <p:cNvSpPr>
-            <a:spLocks noGrp="1"/>
+            <a:spLocks xmlns:a="http://schemas.openxmlformats.org/drawingml/2006/main" noGrp="1"/>
           </p:cNvSpPr>
           <p:nvPr/>
         </p:nvSpPr>
         <p:spPr>
-          <a:xfrm>
+          <a:xfrm xmlns:a="http://schemas.openxmlformats.org/drawingml/2006/main">
             <a:off x="685800" y="4400550"/>
             <a:ext cx="476250" cy="400050"/>
           </a:xfrm>
-          <a:prstGeom prst="rect">
+          <a:prstGeom xmlns:a="http://schemas.openxmlformats.org/drawingml/2006/main" prst="rect">
             <a:avLst/>
           </a:prstGeom>
-          <a:noFill/>
-          <a:ln w="0">
+          <a:noFill xmlns:a="http://schemas.openxmlformats.org/drawingml/2006/main"/>
+          <a:ln xmlns:a="http://schemas.openxmlformats.org/drawingml/2006/main" w="0">
             <a:noFill/>
           </a:ln>
         </p:spPr>
         <p:txBody>
-          <a:bodyPr lIns="0" tIns="0" rIns="0" bIns="0"/>
-          <a:lstStyle>
+          <a:bodyPr xmlns:a="http://schemas.openxmlformats.org/drawingml/2006/main" lIns="0" tIns="0" rIns="0" bIns="0"/>
+          <a:lstStyle xmlns:a="http://schemas.openxmlformats.org/drawingml/2006/main">
             <a:defPPr>
               <a:defRPr sz="1950" b="1">
                 <a:solidFill>
@@ -5585,7 +6044,7 @@
               </a:defRPr>
             </a:lvl9pPr>
           </a:lstStyle>
-          <a:p>
+          <a:p xmlns:a="http://schemas.openxmlformats.org/drawingml/2006/main">
             <a:pPr>
               <a:buNone/>
               <a:defRPr sz="1950" b="1">
@@ -5608,33 +6067,33 @@
       <p:sp>
         <p:nvSpPr>
           <p:cNvPr id="14" name="feature-title-3">
-            <a:extLst>
+            <a:extLst xmlns:a="http://schemas.openxmlformats.org/drawingml/2006/main">
               <a:ext uri="{FF2B5EF4-FFF2-40B4-BE49-F238E27FC236}">
                 <a16:creationId xmlns:a16="http://schemas.microsoft.com/office/drawing/2014/main" id="{A9812A0D-22CB-4AD7-8846-42CB13AAF586}"/>
               </a:ext>
             </a:extLst>
           </p:cNvPr>
           <p:cNvSpPr>
-            <a:spLocks noGrp="1"/>
+            <a:spLocks xmlns:a="http://schemas.openxmlformats.org/drawingml/2006/main" noGrp="1"/>
           </p:cNvSpPr>
           <p:nvPr/>
         </p:nvSpPr>
         <p:spPr>
-          <a:xfrm>
+          <a:xfrm xmlns:a="http://schemas.openxmlformats.org/drawingml/2006/main">
             <a:off x="1323975" y="4371975"/>
             <a:ext cx="4619625" cy="409575"/>
           </a:xfrm>
-          <a:prstGeom prst="rect">
+          <a:prstGeom xmlns:a="http://schemas.openxmlformats.org/drawingml/2006/main" prst="rect">
             <a:avLst/>
           </a:prstGeom>
-          <a:noFill/>
-          <a:ln w="0">
+          <a:noFill xmlns:a="http://schemas.openxmlformats.org/drawingml/2006/main"/>
+          <a:ln xmlns:a="http://schemas.openxmlformats.org/drawingml/2006/main" w="0">
             <a:noFill/>
           </a:ln>
         </p:spPr>
         <p:txBody>
-          <a:bodyPr lIns="0" tIns="0" rIns="0" bIns="0"/>
-          <a:lstStyle>
+          <a:bodyPr xmlns:a="http://schemas.openxmlformats.org/drawingml/2006/main" lIns="0" tIns="0" rIns="0" bIns="0"/>
+          <a:lstStyle xmlns:a="http://schemas.openxmlformats.org/drawingml/2006/main">
             <a:defPPr>
               <a:defRPr sz="2400" b="1">
                 <a:solidFill>
@@ -5715,7 +6174,7 @@
               </a:defRPr>
             </a:lvl9pPr>
           </a:lstStyle>
-          <a:p>
+          <a:p xmlns:a="http://schemas.openxmlformats.org/drawingml/2006/main">
             <a:pPr>
               <a:buNone/>
               <a:defRPr sz="2400" b="1">
@@ -5725,7 +6184,7 @@
               </a:defRPr>
             </a:pPr>
             <a:r>
-              <a:rPr sz="2800" b="1" dirty="0">
+              <a:rPr sz="2800" b="1">
                 <a:solidFill>
                   <a:srgbClr val="FFFFFF"/>
                 </a:solidFill>
@@ -5738,33 +6197,33 @@
       <p:sp>
         <p:nvSpPr>
           <p:cNvPr id="15" name="feature-detail-3">
-            <a:extLst>
+            <a:extLst xmlns:a="http://schemas.openxmlformats.org/drawingml/2006/main">
               <a:ext uri="{FF2B5EF4-FFF2-40B4-BE49-F238E27FC236}">
                 <a16:creationId xmlns:a16="http://schemas.microsoft.com/office/drawing/2014/main" id="{3B2ECAB4-A90A-4665-86A9-B66092CED4C9}"/>
               </a:ext>
             </a:extLst>
           </p:cNvPr>
           <p:cNvSpPr>
-            <a:spLocks noGrp="1"/>
+            <a:spLocks xmlns:a="http://schemas.openxmlformats.org/drawingml/2006/main" noGrp="1"/>
           </p:cNvSpPr>
           <p:nvPr/>
         </p:nvSpPr>
         <p:spPr>
-          <a:xfrm>
+          <a:xfrm xmlns:a="http://schemas.openxmlformats.org/drawingml/2006/main">
             <a:off x="1323975" y="4752975"/>
             <a:ext cx="4638675" cy="342900"/>
           </a:xfrm>
-          <a:prstGeom prst="rect">
+          <a:prstGeom xmlns:a="http://schemas.openxmlformats.org/drawingml/2006/main" prst="rect">
             <a:avLst/>
           </a:prstGeom>
-          <a:noFill/>
-          <a:ln w="0">
+          <a:noFill xmlns:a="http://schemas.openxmlformats.org/drawingml/2006/main"/>
+          <a:ln xmlns:a="http://schemas.openxmlformats.org/drawingml/2006/main" w="0">
             <a:noFill/>
           </a:ln>
         </p:spPr>
         <p:txBody>
-          <a:bodyPr lIns="0" tIns="0" rIns="0" bIns="0"/>
-          <a:lstStyle>
+          <a:bodyPr xmlns:a="http://schemas.openxmlformats.org/drawingml/2006/main" lIns="0" tIns="0" rIns="0" bIns="0"/>
+          <a:lstStyle xmlns:a="http://schemas.openxmlformats.org/drawingml/2006/main">
             <a:defPPr>
               <a:defRPr sz="1725" b="0">
                 <a:solidFill>
@@ -5845,7 +6304,7 @@
               </a:defRPr>
             </a:lvl9pPr>
           </a:lstStyle>
-          <a:p>
+          <a:p xmlns:a="http://schemas.openxmlformats.org/drawingml/2006/main">
             <a:pPr>
               <a:buNone/>
               <a:defRPr sz="1725" b="0">
@@ -5855,46 +6314,14 @@
               </a:defRPr>
             </a:pPr>
             <a:r>
-              <a:rPr sz="2000" b="0" dirty="0" err="1">
+              <a:rPr sz="2000" b="0">
                 <a:solidFill>
                   <a:srgbClr val="AFAABA"/>
                 </a:solidFill>
               </a:rPr>
-              <a:t>Zeitmarken</a:t>
-            </a:r>
-            <a:r>
-              <a:rPr sz="2000" b="0" dirty="0">
-                <a:solidFill>
-                  <a:srgbClr val="AFAABA"/>
-                </a:solidFill>
-              </a:rPr>
-              <a:t> und </a:t>
-            </a:r>
-            <a:r>
-              <a:rPr sz="2000" b="0" dirty="0" err="1">
-                <a:solidFill>
-                  <a:srgbClr val="AFAABA"/>
-                </a:solidFill>
-              </a:rPr>
-              <a:t>konkrete</a:t>
-            </a:r>
-            <a:r>
-              <a:rPr sz="2000" b="0" dirty="0">
-                <a:solidFill>
-                  <a:srgbClr val="AFAABA"/>
-                </a:solidFill>
-              </a:rPr>
-              <a:t> </a:t>
-            </a:r>
-            <a:r>
-              <a:rPr sz="2000" b="0" dirty="0" err="1">
-                <a:solidFill>
-                  <a:srgbClr val="AFAABA"/>
-                </a:solidFill>
-              </a:rPr>
-              <a:t>Übungshinweise</a:t>
-            </a:r>
-            <a:endParaRPr sz="2000" b="0" dirty="0">
+              <a:t>Hinweise direkt an der Videostelle</a:t>
+            </a:r>
+            <a:endParaRPr sz="2000" b="0">
               <a:solidFill>
                 <a:srgbClr val="AFAABA"/>
               </a:solidFill>
@@ -5905,33 +6332,33 @@
       <p:sp>
         <p:nvSpPr>
           <p:cNvPr id="16" name="feature-number-4">
-            <a:extLst>
+            <a:extLst xmlns:a="http://schemas.openxmlformats.org/drawingml/2006/main">
               <a:ext uri="{FF2B5EF4-FFF2-40B4-BE49-F238E27FC236}">
                 <a16:creationId xmlns:a16="http://schemas.microsoft.com/office/drawing/2014/main" id="{11F4D203-BCBD-482A-8DCF-56154539D4EC}"/>
               </a:ext>
             </a:extLst>
           </p:cNvPr>
           <p:cNvSpPr>
-            <a:spLocks noGrp="1"/>
+            <a:spLocks xmlns:a="http://schemas.openxmlformats.org/drawingml/2006/main" noGrp="1"/>
           </p:cNvSpPr>
           <p:nvPr/>
         </p:nvSpPr>
         <p:spPr>
-          <a:xfrm>
+          <a:xfrm xmlns:a="http://schemas.openxmlformats.org/drawingml/2006/main">
             <a:off x="685800" y="5191125"/>
             <a:ext cx="476250" cy="400050"/>
           </a:xfrm>
-          <a:prstGeom prst="rect">
+          <a:prstGeom xmlns:a="http://schemas.openxmlformats.org/drawingml/2006/main" prst="rect">
             <a:avLst/>
           </a:prstGeom>
-          <a:noFill/>
-          <a:ln w="0">
+          <a:noFill xmlns:a="http://schemas.openxmlformats.org/drawingml/2006/main"/>
+          <a:ln xmlns:a="http://schemas.openxmlformats.org/drawingml/2006/main" w="0">
             <a:noFill/>
           </a:ln>
         </p:spPr>
         <p:txBody>
-          <a:bodyPr lIns="0" tIns="0" rIns="0" bIns="0"/>
-          <a:lstStyle>
+          <a:bodyPr xmlns:a="http://schemas.openxmlformats.org/drawingml/2006/main" lIns="0" tIns="0" rIns="0" bIns="0"/>
+          <a:lstStyle xmlns:a="http://schemas.openxmlformats.org/drawingml/2006/main">
             <a:defPPr>
               <a:defRPr sz="1950" b="1">
                 <a:solidFill>
@@ -6012,7 +6439,7 @@
               </a:defRPr>
             </a:lvl9pPr>
           </a:lstStyle>
-          <a:p>
+          <a:p xmlns:a="http://schemas.openxmlformats.org/drawingml/2006/main">
             <a:pPr>
               <a:buNone/>
               <a:defRPr sz="1950" b="1">
@@ -6035,33 +6462,33 @@
       <p:sp>
         <p:nvSpPr>
           <p:cNvPr id="17" name="feature-title-4">
-            <a:extLst>
+            <a:extLst xmlns:a="http://schemas.openxmlformats.org/drawingml/2006/main">
               <a:ext uri="{FF2B5EF4-FFF2-40B4-BE49-F238E27FC236}">
                 <a16:creationId xmlns:a16="http://schemas.microsoft.com/office/drawing/2014/main" id="{728BB6D9-B68C-4847-9F72-C77894C01F16}"/>
               </a:ext>
             </a:extLst>
           </p:cNvPr>
           <p:cNvSpPr>
-            <a:spLocks noGrp="1"/>
+            <a:spLocks xmlns:a="http://schemas.openxmlformats.org/drawingml/2006/main" noGrp="1"/>
           </p:cNvSpPr>
           <p:nvPr/>
         </p:nvSpPr>
         <p:spPr>
-          <a:xfrm>
+          <a:xfrm xmlns:a="http://schemas.openxmlformats.org/drawingml/2006/main">
             <a:off x="1323975" y="5162550"/>
             <a:ext cx="4619625" cy="409575"/>
           </a:xfrm>
-          <a:prstGeom prst="rect">
+          <a:prstGeom xmlns:a="http://schemas.openxmlformats.org/drawingml/2006/main" prst="rect">
             <a:avLst/>
           </a:prstGeom>
-          <a:noFill/>
-          <a:ln w="0">
+          <a:noFill xmlns:a="http://schemas.openxmlformats.org/drawingml/2006/main"/>
+          <a:ln xmlns:a="http://schemas.openxmlformats.org/drawingml/2006/main" w="0">
             <a:noFill/>
           </a:ln>
         </p:spPr>
         <p:txBody>
-          <a:bodyPr lIns="0" tIns="0" rIns="0" bIns="0"/>
-          <a:lstStyle>
+          <a:bodyPr xmlns:a="http://schemas.openxmlformats.org/drawingml/2006/main" lIns="0" tIns="0" rIns="0" bIns="0"/>
+          <a:lstStyle xmlns:a="http://schemas.openxmlformats.org/drawingml/2006/main">
             <a:defPPr>
               <a:defRPr sz="2400" b="1">
                 <a:solidFill>
@@ -6142,7 +6569,7 @@
               </a:defRPr>
             </a:lvl9pPr>
           </a:lstStyle>
-          <a:p>
+          <a:p xmlns:a="http://schemas.openxmlformats.org/drawingml/2006/main">
             <a:pPr>
               <a:buNone/>
               <a:defRPr sz="2400" b="1">
@@ -6152,14 +6579,14 @@
               </a:defRPr>
             </a:pPr>
             <a:r>
-              <a:rPr sz="2800" b="1" dirty="0" err="1">
+              <a:rPr sz="2800" b="1">
                 <a:solidFill>
                   <a:srgbClr val="FFFFFF"/>
                 </a:solidFill>
               </a:rPr>
               <a:t>Fragebot</a:t>
             </a:r>
-            <a:endParaRPr sz="2400" b="1" dirty="0">
+            <a:endParaRPr sz="2400" b="1">
               <a:solidFill>
                 <a:srgbClr val="FFFFFF"/>
               </a:solidFill>
@@ -6170,33 +6597,33 @@
       <p:sp>
         <p:nvSpPr>
           <p:cNvPr id="18" name="feature-detail-4">
-            <a:extLst>
+            <a:extLst xmlns:a="http://schemas.openxmlformats.org/drawingml/2006/main">
               <a:ext uri="{FF2B5EF4-FFF2-40B4-BE49-F238E27FC236}">
                 <a16:creationId xmlns:a16="http://schemas.microsoft.com/office/drawing/2014/main" id="{3644799B-5E5F-4B01-8032-DCC389033B32}"/>
               </a:ext>
             </a:extLst>
           </p:cNvPr>
           <p:cNvSpPr>
-            <a:spLocks noGrp="1"/>
+            <a:spLocks xmlns:a="http://schemas.openxmlformats.org/drawingml/2006/main" noGrp="1"/>
           </p:cNvSpPr>
           <p:nvPr/>
         </p:nvSpPr>
         <p:spPr>
-          <a:xfrm>
+          <a:xfrm xmlns:a="http://schemas.openxmlformats.org/drawingml/2006/main">
             <a:off x="1323975" y="5543550"/>
             <a:ext cx="4638675" cy="342900"/>
           </a:xfrm>
-          <a:prstGeom prst="rect">
+          <a:prstGeom xmlns:a="http://schemas.openxmlformats.org/drawingml/2006/main" prst="rect">
             <a:avLst/>
           </a:prstGeom>
-          <a:noFill/>
-          <a:ln w="0">
+          <a:noFill xmlns:a="http://schemas.openxmlformats.org/drawingml/2006/main"/>
+          <a:ln xmlns:a="http://schemas.openxmlformats.org/drawingml/2006/main" w="0">
             <a:noFill/>
           </a:ln>
         </p:spPr>
         <p:txBody>
-          <a:bodyPr lIns="0" tIns="0" rIns="0" bIns="0"/>
-          <a:lstStyle>
+          <a:bodyPr xmlns:a="http://schemas.openxmlformats.org/drawingml/2006/main" lIns="0" tIns="0" rIns="0" bIns="0"/>
+          <a:lstStyle xmlns:a="http://schemas.openxmlformats.org/drawingml/2006/main">
             <a:defPPr>
               <a:defRPr sz="1725" b="0">
                 <a:solidFill>
@@ -6277,7 +6704,7 @@
               </a:defRPr>
             </a:lvl9pPr>
           </a:lstStyle>
-          <a:p>
+          <a:p xmlns:a="http://schemas.openxmlformats.org/drawingml/2006/main">
             <a:pPr>
               <a:buNone/>
               <a:defRPr sz="1725" b="0">
@@ -6287,7 +6714,7 @@
               </a:defRPr>
             </a:pPr>
             <a:r>
-              <a:rPr sz="2000" b="0" dirty="0" err="1">
+              <a:rPr sz="2000" b="0">
                 <a:solidFill>
                   <a:srgbClr val="AFAABA"/>
                 </a:solidFill>
@@ -6295,7 +6722,7 @@
               <a:t>Rückfragen</a:t>
             </a:r>
             <a:r>
-              <a:rPr sz="2000" b="0" dirty="0">
+              <a:rPr sz="2000" b="0">
                 <a:solidFill>
                   <a:srgbClr val="AFAABA"/>
                 </a:solidFill>
@@ -6303,7 +6730,7 @@
               <a:t> </a:t>
             </a:r>
             <a:r>
-              <a:rPr sz="2000" b="0" dirty="0" err="1">
+              <a:rPr sz="2000" b="0">
                 <a:solidFill>
                   <a:srgbClr val="AFAABA"/>
                 </a:solidFill>
@@ -6311,7 +6738,7 @@
               <a:t>zum</a:t>
             </a:r>
             <a:r>
-              <a:rPr sz="2000" b="0" dirty="0">
+              <a:rPr sz="2000" b="0">
                 <a:solidFill>
                   <a:srgbClr val="AFAABA"/>
                 </a:solidFill>
@@ -6319,7 +6746,7 @@
               <a:t> </a:t>
             </a:r>
             <a:r>
-              <a:rPr sz="2000" b="0" dirty="0" err="1">
+              <a:rPr sz="2000" b="0">
                 <a:solidFill>
                   <a:srgbClr val="AFAABA"/>
                 </a:solidFill>
@@ -6327,7 +6754,7 @@
               <a:t>eigenen</a:t>
             </a:r>
             <a:r>
-              <a:rPr sz="2000" b="0" dirty="0">
+              <a:rPr sz="2000" b="0">
                 <a:solidFill>
                   <a:srgbClr val="AFAABA"/>
                 </a:solidFill>
@@ -6335,14 +6762,14 @@
               <a:t> </a:t>
             </a:r>
             <a:r>
-              <a:rPr sz="2000" b="0" dirty="0" err="1">
+              <a:rPr sz="2000" b="0">
                 <a:solidFill>
                   <a:srgbClr val="AFAABA"/>
                 </a:solidFill>
               </a:rPr>
               <a:t>Vortrag</a:t>
             </a:r>
-            <a:endParaRPr sz="2000" b="0" dirty="0">
+            <a:endParaRPr sz="2000" b="0">
               <a:solidFill>
                 <a:srgbClr val="AFAABA"/>
               </a:solidFill>
@@ -6353,27 +6780,27 @@
       <p:pic>
         <p:nvPicPr>
           <p:cNvPr id="19" name="Grafik 18">
-            <a:extLst>
+            <a:extLst xmlns:a="http://schemas.openxmlformats.org/drawingml/2006/main">
               <a:ext uri="{FF2B5EF4-FFF2-40B4-BE49-F238E27FC236}">
-                <a16:creationId xmlns:a16="http://schemas.microsoft.com/office/drawing/2014/main" id="{613EBE59-C25A-452A-B1A8-E158D1F93A04}"/>
+                <a16:creationId xmlns:a16="http://schemas.microsoft.com/office/drawing/2014/main" id="{022BCE05-14FB-4AFE-BE8C-4751A83A6E41}"/>
               </a:ext>
             </a:extLst>
           </p:cNvPr>
           <p:cNvPicPr>
-            <a:picLocks noChangeAspect="1"/>
+            <a:picLocks xmlns:a="http://schemas.openxmlformats.org/drawingml/2006/main" noChangeAspect="1"/>
           </p:cNvPicPr>
           <p:nvPr/>
         </p:nvPicPr>
         <p:blipFill>
-          <a:blip r:embed="rId3"/>
-          <a:stretch/>
+          <a:blip xmlns:r="http://schemas.openxmlformats.org/officeDocument/2006/relationships" xmlns:a="http://schemas.openxmlformats.org/drawingml/2006/main" r:embed="R8aab87fd1d614ceb"/>
+          <a:stretch xmlns:a="http://schemas.openxmlformats.org/drawingml/2006/main"/>
         </p:blipFill>
         <p:spPr>
-          <a:xfrm>
+          <a:xfrm xmlns:a="http://schemas.openxmlformats.org/drawingml/2006/main">
             <a:off x="5943600" y="1589314"/>
             <a:ext cx="6083096" cy="3423104"/>
           </a:xfrm>
-          <a:prstGeom prst="rect">
+          <a:prstGeom xmlns:a="http://schemas.openxmlformats.org/drawingml/2006/main" prst="rect">
             <a:avLst/>
           </a:prstGeom>
         </p:spPr>
@@ -6381,33 +6808,33 @@
       <p:sp>
         <p:nvSpPr>
           <p:cNvPr id="20" name="screenshot-label">
-            <a:extLst>
+            <a:extLst xmlns:a="http://schemas.openxmlformats.org/drawingml/2006/main">
               <a:ext uri="{FF2B5EF4-FFF2-40B4-BE49-F238E27FC236}">
                 <a16:creationId xmlns:a16="http://schemas.microsoft.com/office/drawing/2014/main" id="{49C3DC17-5ECA-4552-B3FC-D945249E7B88}"/>
               </a:ext>
             </a:extLst>
           </p:cNvPr>
           <p:cNvSpPr>
-            <a:spLocks noGrp="1"/>
+            <a:spLocks xmlns:a="http://schemas.openxmlformats.org/drawingml/2006/main" noGrp="1"/>
           </p:cNvSpPr>
           <p:nvPr/>
         </p:nvSpPr>
         <p:spPr>
-          <a:xfrm>
+          <a:xfrm xmlns:a="http://schemas.openxmlformats.org/drawingml/2006/main">
             <a:off x="6191250" y="5124450"/>
             <a:ext cx="5314950" cy="361950"/>
           </a:xfrm>
-          <a:prstGeom prst="rect">
+          <a:prstGeom xmlns:a="http://schemas.openxmlformats.org/drawingml/2006/main" prst="rect">
             <a:avLst/>
           </a:prstGeom>
-          <a:noFill/>
-          <a:ln w="0">
+          <a:noFill xmlns:a="http://schemas.openxmlformats.org/drawingml/2006/main"/>
+          <a:ln xmlns:a="http://schemas.openxmlformats.org/drawingml/2006/main" w="0">
             <a:noFill/>
           </a:ln>
         </p:spPr>
         <p:txBody>
-          <a:bodyPr lIns="0" tIns="0" rIns="0" bIns="0"/>
-          <a:lstStyle>
+          <a:bodyPr xmlns:a="http://schemas.openxmlformats.org/drawingml/2006/main" lIns="0" tIns="0" rIns="0" bIns="0"/>
+          <a:lstStyle xmlns:a="http://schemas.openxmlformats.org/drawingml/2006/main">
             <a:defPPr>
               <a:defRPr sz="1725" b="0">
                 <a:solidFill>
@@ -6488,7 +6915,7 @@
               </a:defRPr>
             </a:lvl9pPr>
           </a:lstStyle>
-          <a:p>
+          <a:p xmlns:a="http://schemas.openxmlformats.org/drawingml/2006/main">
             <a:pPr>
               <a:buNone/>
               <a:defRPr sz="1725" b="0">
@@ -6498,7 +6925,7 @@
               </a:defRPr>
             </a:pPr>
             <a:r>
-              <a:rPr sz="2000" b="0" dirty="0" err="1">
+              <a:rPr sz="2000" b="0">
                 <a:solidFill>
                   <a:srgbClr val="AFAABA"/>
                 </a:solidFill>
@@ -6506,7 +6933,7 @@
               <a:t>Beispielansicht</a:t>
             </a:r>
             <a:r>
-              <a:rPr sz="2000" b="0" dirty="0">
+              <a:rPr sz="2000" b="0">
                 <a:solidFill>
                   <a:srgbClr val="AFAABA"/>
                 </a:solidFill>
@@ -6514,7 +6941,7 @@
               <a:t> </a:t>
             </a:r>
             <a:r>
-              <a:rPr sz="2000" b="0" dirty="0" err="1">
+              <a:rPr sz="2000" b="0">
                 <a:solidFill>
                   <a:srgbClr val="AFAABA"/>
                 </a:solidFill>
@@ -6522,7 +6949,7 @@
               <a:t>mit</a:t>
             </a:r>
             <a:r>
-              <a:rPr sz="2000" b="0" dirty="0">
+              <a:rPr sz="2000" b="0">
                 <a:solidFill>
                   <a:srgbClr val="AFAABA"/>
                 </a:solidFill>
@@ -6530,7 +6957,7 @@
               <a:t> </a:t>
             </a:r>
             <a:r>
-              <a:rPr sz="2000" b="0" dirty="0" err="1">
+              <a:rPr sz="2000" b="0">
                 <a:solidFill>
                   <a:srgbClr val="AFAABA"/>
                 </a:solidFill>
@@ -6538,7 +6965,7 @@
               <a:t>synthetischen</a:t>
             </a:r>
             <a:r>
-              <a:rPr sz="2000" b="0" dirty="0">
+              <a:rPr sz="2000" b="0">
                 <a:solidFill>
                   <a:srgbClr val="AFAABA"/>
                 </a:solidFill>
@@ -6546,14 +6973,14 @@
               <a:t> </a:t>
             </a:r>
             <a:r>
-              <a:rPr sz="2000" b="0" dirty="0" err="1">
+              <a:rPr sz="2000" b="0">
                 <a:solidFill>
                   <a:srgbClr val="AFAABA"/>
                 </a:solidFill>
               </a:rPr>
               <a:t>Daten</a:t>
             </a:r>
-            <a:endParaRPr sz="2000" b="0" dirty="0">
+            <a:endParaRPr sz="2000" b="0">
               <a:solidFill>
                 <a:srgbClr val="AFAABA"/>
               </a:solidFill>
@@ -6564,33 +6991,33 @@
       <p:sp>
         <p:nvSpPr>
           <p:cNvPr id="21" name="review-value">
-            <a:extLst>
+            <a:extLst xmlns:a="http://schemas.openxmlformats.org/drawingml/2006/main">
               <a:ext uri="{FF2B5EF4-FFF2-40B4-BE49-F238E27FC236}">
                 <a16:creationId xmlns:a16="http://schemas.microsoft.com/office/drawing/2014/main" id="{63B10CFF-1375-4FBA-9D8D-70924BBFBF90}"/>
               </a:ext>
             </a:extLst>
           </p:cNvPr>
           <p:cNvSpPr>
-            <a:spLocks noGrp="1"/>
+            <a:spLocks xmlns:a="http://schemas.openxmlformats.org/drawingml/2006/main" noGrp="1"/>
           </p:cNvSpPr>
           <p:nvPr/>
         </p:nvSpPr>
         <p:spPr>
-          <a:xfrm>
-            <a:off x="6176735" y="5638800"/>
-            <a:ext cx="6755493" cy="876300"/>
+          <a:xfrm xmlns:a="http://schemas.openxmlformats.org/drawingml/2006/main">
+            <a:off x="6176772" y="5638800"/>
+            <a:ext cx="5314950" cy="762000"/>
           </a:xfrm>
-          <a:prstGeom prst="rect">
+          <a:prstGeom xmlns:a="http://schemas.openxmlformats.org/drawingml/2006/main" prst="rect">
             <a:avLst/>
           </a:prstGeom>
-          <a:noFill/>
-          <a:ln w="0">
+          <a:noFill xmlns:a="http://schemas.openxmlformats.org/drawingml/2006/main"/>
+          <a:ln xmlns:a="http://schemas.openxmlformats.org/drawingml/2006/main" w="0">
             <a:noFill/>
           </a:ln>
         </p:spPr>
         <p:txBody>
-          <a:bodyPr lIns="0" tIns="0" rIns="0" bIns="0"/>
-          <a:lstStyle>
+          <a:bodyPr xmlns:a="http://schemas.openxmlformats.org/drawingml/2006/main" lIns="0" tIns="0" rIns="0" bIns="0"/>
+          <a:lstStyle xmlns:a="http://schemas.openxmlformats.org/drawingml/2006/main">
             <a:defPPr>
               <a:defRPr sz="2550" b="1">
                 <a:solidFill>
@@ -6671,7 +7098,7 @@
               </a:defRPr>
             </a:lvl9pPr>
           </a:lstStyle>
-          <a:p>
+          <a:p xmlns:a="http://schemas.openxmlformats.org/drawingml/2006/main">
             <a:pPr>
               <a:buNone/>
               <a:defRPr sz="2550" b="1">
@@ -6681,50 +7108,14 @@
               </a:defRPr>
             </a:pPr>
             <a:r>
-              <a:rPr sz="2550" b="1" dirty="0">
+              <a:rPr sz="2550" b="1">
                 <a:solidFill>
                   <a:srgbClr val="FFFFFF"/>
                 </a:solidFill>
               </a:rPr>
-              <a:t>Feedback an </a:t>
-            </a:r>
-            <a:r>
-              <a:rPr sz="2550" b="1" dirty="0" err="1">
-                <a:solidFill>
-                  <a:srgbClr val="FFFFFF"/>
-                </a:solidFill>
-              </a:rPr>
-              <a:t>einer</a:t>
-            </a:r>
-            <a:r>
-              <a:rPr lang="de-DE" dirty="0"/>
-              <a:t> </a:t>
-            </a:r>
-            <a:r>
-              <a:rPr sz="2550" b="1" dirty="0" err="1">
-                <a:solidFill>
-                  <a:srgbClr val="FFFFFF"/>
-                </a:solidFill>
-              </a:rPr>
-              <a:t>konkreten</a:t>
-            </a:r>
-            <a:r>
-              <a:rPr sz="2550" b="1" dirty="0">
-                <a:solidFill>
-                  <a:srgbClr val="FFFFFF"/>
-                </a:solidFill>
-              </a:rPr>
-              <a:t> </a:t>
-            </a:r>
-            <a:r>
-              <a:rPr sz="2550" b="1" dirty="0" err="1">
-                <a:solidFill>
-                  <a:srgbClr val="FFFFFF"/>
-                </a:solidFill>
-              </a:rPr>
-              <a:t>Videostelle</a:t>
-            </a:r>
-            <a:endParaRPr sz="2550" b="1" dirty="0">
+              <a:t>Feedback direkt im Video</a:t>
+            </a:r>
+            <a:endParaRPr sz="2550" b="1">
               <a:solidFill>
                 <a:srgbClr val="FFFFFF"/>
               </a:solidFill>
@@ -6739,21 +7130,17 @@
       </p:ext>
     </p:extLst>
   </p:cSld>
-  <p:clrMapOvr>
-    <a:masterClrMapping/>
-  </p:clrMapOvr>
 </p:sld>
 </file>
 
 <file path=ppt/slides/slide3.xml><?xml version="1.0" encoding="utf-8"?>
-<p:sld xmlns:a="http://schemas.openxmlformats.org/drawingml/2006/main" xmlns:r="http://schemas.openxmlformats.org/officeDocument/2006/relationships" xmlns:p="http://schemas.openxmlformats.org/presentationml/2006/main">
+<p:sld xmlns:p="http://schemas.openxmlformats.org/presentationml/2006/main">
   <p:cSld>
     <p:bg>
       <p:bgPr>
-        <a:solidFill>
+        <a:solidFill xmlns:a="http://schemas.openxmlformats.org/drawingml/2006/main">
           <a:srgbClr val="FAF9FC"/>
         </a:solidFill>
-        <a:effectLst/>
       </p:bgPr>
     </p:bg>
     <p:spTree>
@@ -6763,43 +7150,38 @@
         <p:nvPr/>
       </p:nvGrpSpPr>
       <p:grpSpPr>
-        <a:xfrm>
-          <a:off x="0" y="0"/>
-          <a:ext cx="0" cy="0"/>
-          <a:chOff x="0" y="0"/>
-          <a:chExt cx="0" cy="0"/>
-        </a:xfrm>
+        <a:xfrm xmlns:a="http://schemas.openxmlformats.org/drawingml/2006/main"/>
       </p:grpSpPr>
       <p:sp>
         <p:nvSpPr>
           <p:cNvPr id="2" name="ai-title">
-            <a:extLst>
+            <a:extLst xmlns:a="http://schemas.openxmlformats.org/drawingml/2006/main">
               <a:ext uri="{FF2B5EF4-FFF2-40B4-BE49-F238E27FC236}">
                 <a16:creationId xmlns:a16="http://schemas.microsoft.com/office/drawing/2014/main" id="{6BEDC086-4D77-4BC2-955A-4DB24E4BB76D}"/>
               </a:ext>
             </a:extLst>
           </p:cNvPr>
           <p:cNvSpPr>
-            <a:spLocks noGrp="1"/>
+            <a:spLocks xmlns:a="http://schemas.openxmlformats.org/drawingml/2006/main" noGrp="1"/>
           </p:cNvSpPr>
           <p:nvPr/>
         </p:nvSpPr>
         <p:spPr>
-          <a:xfrm>
+          <a:xfrm xmlns:a="http://schemas.openxmlformats.org/drawingml/2006/main">
             <a:off x="685800" y="581025"/>
             <a:ext cx="10820400" cy="857250"/>
           </a:xfrm>
-          <a:prstGeom prst="rect">
+          <a:prstGeom xmlns:a="http://schemas.openxmlformats.org/drawingml/2006/main" prst="rect">
             <a:avLst/>
           </a:prstGeom>
-          <a:noFill/>
-          <a:ln w="0">
+          <a:noFill xmlns:a="http://schemas.openxmlformats.org/drawingml/2006/main"/>
+          <a:ln xmlns:a="http://schemas.openxmlformats.org/drawingml/2006/main" w="0">
             <a:noFill/>
           </a:ln>
         </p:spPr>
         <p:txBody>
-          <a:bodyPr lIns="0" tIns="0" rIns="0" bIns="0"/>
-          <a:lstStyle>
+          <a:bodyPr xmlns:a="http://schemas.openxmlformats.org/drawingml/2006/main" lIns="0" tIns="0" rIns="0" bIns="0"/>
+          <a:lstStyle xmlns:a="http://schemas.openxmlformats.org/drawingml/2006/main">
             <a:defPPr>
               <a:defRPr sz="4350" b="1">
                 <a:solidFill>
@@ -6880,7 +7262,7 @@
               </a:defRPr>
             </a:lvl9pPr>
           </a:lstStyle>
-          <a:p>
+          <a:p xmlns:a="http://schemas.openxmlformats.org/drawingml/2006/main">
             <a:pPr>
               <a:buNone/>
               <a:defRPr sz="4350" b="1">
@@ -6890,7 +7272,7 @@
               </a:defRPr>
             </a:pPr>
             <a:r>
-              <a:rPr sz="4800" b="1" dirty="0">
+              <a:rPr sz="4800" b="1">
                 <a:solidFill>
                   <a:srgbClr val="3702BF"/>
                 </a:solidFill>
@@ -6898,7 +7280,7 @@
               <a:t>Unser </a:t>
             </a:r>
             <a:r>
-              <a:rPr sz="4800" b="1" dirty="0" err="1">
+              <a:rPr sz="4800" b="1">
                 <a:solidFill>
                   <a:srgbClr val="3702BF"/>
                 </a:solidFill>
@@ -6906,7 +7288,7 @@
               <a:t>Einsatz</a:t>
             </a:r>
             <a:r>
-              <a:rPr sz="4800" b="1" dirty="0">
+              <a:rPr sz="4800" b="1">
                 <a:solidFill>
                   <a:srgbClr val="3702BF"/>
                 </a:solidFill>
@@ -6919,33 +7301,33 @@
       <p:sp>
         <p:nvSpPr>
           <p:cNvPr id="3" name="ai-product-heading">
-            <a:extLst>
+            <a:extLst xmlns:a="http://schemas.openxmlformats.org/drawingml/2006/main">
               <a:ext uri="{FF2B5EF4-FFF2-40B4-BE49-F238E27FC236}">
                 <a16:creationId xmlns:a16="http://schemas.microsoft.com/office/drawing/2014/main" id="{BA5D3514-7682-4557-8BAE-3B78A270646D}"/>
               </a:ext>
             </a:extLst>
           </p:cNvPr>
           <p:cNvSpPr>
-            <a:spLocks noGrp="1"/>
+            <a:spLocks xmlns:a="http://schemas.openxmlformats.org/drawingml/2006/main" noGrp="1"/>
           </p:cNvSpPr>
           <p:nvPr/>
         </p:nvSpPr>
         <p:spPr>
-          <a:xfrm>
+          <a:xfrm xmlns:a="http://schemas.openxmlformats.org/drawingml/2006/main">
             <a:off x="685800" y="1724025"/>
             <a:ext cx="4953000" cy="495300"/>
           </a:xfrm>
-          <a:prstGeom prst="rect">
+          <a:prstGeom xmlns:a="http://schemas.openxmlformats.org/drawingml/2006/main" prst="rect">
             <a:avLst/>
           </a:prstGeom>
-          <a:noFill/>
-          <a:ln w="0">
+          <a:noFill xmlns:a="http://schemas.openxmlformats.org/drawingml/2006/main"/>
+          <a:ln xmlns:a="http://schemas.openxmlformats.org/drawingml/2006/main" w="0">
             <a:noFill/>
           </a:ln>
         </p:spPr>
         <p:txBody>
-          <a:bodyPr lIns="0" tIns="0" rIns="0" bIns="0"/>
-          <a:lstStyle>
+          <a:bodyPr xmlns:a="http://schemas.openxmlformats.org/drawingml/2006/main" lIns="0" tIns="0" rIns="0" bIns="0"/>
+          <a:lstStyle xmlns:a="http://schemas.openxmlformats.org/drawingml/2006/main">
             <a:defPPr>
               <a:defRPr sz="2625" b="1">
                 <a:solidFill>
@@ -7026,7 +7408,7 @@
               </a:defRPr>
             </a:lvl9pPr>
           </a:lstStyle>
-          <a:p>
+          <a:p xmlns:a="http://schemas.openxmlformats.org/drawingml/2006/main">
             <a:pPr>
               <a:buNone/>
               <a:defRPr sz="2625" b="1">
@@ -7036,7 +7418,7 @@
               </a:defRPr>
             </a:pPr>
             <a:r>
-              <a:rPr sz="2800" b="1" dirty="0" err="1">
+              <a:rPr sz="2800" b="1">
                 <a:solidFill>
                   <a:srgbClr val="3803BF"/>
                 </a:solidFill>
@@ -7044,7 +7426,7 @@
               <a:t>Im</a:t>
             </a:r>
             <a:r>
-              <a:rPr sz="2800" b="1" dirty="0">
+              <a:rPr sz="2800" b="1">
                 <a:solidFill>
                   <a:srgbClr val="3803BF"/>
                 </a:solidFill>
@@ -7052,14 +7434,14 @@
               <a:t> </a:t>
             </a:r>
             <a:r>
-              <a:rPr sz="2800" b="1" dirty="0" err="1">
+              <a:rPr sz="2800" b="1">
                 <a:solidFill>
                   <a:srgbClr val="3803BF"/>
                 </a:solidFill>
               </a:rPr>
               <a:t>Produkt</a:t>
             </a:r>
-            <a:endParaRPr sz="2800" b="1" dirty="0">
+            <a:endParaRPr sz="2800" b="1">
               <a:solidFill>
                 <a:srgbClr val="3803BF"/>
               </a:solidFill>
@@ -7070,33 +7452,33 @@
       <p:sp>
         <p:nvSpPr>
           <p:cNvPr id="4" name="ai-product-0">
-            <a:extLst>
+            <a:extLst xmlns:a="http://schemas.openxmlformats.org/drawingml/2006/main">
               <a:ext uri="{FF2B5EF4-FFF2-40B4-BE49-F238E27FC236}">
                 <a16:creationId xmlns:a16="http://schemas.microsoft.com/office/drawing/2014/main" id="{7568A304-6AE0-450B-8A7F-5557600AFE76}"/>
               </a:ext>
             </a:extLst>
           </p:cNvPr>
           <p:cNvSpPr>
-            <a:spLocks noGrp="1"/>
+            <a:spLocks xmlns:a="http://schemas.openxmlformats.org/drawingml/2006/main" noGrp="1"/>
           </p:cNvSpPr>
           <p:nvPr/>
         </p:nvSpPr>
         <p:spPr>
-          <a:xfrm>
+          <a:xfrm xmlns:a="http://schemas.openxmlformats.org/drawingml/2006/main">
             <a:off x="685800" y="2428875"/>
             <a:ext cx="5095875" cy="371475"/>
           </a:xfrm>
-          <a:prstGeom prst="rect">
+          <a:prstGeom xmlns:a="http://schemas.openxmlformats.org/drawingml/2006/main" prst="rect">
             <a:avLst/>
           </a:prstGeom>
-          <a:noFill/>
-          <a:ln w="0">
+          <a:noFill xmlns:a="http://schemas.openxmlformats.org/drawingml/2006/main"/>
+          <a:ln xmlns:a="http://schemas.openxmlformats.org/drawingml/2006/main" w="0">
             <a:noFill/>
           </a:ln>
         </p:spPr>
         <p:txBody>
-          <a:bodyPr lIns="0" tIns="0" rIns="0" bIns="0"/>
-          <a:lstStyle>
+          <a:bodyPr xmlns:a="http://schemas.openxmlformats.org/drawingml/2006/main" lIns="0" tIns="0" rIns="0" bIns="0"/>
+          <a:lstStyle xmlns:a="http://schemas.openxmlformats.org/drawingml/2006/main">
             <a:defPPr>
               <a:defRPr sz="1950" b="0">
                 <a:solidFill>
@@ -7177,7 +7559,7 @@
               </a:defRPr>
             </a:lvl9pPr>
           </a:lstStyle>
-          <a:p>
+          <a:p xmlns:a="http://schemas.openxmlformats.org/drawingml/2006/main">
             <a:pPr>
               <a:buNone/>
               <a:defRPr sz="1950" b="0">
@@ -7187,7 +7569,7 @@
               </a:defRPr>
             </a:pPr>
             <a:r>
-              <a:rPr sz="2400" b="0" dirty="0" err="1">
+              <a:rPr sz="2400" b="0">
                 <a:solidFill>
                   <a:srgbClr val="35303F"/>
                 </a:solidFill>
@@ -7195,7 +7577,7 @@
               <a:t>MediaPipe</a:t>
             </a:r>
             <a:r>
-              <a:rPr sz="2400" b="0" dirty="0">
+              <a:rPr sz="2400" b="0">
                 <a:solidFill>
                   <a:srgbClr val="35303F"/>
                 </a:solidFill>
@@ -7203,7 +7585,7 @@
               <a:t>: </a:t>
             </a:r>
             <a:r>
-              <a:rPr sz="2400" b="0" dirty="0" err="1">
+              <a:rPr sz="2400" b="0">
                 <a:solidFill>
                   <a:srgbClr val="35303F"/>
                 </a:solidFill>
@@ -7211,7 +7593,7 @@
               <a:t>Körper</a:t>
             </a:r>
             <a:r>
-              <a:rPr sz="2400" b="0" dirty="0">
+              <a:rPr sz="2400" b="0">
                 <a:solidFill>
                   <a:srgbClr val="35303F"/>
                 </a:solidFill>
@@ -7219,14 +7601,14 @@
               <a:t>- und </a:t>
             </a:r>
             <a:r>
-              <a:rPr sz="2400" b="0" dirty="0" err="1">
+              <a:rPr sz="2400" b="0">
                 <a:solidFill>
                   <a:srgbClr val="35303F"/>
                 </a:solidFill>
               </a:rPr>
               <a:t>Handpunkte</a:t>
             </a:r>
-            <a:endParaRPr sz="2400" b="0" dirty="0">
+            <a:endParaRPr sz="2400" b="0">
               <a:solidFill>
                 <a:srgbClr val="35303F"/>
               </a:solidFill>
@@ -7237,33 +7619,33 @@
       <p:sp>
         <p:nvSpPr>
           <p:cNvPr id="5" name="ai-product-1">
-            <a:extLst>
+            <a:extLst xmlns:a="http://schemas.openxmlformats.org/drawingml/2006/main">
               <a:ext uri="{FF2B5EF4-FFF2-40B4-BE49-F238E27FC236}">
                 <a16:creationId xmlns:a16="http://schemas.microsoft.com/office/drawing/2014/main" id="{B28910B6-4159-40EE-B936-D9F5EEC1299D}"/>
               </a:ext>
             </a:extLst>
           </p:cNvPr>
           <p:cNvSpPr>
-            <a:spLocks noGrp="1"/>
+            <a:spLocks xmlns:a="http://schemas.openxmlformats.org/drawingml/2006/main" noGrp="1"/>
           </p:cNvSpPr>
           <p:nvPr/>
         </p:nvSpPr>
         <p:spPr>
-          <a:xfrm>
+          <a:xfrm xmlns:a="http://schemas.openxmlformats.org/drawingml/2006/main">
             <a:off x="685800" y="2847975"/>
             <a:ext cx="5095875" cy="371475"/>
           </a:xfrm>
-          <a:prstGeom prst="rect">
+          <a:prstGeom xmlns:a="http://schemas.openxmlformats.org/drawingml/2006/main" prst="rect">
             <a:avLst/>
           </a:prstGeom>
-          <a:noFill/>
-          <a:ln w="0">
+          <a:noFill xmlns:a="http://schemas.openxmlformats.org/drawingml/2006/main"/>
+          <a:ln xmlns:a="http://schemas.openxmlformats.org/drawingml/2006/main" w="0">
             <a:noFill/>
           </a:ln>
         </p:spPr>
         <p:txBody>
-          <a:bodyPr lIns="0" tIns="0" rIns="0" bIns="0"/>
-          <a:lstStyle>
+          <a:bodyPr xmlns:a="http://schemas.openxmlformats.org/drawingml/2006/main" lIns="0" tIns="0" rIns="0" bIns="0"/>
+          <a:lstStyle xmlns:a="http://schemas.openxmlformats.org/drawingml/2006/main">
             <a:defPPr>
               <a:defRPr sz="1950" b="0">
                 <a:solidFill>
@@ -7344,7 +7726,7 @@
               </a:defRPr>
             </a:lvl9pPr>
           </a:lstStyle>
-          <a:p>
+          <a:p xmlns:a="http://schemas.openxmlformats.org/drawingml/2006/main">
             <a:pPr>
               <a:buNone/>
               <a:defRPr sz="1950" b="0">
@@ -7354,38 +7736,14 @@
               </a:defRPr>
             </a:pPr>
             <a:r>
-              <a:rPr sz="2400" b="0" dirty="0">
+              <a:rPr sz="2400" b="0">
                 <a:solidFill>
                   <a:srgbClr val="35303F"/>
                 </a:solidFill>
               </a:rPr>
-              <a:t>Whisper / </a:t>
-            </a:r>
-            <a:r>
-              <a:rPr sz="2400" b="0" dirty="0" err="1">
-                <a:solidFill>
-                  <a:srgbClr val="35303F"/>
-                </a:solidFill>
-              </a:rPr>
-              <a:t>Deepgram</a:t>
-            </a:r>
-            <a:r>
-              <a:rPr sz="2400" b="0" dirty="0">
-                <a:solidFill>
-                  <a:srgbClr val="35303F"/>
-                </a:solidFill>
-              </a:rPr>
-              <a:t>: </a:t>
-            </a:r>
-            <a:r>
-              <a:rPr sz="2400" b="0" dirty="0" err="1">
-                <a:solidFill>
-                  <a:srgbClr val="35303F"/>
-                </a:solidFill>
-              </a:rPr>
-              <a:t>Transkription</a:t>
-            </a:r>
-            <a:endParaRPr sz="2400" b="0" dirty="0">
+              <a:t>Whisper: lokale Transkription</a:t>
+            </a:r>
+            <a:endParaRPr sz="2400" b="0">
               <a:solidFill>
                 <a:srgbClr val="35303F"/>
               </a:solidFill>
@@ -7396,33 +7754,33 @@
       <p:sp>
         <p:nvSpPr>
           <p:cNvPr id="6" name="ai-product-2">
-            <a:extLst>
+            <a:extLst xmlns:a="http://schemas.openxmlformats.org/drawingml/2006/main">
               <a:ext uri="{FF2B5EF4-FFF2-40B4-BE49-F238E27FC236}">
                 <a16:creationId xmlns:a16="http://schemas.microsoft.com/office/drawing/2014/main" id="{9C4D3A2A-C8D3-4DE8-9CFB-84DD9D94A628}"/>
               </a:ext>
             </a:extLst>
           </p:cNvPr>
           <p:cNvSpPr>
-            <a:spLocks noGrp="1"/>
+            <a:spLocks xmlns:a="http://schemas.openxmlformats.org/drawingml/2006/main" noGrp="1"/>
           </p:cNvSpPr>
           <p:nvPr/>
         </p:nvSpPr>
         <p:spPr>
-          <a:xfrm>
+          <a:xfrm xmlns:a="http://schemas.openxmlformats.org/drawingml/2006/main">
             <a:off x="685800" y="3267075"/>
             <a:ext cx="5095875" cy="371475"/>
           </a:xfrm>
-          <a:prstGeom prst="rect">
+          <a:prstGeom xmlns:a="http://schemas.openxmlformats.org/drawingml/2006/main" prst="rect">
             <a:avLst/>
           </a:prstGeom>
-          <a:noFill/>
-          <a:ln w="0">
+          <a:noFill xmlns:a="http://schemas.openxmlformats.org/drawingml/2006/main"/>
+          <a:ln xmlns:a="http://schemas.openxmlformats.org/drawingml/2006/main" w="0">
             <a:noFill/>
           </a:ln>
         </p:spPr>
         <p:txBody>
-          <a:bodyPr lIns="0" tIns="0" rIns="0" bIns="0"/>
-          <a:lstStyle>
+          <a:bodyPr xmlns:a="http://schemas.openxmlformats.org/drawingml/2006/main" lIns="0" tIns="0" rIns="0" bIns="0"/>
+          <a:lstStyle xmlns:a="http://schemas.openxmlformats.org/drawingml/2006/main">
             <a:defPPr>
               <a:defRPr sz="1950" b="0">
                 <a:solidFill>
@@ -7503,7 +7861,7 @@
               </a:defRPr>
             </a:lvl9pPr>
           </a:lstStyle>
-          <a:p>
+          <a:p xmlns:a="http://schemas.openxmlformats.org/drawingml/2006/main">
             <a:pPr>
               <a:buNone/>
               <a:defRPr sz="1950" b="0">
@@ -7513,38 +7871,14 @@
               </a:defRPr>
             </a:pPr>
             <a:r>
-              <a:rPr sz="2400" b="0" dirty="0">
+              <a:rPr sz="2400" b="0">
                 <a:solidFill>
                   <a:srgbClr val="35303F"/>
                 </a:solidFill>
               </a:rPr>
-              <a:t>Embeddings: </a:t>
-            </a:r>
-            <a:r>
-              <a:rPr sz="2400" b="0" dirty="0" err="1">
-                <a:solidFill>
-                  <a:srgbClr val="35303F"/>
-                </a:solidFill>
-              </a:rPr>
-              <a:t>passende</a:t>
-            </a:r>
-            <a:r>
-              <a:rPr sz="2400" b="0" dirty="0">
-                <a:solidFill>
-                  <a:srgbClr val="35303F"/>
-                </a:solidFill>
-              </a:rPr>
-              <a:t> </a:t>
-            </a:r>
-            <a:r>
-              <a:rPr sz="2400" b="0" dirty="0" err="1">
-                <a:solidFill>
-                  <a:srgbClr val="35303F"/>
-                </a:solidFill>
-              </a:rPr>
-              <a:t>Quellenstellen</a:t>
-            </a:r>
-            <a:endParaRPr sz="2400" b="0" dirty="0">
+              <a:t>Jina Embeddings: Quellensuche</a:t>
+            </a:r>
+            <a:endParaRPr sz="2400" b="0">
               <a:solidFill>
                 <a:srgbClr val="35303F"/>
               </a:solidFill>
@@ -7555,33 +7889,33 @@
       <p:sp>
         <p:nvSpPr>
           <p:cNvPr id="7" name="ai-product-3">
-            <a:extLst>
+            <a:extLst xmlns:a="http://schemas.openxmlformats.org/drawingml/2006/main">
               <a:ext uri="{FF2B5EF4-FFF2-40B4-BE49-F238E27FC236}">
                 <a16:creationId xmlns:a16="http://schemas.microsoft.com/office/drawing/2014/main" id="{DED8FAE9-6BC6-49E9-88E6-7E4D4961D264}"/>
               </a:ext>
             </a:extLst>
           </p:cNvPr>
           <p:cNvSpPr>
-            <a:spLocks noGrp="1"/>
+            <a:spLocks xmlns:a="http://schemas.openxmlformats.org/drawingml/2006/main" noGrp="1"/>
           </p:cNvSpPr>
           <p:nvPr/>
         </p:nvSpPr>
         <p:spPr>
-          <a:xfrm>
+          <a:xfrm xmlns:a="http://schemas.openxmlformats.org/drawingml/2006/main">
             <a:off x="685800" y="3686175"/>
             <a:ext cx="5095875" cy="371475"/>
           </a:xfrm>
-          <a:prstGeom prst="rect">
+          <a:prstGeom xmlns:a="http://schemas.openxmlformats.org/drawingml/2006/main" prst="rect">
             <a:avLst/>
           </a:prstGeom>
-          <a:noFill/>
-          <a:ln w="0">
+          <a:noFill xmlns:a="http://schemas.openxmlformats.org/drawingml/2006/main"/>
+          <a:ln xmlns:a="http://schemas.openxmlformats.org/drawingml/2006/main" w="0">
             <a:noFill/>
           </a:ln>
         </p:spPr>
         <p:txBody>
-          <a:bodyPr lIns="0" tIns="0" rIns="0" bIns="0"/>
-          <a:lstStyle>
+          <a:bodyPr xmlns:a="http://schemas.openxmlformats.org/drawingml/2006/main" lIns="0" tIns="0" rIns="0" bIns="0"/>
+          <a:lstStyle xmlns:a="http://schemas.openxmlformats.org/drawingml/2006/main">
             <a:defPPr>
               <a:defRPr sz="1950" b="0">
                 <a:solidFill>
@@ -7662,7 +7996,7 @@
               </a:defRPr>
             </a:lvl9pPr>
           </a:lstStyle>
-          <a:p>
+          <a:p xmlns:a="http://schemas.openxmlformats.org/drawingml/2006/main">
             <a:pPr>
               <a:buNone/>
               <a:defRPr sz="1950" b="0">
@@ -7672,38 +8006,14 @@
               </a:defRPr>
             </a:pPr>
             <a:r>
-              <a:rPr sz="2400" b="0" dirty="0">
+              <a:rPr sz="2400" b="0">
                 <a:solidFill>
                   <a:srgbClr val="35303F"/>
                 </a:solidFill>
               </a:rPr>
-              <a:t>Gemini: </a:t>
-            </a:r>
-            <a:r>
-              <a:rPr sz="2400" b="0" dirty="0" err="1">
-                <a:solidFill>
-                  <a:srgbClr val="35303F"/>
-                </a:solidFill>
-              </a:rPr>
-              <a:t>Quellenvergleich</a:t>
-            </a:r>
-            <a:r>
-              <a:rPr sz="2400" b="0" dirty="0">
-                <a:solidFill>
-                  <a:srgbClr val="35303F"/>
-                </a:solidFill>
-              </a:rPr>
-              <a:t> und </a:t>
-            </a:r>
-            <a:r>
-              <a:rPr sz="2400" b="0" dirty="0" err="1">
-                <a:solidFill>
-                  <a:srgbClr val="35303F"/>
-                </a:solidFill>
-              </a:rPr>
-              <a:t>Fragen</a:t>
-            </a:r>
-            <a:endParaRPr sz="2400" b="0" dirty="0">
+              <a:t>Gemini: Quellenabgleich und Fragen</a:t>
+            </a:r>
+            <a:endParaRPr sz="2400" b="0">
               <a:solidFill>
                 <a:srgbClr val="35303F"/>
               </a:solidFill>
@@ -7714,33 +8024,33 @@
       <p:sp>
         <p:nvSpPr>
           <p:cNvPr id="8" name="ai-product-4">
-            <a:extLst>
+            <a:extLst xmlns:a="http://schemas.openxmlformats.org/drawingml/2006/main">
               <a:ext uri="{FF2B5EF4-FFF2-40B4-BE49-F238E27FC236}">
                 <a16:creationId xmlns:a16="http://schemas.microsoft.com/office/drawing/2014/main" id="{628D6628-8A22-495B-88A5-6DBDC76C5837}"/>
               </a:ext>
             </a:extLst>
           </p:cNvPr>
           <p:cNvSpPr>
-            <a:spLocks noGrp="1"/>
+            <a:spLocks xmlns:a="http://schemas.openxmlformats.org/drawingml/2006/main" noGrp="1"/>
           </p:cNvSpPr>
           <p:nvPr/>
         </p:nvSpPr>
         <p:spPr>
-          <a:xfrm>
+          <a:xfrm xmlns:a="http://schemas.openxmlformats.org/drawingml/2006/main">
             <a:off x="685800" y="4105275"/>
             <a:ext cx="5095875" cy="371475"/>
           </a:xfrm>
-          <a:prstGeom prst="rect">
+          <a:prstGeom xmlns:a="http://schemas.openxmlformats.org/drawingml/2006/main" prst="rect">
             <a:avLst/>
           </a:prstGeom>
-          <a:noFill/>
-          <a:ln w="0">
+          <a:noFill xmlns:a="http://schemas.openxmlformats.org/drawingml/2006/main"/>
+          <a:ln xmlns:a="http://schemas.openxmlformats.org/drawingml/2006/main" w="0">
             <a:noFill/>
           </a:ln>
         </p:spPr>
         <p:txBody>
-          <a:bodyPr lIns="0" tIns="0" rIns="0" bIns="0"/>
-          <a:lstStyle>
+          <a:bodyPr xmlns:a="http://schemas.openxmlformats.org/drawingml/2006/main" lIns="0" tIns="0" rIns="0" bIns="0"/>
+          <a:lstStyle xmlns:a="http://schemas.openxmlformats.org/drawingml/2006/main">
             <a:defPPr>
               <a:defRPr sz="1950" b="0">
                 <a:solidFill>
@@ -7821,7 +8131,7 @@
               </a:defRPr>
             </a:lvl9pPr>
           </a:lstStyle>
-          <a:p>
+          <a:p xmlns:a="http://schemas.openxmlformats.org/drawingml/2006/main">
             <a:pPr>
               <a:buNone/>
               <a:defRPr sz="1950" b="0">
@@ -7831,36 +8141,12 @@
               </a:defRPr>
             </a:pPr>
             <a:r>
-              <a:rPr sz="2400" b="0" dirty="0" err="1">
+              <a:rPr sz="2400" b="0">
                 <a:solidFill>
                   <a:srgbClr val="35303F"/>
                 </a:solidFill>
               </a:rPr>
-              <a:t>ElevenLabs</a:t>
-            </a:r>
-            <a:r>
-              <a:rPr sz="2400" b="0" dirty="0">
-                <a:solidFill>
-                  <a:srgbClr val="35303F"/>
-                </a:solidFill>
-              </a:rPr>
-              <a:t>: </a:t>
-            </a:r>
-            <a:r>
-              <a:rPr sz="2400" b="0" dirty="0" err="1">
-                <a:solidFill>
-                  <a:srgbClr val="35303F"/>
-                </a:solidFill>
-              </a:rPr>
-              <a:t>gesprochener</a:t>
-            </a:r>
-            <a:r>
-              <a:rPr sz="2400" b="0" dirty="0">
-                <a:solidFill>
-                  <a:srgbClr val="35303F"/>
-                </a:solidFill>
-              </a:rPr>
-              <a:t> Dialog</a:t>
+              <a:t>ElevenLabs: Sprachdialog</a:t>
             </a:r>
           </a:p>
         </p:txBody>
@@ -7868,33 +8154,33 @@
       <p:sp>
         <p:nvSpPr>
           <p:cNvPr id="9" name="ai-dev-heading">
-            <a:extLst>
+            <a:extLst xmlns:a="http://schemas.openxmlformats.org/drawingml/2006/main">
               <a:ext uri="{FF2B5EF4-FFF2-40B4-BE49-F238E27FC236}">
                 <a16:creationId xmlns:a16="http://schemas.microsoft.com/office/drawing/2014/main" id="{0DF5515E-30EC-4326-8F08-4F1302C10CBE}"/>
               </a:ext>
             </a:extLst>
           </p:cNvPr>
           <p:cNvSpPr>
-            <a:spLocks noGrp="1"/>
+            <a:spLocks xmlns:a="http://schemas.openxmlformats.org/drawingml/2006/main" noGrp="1"/>
           </p:cNvSpPr>
           <p:nvPr/>
         </p:nvSpPr>
         <p:spPr>
-          <a:xfrm>
+          <a:xfrm xmlns:a="http://schemas.openxmlformats.org/drawingml/2006/main">
             <a:off x="6477000" y="1724025"/>
             <a:ext cx="5029200" cy="495300"/>
           </a:xfrm>
-          <a:prstGeom prst="rect">
+          <a:prstGeom xmlns:a="http://schemas.openxmlformats.org/drawingml/2006/main" prst="rect">
             <a:avLst/>
           </a:prstGeom>
-          <a:noFill/>
-          <a:ln w="0">
+          <a:noFill xmlns:a="http://schemas.openxmlformats.org/drawingml/2006/main"/>
+          <a:ln xmlns:a="http://schemas.openxmlformats.org/drawingml/2006/main" w="0">
             <a:noFill/>
           </a:ln>
         </p:spPr>
         <p:txBody>
-          <a:bodyPr lIns="0" tIns="0" rIns="0" bIns="0"/>
-          <a:lstStyle>
+          <a:bodyPr xmlns:a="http://schemas.openxmlformats.org/drawingml/2006/main" lIns="0" tIns="0" rIns="0" bIns="0"/>
+          <a:lstStyle xmlns:a="http://schemas.openxmlformats.org/drawingml/2006/main">
             <a:defPPr>
               <a:defRPr sz="2625" b="1">
                 <a:solidFill>
@@ -7975,7 +8261,7 @@
               </a:defRPr>
             </a:lvl9pPr>
           </a:lstStyle>
-          <a:p>
+          <a:p xmlns:a="http://schemas.openxmlformats.org/drawingml/2006/main">
             <a:pPr>
               <a:buNone/>
               <a:defRPr sz="2625" b="1">
@@ -7985,11 +8271,11 @@
               </a:defRPr>
             </a:pPr>
             <a:r>
-              <a:rPr lang="de-DE" sz="2800" dirty="0"/>
+              <a:rPr sz="2800"/>
               <a:t>In</a:t>
             </a:r>
             <a:r>
-              <a:rPr sz="2800" b="1" dirty="0">
+              <a:rPr sz="2800" b="1">
                 <a:solidFill>
                   <a:srgbClr val="3803BF"/>
                 </a:solidFill>
@@ -7997,14 +8283,14 @@
               <a:t> der </a:t>
             </a:r>
             <a:r>
-              <a:rPr sz="2800" b="1" dirty="0" err="1">
+              <a:rPr sz="2800" b="1">
                 <a:solidFill>
                   <a:srgbClr val="3803BF"/>
                 </a:solidFill>
               </a:rPr>
               <a:t>Entwicklung</a:t>
             </a:r>
-            <a:endParaRPr sz="2800" b="1" dirty="0">
+            <a:endParaRPr sz="2800" b="1">
               <a:solidFill>
                 <a:srgbClr val="3803BF"/>
               </a:solidFill>
@@ -8015,33 +8301,33 @@
       <p:sp>
         <p:nvSpPr>
           <p:cNvPr id="10" name="coding-tools">
-            <a:extLst>
+            <a:extLst xmlns:a="http://schemas.openxmlformats.org/drawingml/2006/main">
               <a:ext uri="{FF2B5EF4-FFF2-40B4-BE49-F238E27FC236}">
                 <a16:creationId xmlns:a16="http://schemas.microsoft.com/office/drawing/2014/main" id="{26F06666-676E-4E7C-AB84-3EBF3ECEE190}"/>
               </a:ext>
             </a:extLst>
           </p:cNvPr>
           <p:cNvSpPr>
-            <a:spLocks noGrp="1"/>
+            <a:spLocks xmlns:a="http://schemas.openxmlformats.org/drawingml/2006/main" noGrp="1"/>
           </p:cNvSpPr>
           <p:nvPr/>
         </p:nvSpPr>
         <p:spPr>
-          <a:xfrm>
+          <a:xfrm xmlns:a="http://schemas.openxmlformats.org/drawingml/2006/main">
             <a:off x="6477000" y="2428875"/>
             <a:ext cx="5029200" cy="400050"/>
           </a:xfrm>
-          <a:prstGeom prst="rect">
+          <a:prstGeom xmlns:a="http://schemas.openxmlformats.org/drawingml/2006/main" prst="rect">
             <a:avLst/>
           </a:prstGeom>
-          <a:noFill/>
-          <a:ln w="0">
+          <a:noFill xmlns:a="http://schemas.openxmlformats.org/drawingml/2006/main"/>
+          <a:ln xmlns:a="http://schemas.openxmlformats.org/drawingml/2006/main" w="0">
             <a:noFill/>
           </a:ln>
         </p:spPr>
         <p:txBody>
-          <a:bodyPr lIns="0" tIns="0" rIns="0" bIns="0"/>
-          <a:lstStyle>
+          <a:bodyPr xmlns:a="http://schemas.openxmlformats.org/drawingml/2006/main" lIns="0" tIns="0" rIns="0" bIns="0"/>
+          <a:lstStyle xmlns:a="http://schemas.openxmlformats.org/drawingml/2006/main">
             <a:defPPr>
               <a:defRPr sz="2175" b="1">
                 <a:solidFill>
@@ -8122,7 +8408,7 @@
               </a:defRPr>
             </a:lvl9pPr>
           </a:lstStyle>
-          <a:p>
+          <a:p xmlns:a="http://schemas.openxmlformats.org/drawingml/2006/main">
             <a:pPr>
               <a:buNone/>
               <a:defRPr sz="2175" b="1">
@@ -8132,7 +8418,7 @@
               </a:defRPr>
             </a:pPr>
             <a:r>
-              <a:rPr sz="2400" b="1" dirty="0">
+              <a:rPr sz="2400" b="1">
                 <a:solidFill>
                   <a:srgbClr val="181520"/>
                 </a:solidFill>
@@ -8145,33 +8431,33 @@
       <p:sp>
         <p:nvSpPr>
           <p:cNvPr id="11" name="coding-uses">
-            <a:extLst>
+            <a:extLst xmlns:a="http://schemas.openxmlformats.org/drawingml/2006/main">
               <a:ext uri="{FF2B5EF4-FFF2-40B4-BE49-F238E27FC236}">
                 <a16:creationId xmlns:a16="http://schemas.microsoft.com/office/drawing/2014/main" id="{E14ACA03-0B4E-43BA-B087-9A6590CDAEBE}"/>
               </a:ext>
             </a:extLst>
           </p:cNvPr>
           <p:cNvSpPr>
-            <a:spLocks noGrp="1"/>
+            <a:spLocks xmlns:a="http://schemas.openxmlformats.org/drawingml/2006/main" noGrp="1"/>
           </p:cNvSpPr>
           <p:nvPr/>
         </p:nvSpPr>
         <p:spPr>
-          <a:xfrm>
+          <a:xfrm xmlns:a="http://schemas.openxmlformats.org/drawingml/2006/main">
             <a:off x="6477000" y="3038475"/>
             <a:ext cx="5029200" cy="1257300"/>
           </a:xfrm>
-          <a:prstGeom prst="rect">
+          <a:prstGeom xmlns:a="http://schemas.openxmlformats.org/drawingml/2006/main" prst="rect">
             <a:avLst/>
           </a:prstGeom>
-          <a:noFill/>
-          <a:ln w="0">
+          <a:noFill xmlns:a="http://schemas.openxmlformats.org/drawingml/2006/main"/>
+          <a:ln xmlns:a="http://schemas.openxmlformats.org/drawingml/2006/main" w="0">
             <a:noFill/>
           </a:ln>
         </p:spPr>
         <p:txBody>
-          <a:bodyPr lIns="0" tIns="0" rIns="0" bIns="0"/>
-          <a:lstStyle>
+          <a:bodyPr xmlns:a="http://schemas.openxmlformats.org/drawingml/2006/main" lIns="0" tIns="0" rIns="0" bIns="0"/>
+          <a:lstStyle xmlns:a="http://schemas.openxmlformats.org/drawingml/2006/main">
             <a:defPPr>
               <a:defRPr sz="2025" b="0">
                 <a:solidFill>
@@ -8252,7 +8538,7 @@
               </a:defRPr>
             </a:lvl9pPr>
           </a:lstStyle>
-          <a:p>
+          <a:p xmlns:a="http://schemas.openxmlformats.org/drawingml/2006/main">
             <a:pPr>
               <a:buNone/>
               <a:defRPr sz="2025" b="0">
@@ -8262,7 +8548,7 @@
               </a:defRPr>
             </a:pPr>
             <a:r>
-              <a:rPr sz="2400" b="0" dirty="0">
+              <a:rPr sz="2400" b="0">
                 <a:solidFill>
                   <a:srgbClr val="35303F"/>
                 </a:solidFill>
@@ -8270,20 +8556,20 @@
               <a:t>Code und </a:t>
             </a:r>
             <a:r>
-              <a:rPr sz="2400" b="0" dirty="0" err="1">
+              <a:rPr sz="2400" b="0">
                 <a:solidFill>
                   <a:srgbClr val="35303F"/>
                 </a:solidFill>
               </a:rPr>
               <a:t>Architektur</a:t>
             </a:r>
-            <a:endParaRPr sz="2400" b="0" dirty="0">
+            <a:endParaRPr sz="2400" b="0">
               <a:solidFill>
                 <a:srgbClr val="35303F"/>
               </a:solidFill>
             </a:endParaRPr>
           </a:p>
-          <a:p>
+          <a:p xmlns:a="http://schemas.openxmlformats.org/drawingml/2006/main">
             <a:pPr>
               <a:buNone/>
               <a:defRPr sz="2025" b="0">
@@ -8293,7 +8579,7 @@
               </a:defRPr>
             </a:pPr>
             <a:r>
-              <a:rPr sz="2400" b="0" dirty="0">
+              <a:rPr sz="2400" b="0">
                 <a:solidFill>
                   <a:srgbClr val="35303F"/>
                 </a:solidFill>
@@ -8301,20 +8587,20 @@
               <a:t>Recherche und </a:t>
             </a:r>
             <a:r>
-              <a:rPr sz="2400" b="0" dirty="0" err="1">
+              <a:rPr sz="2400" b="0">
                 <a:solidFill>
                   <a:srgbClr val="35303F"/>
                 </a:solidFill>
               </a:rPr>
               <a:t>Dokumentation</a:t>
             </a:r>
-            <a:endParaRPr sz="2400" b="0" dirty="0">
+            <a:endParaRPr sz="2400" b="0">
               <a:solidFill>
                 <a:srgbClr val="35303F"/>
               </a:solidFill>
             </a:endParaRPr>
           </a:p>
-          <a:p>
+          <a:p xmlns:a="http://schemas.openxmlformats.org/drawingml/2006/main">
             <a:pPr>
               <a:buNone/>
               <a:defRPr sz="2025" b="0">
@@ -8324,7 +8610,7 @@
               </a:defRPr>
             </a:pPr>
             <a:r>
-              <a:rPr sz="2400" b="0" dirty="0" err="1">
+              <a:rPr sz="2400" b="0">
                 <a:solidFill>
                   <a:srgbClr val="35303F"/>
                 </a:solidFill>
@@ -8332,7 +8618,7 @@
               <a:t>Fehlersuche</a:t>
             </a:r>
             <a:r>
-              <a:rPr sz="2400" b="0" dirty="0">
+              <a:rPr sz="2400" b="0">
                 <a:solidFill>
                   <a:srgbClr val="35303F"/>
                 </a:solidFill>
@@ -8340,14 +8626,14 @@
               <a:t> und </a:t>
             </a:r>
             <a:r>
-              <a:rPr sz="2400" b="0" dirty="0" err="1">
+              <a:rPr sz="2400" b="0">
                 <a:solidFill>
                   <a:srgbClr val="35303F"/>
                 </a:solidFill>
               </a:rPr>
               <a:t>Testentwürfe</a:t>
             </a:r>
-            <a:endParaRPr sz="2400" b="0" dirty="0">
+            <a:endParaRPr sz="2400" b="0">
               <a:solidFill>
                 <a:srgbClr val="35303F"/>
               </a:solidFill>
@@ -8358,33 +8644,33 @@
       <p:sp>
         <p:nvSpPr>
           <p:cNvPr id="12" name="team-role">
-            <a:extLst>
+            <a:extLst xmlns:a="http://schemas.openxmlformats.org/drawingml/2006/main">
               <a:ext uri="{FF2B5EF4-FFF2-40B4-BE49-F238E27FC236}">
                 <a16:creationId xmlns:a16="http://schemas.microsoft.com/office/drawing/2014/main" id="{1813E5FF-F1E9-49BF-8BAC-87944603E77D}"/>
               </a:ext>
             </a:extLst>
           </p:cNvPr>
           <p:cNvSpPr>
-            <a:spLocks noGrp="1"/>
+            <a:spLocks xmlns:a="http://schemas.openxmlformats.org/drawingml/2006/main" noGrp="1"/>
           </p:cNvSpPr>
           <p:nvPr/>
         </p:nvSpPr>
         <p:spPr>
-          <a:xfrm>
+          <a:xfrm xmlns:a="http://schemas.openxmlformats.org/drawingml/2006/main">
             <a:off x="6477000" y="4371975"/>
             <a:ext cx="5029200" cy="352425"/>
           </a:xfrm>
-          <a:prstGeom prst="rect">
+          <a:prstGeom xmlns:a="http://schemas.openxmlformats.org/drawingml/2006/main" prst="rect">
             <a:avLst/>
           </a:prstGeom>
-          <a:noFill/>
-          <a:ln w="0">
+          <a:noFill xmlns:a="http://schemas.openxmlformats.org/drawingml/2006/main"/>
+          <a:ln xmlns:a="http://schemas.openxmlformats.org/drawingml/2006/main" w="0">
             <a:noFill/>
           </a:ln>
         </p:spPr>
         <p:txBody>
-          <a:bodyPr lIns="0" tIns="0" rIns="0" bIns="0"/>
-          <a:lstStyle>
+          <a:bodyPr xmlns:a="http://schemas.openxmlformats.org/drawingml/2006/main" lIns="0" tIns="0" rIns="0" bIns="0"/>
+          <a:lstStyle xmlns:a="http://schemas.openxmlformats.org/drawingml/2006/main">
             <a:defPPr>
               <a:defRPr sz="1800" b="0">
                 <a:solidFill>
@@ -8465,7 +8751,7 @@
               </a:defRPr>
             </a:lvl9pPr>
           </a:lstStyle>
-          <a:p>
+          <a:p xmlns:a="http://schemas.openxmlformats.org/drawingml/2006/main">
             <a:pPr>
               <a:buNone/>
               <a:defRPr sz="1800" b="0">
@@ -8475,52 +8761,12 @@
               </a:defRPr>
             </a:pPr>
             <a:r>
-              <a:rPr sz="2400" b="0" dirty="0" err="1">
+              <a:rPr sz="2400" b="0">
                 <a:solidFill>
                   <a:srgbClr val="5B5365"/>
                 </a:solidFill>
               </a:rPr>
-              <a:t>Ziele</a:t>
-            </a:r>
-            <a:r>
-              <a:rPr sz="2400" b="0" dirty="0">
-                <a:solidFill>
-                  <a:srgbClr val="5B5365"/>
-                </a:solidFill>
-              </a:rPr>
-              <a:t> und </a:t>
-            </a:r>
-            <a:r>
-              <a:rPr sz="2400" b="0" dirty="0" err="1">
-                <a:solidFill>
-                  <a:srgbClr val="5B5365"/>
-                </a:solidFill>
-              </a:rPr>
-              <a:t>Entscheidungen</a:t>
-            </a:r>
-            <a:r>
-              <a:rPr sz="2400" b="0" dirty="0">
-                <a:solidFill>
-                  <a:srgbClr val="5B5365"/>
-                </a:solidFill>
-              </a:rPr>
-              <a:t> </a:t>
-            </a:r>
-            <a:r>
-              <a:rPr sz="2400" b="0" dirty="0" err="1">
-                <a:solidFill>
-                  <a:srgbClr val="5B5365"/>
-                </a:solidFill>
-              </a:rPr>
-              <a:t>beim</a:t>
-            </a:r>
-            <a:r>
-              <a:rPr sz="2400" b="0" dirty="0">
-                <a:solidFill>
-                  <a:srgbClr val="5B5365"/>
-                </a:solidFill>
-              </a:rPr>
-              <a:t> Team</a:t>
+              <a:t>Ziele und Entscheidungen: Team</a:t>
             </a:r>
           </a:p>
         </p:txBody>
@@ -8528,33 +8774,33 @@
       <p:sp>
         <p:nvSpPr>
           <p:cNvPr id="13" name="correction-heading">
-            <a:extLst>
+            <a:extLst xmlns:a="http://schemas.openxmlformats.org/drawingml/2006/main">
               <a:ext uri="{FF2B5EF4-FFF2-40B4-BE49-F238E27FC236}">
                 <a16:creationId xmlns:a16="http://schemas.microsoft.com/office/drawing/2014/main" id="{88F0B233-B0DE-4BBC-B4F2-F0A41E0F1F25}"/>
               </a:ext>
             </a:extLst>
           </p:cNvPr>
           <p:cNvSpPr>
-            <a:spLocks noGrp="1"/>
+            <a:spLocks xmlns:a="http://schemas.openxmlformats.org/drawingml/2006/main" noGrp="1"/>
           </p:cNvSpPr>
           <p:nvPr/>
         </p:nvSpPr>
         <p:spPr>
-          <a:xfrm>
+          <a:xfrm xmlns:a="http://schemas.openxmlformats.org/drawingml/2006/main">
             <a:off x="685800" y="5057775"/>
             <a:ext cx="5095875" cy="371475"/>
           </a:xfrm>
-          <a:prstGeom prst="rect">
+          <a:prstGeom xmlns:a="http://schemas.openxmlformats.org/drawingml/2006/main" prst="rect">
             <a:avLst/>
           </a:prstGeom>
-          <a:noFill/>
-          <a:ln w="0">
+          <a:noFill xmlns:a="http://schemas.openxmlformats.org/drawingml/2006/main"/>
+          <a:ln xmlns:a="http://schemas.openxmlformats.org/drawingml/2006/main" w="0">
             <a:noFill/>
           </a:ln>
         </p:spPr>
         <p:txBody>
-          <a:bodyPr lIns="0" tIns="0" rIns="0" bIns="0"/>
-          <a:lstStyle>
+          <a:bodyPr xmlns:a="http://schemas.openxmlformats.org/drawingml/2006/main" lIns="0" tIns="0" rIns="0" bIns="0"/>
+          <a:lstStyle xmlns:a="http://schemas.openxmlformats.org/drawingml/2006/main">
             <a:defPPr>
               <a:defRPr sz="1875" b="1">
                 <a:solidFill>
@@ -8635,7 +8881,7 @@
               </a:defRPr>
             </a:lvl9pPr>
           </a:lstStyle>
-          <a:p>
+          <a:p xmlns:a="http://schemas.openxmlformats.org/drawingml/2006/main">
             <a:pPr>
               <a:buNone/>
               <a:defRPr sz="1875" b="1">
@@ -8645,7 +8891,7 @@
               </a:defRPr>
             </a:pPr>
             <a:r>
-              <a:rPr sz="2800" b="1" dirty="0">
+              <a:rPr sz="2800" b="1">
                 <a:solidFill>
                   <a:srgbClr val="3803BF"/>
                 </a:solidFill>
@@ -8653,7 +8899,7 @@
               <a:t>Ein </a:t>
             </a:r>
             <a:r>
-              <a:rPr sz="2800" b="1" dirty="0" err="1">
+              <a:rPr sz="2800" b="1">
                 <a:solidFill>
                   <a:srgbClr val="3803BF"/>
                 </a:solidFill>
@@ -8661,7 +8907,7 @@
               <a:t>konkreter</a:t>
             </a:r>
             <a:r>
-              <a:rPr sz="2800" b="1" dirty="0">
+              <a:rPr sz="2800" b="1">
                 <a:solidFill>
                   <a:srgbClr val="3803BF"/>
                 </a:solidFill>
@@ -8669,14 +8915,14 @@
               <a:t> </a:t>
             </a:r>
             <a:r>
-              <a:rPr sz="2800" b="1" dirty="0" err="1">
+              <a:rPr sz="2800" b="1">
                 <a:solidFill>
                   <a:srgbClr val="3803BF"/>
                 </a:solidFill>
               </a:rPr>
               <a:t>Fehler</a:t>
             </a:r>
-            <a:endParaRPr sz="2800" b="1" dirty="0">
+            <a:endParaRPr sz="2800" b="1">
               <a:solidFill>
                 <a:srgbClr val="3803BF"/>
               </a:solidFill>
@@ -8687,33 +8933,33 @@
       <p:sp>
         <p:nvSpPr>
           <p:cNvPr id="14" name="correction-example">
-            <a:extLst>
+            <a:extLst xmlns:a="http://schemas.openxmlformats.org/drawingml/2006/main">
               <a:ext uri="{FF2B5EF4-FFF2-40B4-BE49-F238E27FC236}">
                 <a16:creationId xmlns:a16="http://schemas.microsoft.com/office/drawing/2014/main" id="{67A65AAE-687C-428A-A340-F0C9D24ED250}"/>
               </a:ext>
             </a:extLst>
           </p:cNvPr>
           <p:cNvSpPr>
-            <a:spLocks noGrp="1"/>
+            <a:spLocks xmlns:a="http://schemas.openxmlformats.org/drawingml/2006/main" noGrp="1"/>
           </p:cNvSpPr>
           <p:nvPr/>
         </p:nvSpPr>
         <p:spPr>
-          <a:xfrm>
+          <a:xfrm xmlns:a="http://schemas.openxmlformats.org/drawingml/2006/main">
             <a:off x="685800" y="5514975"/>
-            <a:ext cx="10820400" cy="676275"/>
+            <a:ext cx="10820400" cy="800100"/>
           </a:xfrm>
-          <a:prstGeom prst="rect">
+          <a:prstGeom xmlns:a="http://schemas.openxmlformats.org/drawingml/2006/main" prst="rect">
             <a:avLst/>
           </a:prstGeom>
-          <a:noFill/>
-          <a:ln w="0">
+          <a:noFill xmlns:a="http://schemas.openxmlformats.org/drawingml/2006/main"/>
+          <a:ln xmlns:a="http://schemas.openxmlformats.org/drawingml/2006/main" w="0">
             <a:noFill/>
           </a:ln>
         </p:spPr>
         <p:txBody>
-          <a:bodyPr lIns="0" tIns="0" rIns="0" bIns="0"/>
-          <a:lstStyle>
+          <a:bodyPr xmlns:a="http://schemas.openxmlformats.org/drawingml/2006/main" lIns="0" tIns="0" rIns="0" bIns="0"/>
+          <a:lstStyle xmlns:a="http://schemas.openxmlformats.org/drawingml/2006/main">
             <a:defPPr>
               <a:defRPr sz="1800" b="0">
                 <a:solidFill>
@@ -8794,7 +9040,7 @@
               </a:defRPr>
             </a:lvl9pPr>
           </a:lstStyle>
-          <a:p>
+          <a:p xmlns:a="http://schemas.openxmlformats.org/drawingml/2006/main">
             <a:pPr>
               <a:buNone/>
               <a:defRPr sz="1800" b="0">
@@ -8804,96 +9050,96 @@
               </a:defRPr>
             </a:pPr>
             <a:r>
-              <a:rPr sz="2400" b="0" dirty="0" err="1">
+              <a:rPr sz="2400" b="0">
                 <a:solidFill>
                   <a:srgbClr val="35303F"/>
                 </a:solidFill>
               </a:rPr>
-              <a:t>Vorgeschlagener</a:t>
-            </a:r>
-            <a:r>
-              <a:rPr sz="2400" b="0" dirty="0">
+              <a:t>SeaweedFS: Docker-Tag 4.49 war nicht verfügbar.</a:t>
+            </a:r>
+          </a:p>
+          <a:p xmlns:a="http://schemas.openxmlformats.org/drawingml/2006/main">
+            <a:pPr>
+              <a:buNone/>
+              <a:defRPr sz="1800" b="0">
+                <a:solidFill>
+                  <a:srgbClr val="35303F"/>
+                </a:solidFill>
+              </a:defRPr>
+            </a:pPr>
+            <a:r>
+              <a:rPr sz="2400" b="0">
                 <a:solidFill>
                   <a:srgbClr val="35303F"/>
                 </a:solidFill>
               </a:rPr>
-              <a:t> Docker-Tag </a:t>
-            </a:r>
-            <a:r>
-              <a:rPr sz="2400" b="0" dirty="0" err="1">
-                <a:solidFill>
-                  <a:srgbClr val="35303F"/>
-                </a:solidFill>
+              <a:t>Registry geprüft und auf Version 4.48 korrigiert.</a:t>
+            </a:r>
+          </a:p>
+        </p:txBody>
+      </p:sp>
+      <p:sp>
+        <p:nvSpPr>
+          <p:cNvPr id="15" name="optional-transcription">
+            <a:extLst xmlns:a="http://schemas.openxmlformats.org/drawingml/2006/main">
+              <a:ext uri="{FF2B5EF4-FFF2-40B4-BE49-F238E27FC236}">
+                <a16:creationId xmlns:a16="http://schemas.microsoft.com/office/drawing/2014/main" id="{EFC13E6A-EF6A-4B7C-923F-8E57DA10F233}"/>
+              </a:ext>
+            </a:extLst>
+          </p:cNvPr>
+          <p:cNvSpPr>
+            <a:spLocks xmlns:a="http://schemas.openxmlformats.org/drawingml/2006/main" noGrp="1"/>
+          </p:cNvSpPr>
+          <p:nvPr/>
+        </p:nvSpPr>
+        <p:spPr>
+          <a:xfrm xmlns:a="http://schemas.openxmlformats.org/drawingml/2006/main">
+            <a:off x="685800" y="4552950"/>
+            <a:ext cx="5095875" cy="333375"/>
+          </a:xfrm>
+          <a:prstGeom xmlns:a="http://schemas.openxmlformats.org/drawingml/2006/main" prst="rect">
+            <a:avLst/>
+          </a:prstGeom>
+          <a:noFill xmlns:a="http://schemas.openxmlformats.org/drawingml/2006/main"/>
+          <a:ln xmlns:a="http://schemas.openxmlformats.org/drawingml/2006/main">
+            <a:noFill/>
+          </a:ln>
+        </p:spPr>
+        <p:txBody>
+          <a:bodyPr xmlns:a="http://schemas.openxmlformats.org/drawingml/2006/main" lIns="0" tIns="0" rIns="0" bIns="0"/>
+          <a:lstStyle xmlns:a="http://schemas.openxmlformats.org/drawingml/2006/main">
+            <a:defPPr>
+              <a:defRPr sz="1800">
+                <a:solidFill>
+                  <a:srgbClr val="5B5365"/>
+                </a:solidFill>
+                <a:latin typeface="Aptos"/>
+                <a:ea typeface="Aptos"/>
+                <a:cs typeface="Aptos"/>
+              </a:defRPr>
+            </a:defPPr>
+          </a:lstStyle>
+          <a:p xmlns:a="http://schemas.openxmlformats.org/drawingml/2006/main">
+            <a:pPr>
+              <a:defRPr sz="1800">
+                <a:solidFill>
+                  <a:srgbClr val="5B5365"/>
+                </a:solidFill>
+                <a:latin typeface="Aptos"/>
+                <a:ea typeface="Aptos"/>
+                <a:cs typeface="Aptos"/>
+              </a:defRPr>
+            </a:pPr>
+            <a:r>
+              <a:rPr sz="1800">
+                <a:solidFill>
+                  <a:srgbClr val="5B5365"/>
+                </a:solidFill>
+                <a:latin typeface="Aptos"/>
+                <a:ea typeface="Aptos"/>
+                <a:cs typeface="Aptos"/>
               </a:rPr>
-              <a:t>nicht</a:t>
-            </a:r>
-            <a:r>
-              <a:rPr sz="2400" b="0" dirty="0">
-                <a:solidFill>
-                  <a:srgbClr val="35303F"/>
-                </a:solidFill>
-              </a:rPr>
-              <a:t> </a:t>
-            </a:r>
-            <a:r>
-              <a:rPr sz="2400" b="0" dirty="0" err="1">
-                <a:solidFill>
-                  <a:srgbClr val="35303F"/>
-                </a:solidFill>
-              </a:rPr>
-              <a:t>verfügbar</a:t>
-            </a:r>
-            <a:r>
-              <a:rPr lang="de-DE" sz="2400" dirty="0"/>
-              <a:t> - </a:t>
-            </a:r>
-            <a:r>
-              <a:rPr sz="2400" b="0" dirty="0" err="1">
-                <a:solidFill>
-                  <a:srgbClr val="35303F"/>
-                </a:solidFill>
-              </a:rPr>
-              <a:t>Verfügbarkeit</a:t>
-            </a:r>
-            <a:r>
-              <a:rPr sz="2400" b="0" dirty="0">
-                <a:solidFill>
-                  <a:srgbClr val="35303F"/>
-                </a:solidFill>
-              </a:rPr>
-              <a:t> </a:t>
-            </a:r>
-            <a:r>
-              <a:rPr sz="2400" b="0" dirty="0" err="1">
-                <a:solidFill>
-                  <a:srgbClr val="35303F"/>
-                </a:solidFill>
-              </a:rPr>
-              <a:t>geprüft</a:t>
-            </a:r>
-            <a:r>
-              <a:rPr sz="2400" b="0" dirty="0">
-                <a:solidFill>
-                  <a:srgbClr val="35303F"/>
-                </a:solidFill>
-              </a:rPr>
-              <a:t>, Version </a:t>
-            </a:r>
-            <a:r>
-              <a:rPr sz="2400" b="0" dirty="0" err="1">
-                <a:solidFill>
-                  <a:srgbClr val="35303F"/>
-                </a:solidFill>
-              </a:rPr>
-              <a:t>korrigiert</a:t>
-            </a:r>
-            <a:r>
-              <a:rPr sz="2400" b="0" dirty="0">
-                <a:solidFill>
-                  <a:srgbClr val="35303F"/>
-                </a:solidFill>
-              </a:rPr>
-              <a:t>.</a:t>
+              <a:t>Deepgram optional für Live-Transkription</a:t>
             </a:r>
           </a:p>
         </p:txBody>
@@ -8905,21 +9151,17 @@
       </p:ext>
     </p:extLst>
   </p:cSld>
-  <p:clrMapOvr>
-    <a:masterClrMapping/>
-  </p:clrMapOvr>
 </p:sld>
 </file>
 
 <file path=ppt/slides/slide4.xml><?xml version="1.0" encoding="utf-8"?>
-<p:sld xmlns:a="http://schemas.openxmlformats.org/drawingml/2006/main" xmlns:r="http://schemas.openxmlformats.org/officeDocument/2006/relationships" xmlns:p="http://schemas.openxmlformats.org/presentationml/2006/main">
+<p:sld xmlns:p="http://schemas.openxmlformats.org/presentationml/2006/main">
   <p:cSld>
     <p:bg>
       <p:bgPr>
-        <a:solidFill>
+        <a:solidFill xmlns:a="http://schemas.openxmlformats.org/drawingml/2006/main">
           <a:srgbClr val="090A15"/>
         </a:solidFill>
-        <a:effectLst/>
       </p:bgPr>
     </p:bg>
     <p:spTree>
@@ -8929,43 +9171,38 @@
         <p:nvPr/>
       </p:nvGrpSpPr>
       <p:grpSpPr>
-        <a:xfrm>
-          <a:off x="0" y="0"/>
-          <a:ext cx="0" cy="0"/>
-          <a:chOff x="0" y="0"/>
-          <a:chExt cx="0" cy="0"/>
-        </a:xfrm>
+        <a:xfrm xmlns:a="http://schemas.openxmlformats.org/drawingml/2006/main"/>
       </p:grpSpPr>
       <p:sp>
         <p:nvSpPr>
           <p:cNvPr id="3" name="demo-title">
-            <a:extLst>
+            <a:extLst xmlns:a="http://schemas.openxmlformats.org/drawingml/2006/main">
               <a:ext uri="{FF2B5EF4-FFF2-40B4-BE49-F238E27FC236}">
                 <a16:creationId xmlns:a16="http://schemas.microsoft.com/office/drawing/2014/main" id="{5BBF6856-50B4-403C-81FB-C1C5D0C322F8}"/>
               </a:ext>
             </a:extLst>
           </p:cNvPr>
           <p:cNvSpPr>
-            <a:spLocks noGrp="1"/>
+            <a:spLocks xmlns:a="http://schemas.openxmlformats.org/drawingml/2006/main" noGrp="1"/>
           </p:cNvSpPr>
           <p:nvPr/>
         </p:nvSpPr>
         <p:spPr>
-          <a:xfrm>
+          <a:xfrm xmlns:a="http://schemas.openxmlformats.org/drawingml/2006/main">
             <a:off x="685800" y="781050"/>
             <a:ext cx="6381750" cy="990600"/>
           </a:xfrm>
-          <a:prstGeom prst="rect">
+          <a:prstGeom xmlns:a="http://schemas.openxmlformats.org/drawingml/2006/main" prst="rect">
             <a:avLst/>
           </a:prstGeom>
-          <a:noFill/>
-          <a:ln w="0">
+          <a:noFill xmlns:a="http://schemas.openxmlformats.org/drawingml/2006/main"/>
+          <a:ln xmlns:a="http://schemas.openxmlformats.org/drawingml/2006/main" w="0">
             <a:noFill/>
           </a:ln>
         </p:spPr>
         <p:txBody>
-          <a:bodyPr lIns="0" tIns="0" rIns="0" bIns="0"/>
-          <a:lstStyle>
+          <a:bodyPr xmlns:a="http://schemas.openxmlformats.org/drawingml/2006/main" lIns="0" tIns="0" rIns="0" bIns="0"/>
+          <a:lstStyle xmlns:a="http://schemas.openxmlformats.org/drawingml/2006/main">
             <a:defPPr>
               <a:defRPr sz="5850" b="1">
                 <a:solidFill>
@@ -9046,7 +9283,7 @@
               </a:defRPr>
             </a:lvl9pPr>
           </a:lstStyle>
-          <a:p>
+          <a:p xmlns:a="http://schemas.openxmlformats.org/drawingml/2006/main">
             <a:pPr>
               <a:buNone/>
               <a:defRPr sz="5850" b="1">
@@ -9069,33 +9306,33 @@
       <p:sp>
         <p:nvSpPr>
           <p:cNvPr id="4" name="demo-intro">
-            <a:extLst>
+            <a:extLst xmlns:a="http://schemas.openxmlformats.org/drawingml/2006/main">
               <a:ext uri="{FF2B5EF4-FFF2-40B4-BE49-F238E27FC236}">
                 <a16:creationId xmlns:a16="http://schemas.microsoft.com/office/drawing/2014/main" id="{A1EA7A93-E74E-4255-AB8F-175D19CA2786}"/>
               </a:ext>
             </a:extLst>
           </p:cNvPr>
           <p:cNvSpPr>
-            <a:spLocks noGrp="1"/>
+            <a:spLocks xmlns:a="http://schemas.openxmlformats.org/drawingml/2006/main" noGrp="1"/>
           </p:cNvSpPr>
           <p:nvPr/>
         </p:nvSpPr>
         <p:spPr>
-          <a:xfrm>
+          <a:xfrm xmlns:a="http://schemas.openxmlformats.org/drawingml/2006/main">
             <a:off x="723900" y="1962150"/>
             <a:ext cx="6191250" cy="514350"/>
           </a:xfrm>
-          <a:prstGeom prst="rect">
+          <a:prstGeom xmlns:a="http://schemas.openxmlformats.org/drawingml/2006/main" prst="rect">
             <a:avLst/>
           </a:prstGeom>
-          <a:noFill/>
-          <a:ln w="0">
+          <a:noFill xmlns:a="http://schemas.openxmlformats.org/drawingml/2006/main"/>
+          <a:ln xmlns:a="http://schemas.openxmlformats.org/drawingml/2006/main" w="0">
             <a:noFill/>
           </a:ln>
         </p:spPr>
         <p:txBody>
-          <a:bodyPr lIns="0" tIns="0" rIns="0" bIns="0"/>
-          <a:lstStyle>
+          <a:bodyPr xmlns:a="http://schemas.openxmlformats.org/drawingml/2006/main" lIns="0" tIns="0" rIns="0" bIns="0"/>
+          <a:lstStyle xmlns:a="http://schemas.openxmlformats.org/drawingml/2006/main">
             <a:defPPr>
               <a:defRPr sz="2400" b="0">
                 <a:solidFill>
@@ -9176,7 +9413,7 @@
               </a:defRPr>
             </a:lvl9pPr>
           </a:lstStyle>
-          <a:p>
+          <a:p xmlns:a="http://schemas.openxmlformats.org/drawingml/2006/main">
             <a:pPr>
               <a:buNone/>
               <a:defRPr sz="2400" b="0">
@@ -9199,33 +9436,33 @@
       <p:sp>
         <p:nvSpPr>
           <p:cNvPr id="5" name="demo-number-0">
-            <a:extLst>
+            <a:extLst xmlns:a="http://schemas.openxmlformats.org/drawingml/2006/main">
               <a:ext uri="{FF2B5EF4-FFF2-40B4-BE49-F238E27FC236}">
                 <a16:creationId xmlns:a16="http://schemas.microsoft.com/office/drawing/2014/main" id="{0B759CDE-DD96-4235-9200-7C1F471D1CB0}"/>
               </a:ext>
             </a:extLst>
           </p:cNvPr>
           <p:cNvSpPr>
-            <a:spLocks noGrp="1"/>
+            <a:spLocks xmlns:a="http://schemas.openxmlformats.org/drawingml/2006/main" noGrp="1"/>
           </p:cNvSpPr>
           <p:nvPr/>
         </p:nvSpPr>
         <p:spPr>
-          <a:xfrm>
+          <a:xfrm xmlns:a="http://schemas.openxmlformats.org/drawingml/2006/main">
             <a:off x="723900" y="3067050"/>
             <a:ext cx="723900" cy="523875"/>
           </a:xfrm>
-          <a:prstGeom prst="rect">
+          <a:prstGeom xmlns:a="http://schemas.openxmlformats.org/drawingml/2006/main" prst="rect">
             <a:avLst/>
           </a:prstGeom>
-          <a:noFill/>
-          <a:ln w="0">
+          <a:noFill xmlns:a="http://schemas.openxmlformats.org/drawingml/2006/main"/>
+          <a:ln xmlns:a="http://schemas.openxmlformats.org/drawingml/2006/main" w="0">
             <a:noFill/>
           </a:ln>
         </p:spPr>
         <p:txBody>
-          <a:bodyPr lIns="0" tIns="0" rIns="0" bIns="0"/>
-          <a:lstStyle>
+          <a:bodyPr xmlns:a="http://schemas.openxmlformats.org/drawingml/2006/main" lIns="0" tIns="0" rIns="0" bIns="0"/>
+          <a:lstStyle xmlns:a="http://schemas.openxmlformats.org/drawingml/2006/main">
             <a:defPPr>
               <a:defRPr sz="2625" b="1">
                 <a:solidFill>
@@ -9306,7 +9543,7 @@
               </a:defRPr>
             </a:lvl9pPr>
           </a:lstStyle>
-          <a:p>
+          <a:p xmlns:a="http://schemas.openxmlformats.org/drawingml/2006/main">
             <a:pPr>
               <a:buNone/>
               <a:defRPr sz="2625" b="1">
@@ -9329,33 +9566,33 @@
       <p:sp>
         <p:nvSpPr>
           <p:cNvPr id="6" name="demo-step-0">
-            <a:extLst>
+            <a:extLst xmlns:a="http://schemas.openxmlformats.org/drawingml/2006/main">
               <a:ext uri="{FF2B5EF4-FFF2-40B4-BE49-F238E27FC236}">
                 <a16:creationId xmlns:a16="http://schemas.microsoft.com/office/drawing/2014/main" id="{8D9F260A-AA88-41C8-82CA-042505CC3E81}"/>
               </a:ext>
             </a:extLst>
           </p:cNvPr>
           <p:cNvSpPr>
-            <a:spLocks noGrp="1"/>
+            <a:spLocks xmlns:a="http://schemas.openxmlformats.org/drawingml/2006/main" noGrp="1"/>
           </p:cNvSpPr>
           <p:nvPr/>
         </p:nvSpPr>
         <p:spPr>
-          <a:xfrm>
+          <a:xfrm xmlns:a="http://schemas.openxmlformats.org/drawingml/2006/main">
             <a:off x="1657350" y="3048000"/>
             <a:ext cx="4572000" cy="542925"/>
           </a:xfrm>
-          <a:prstGeom prst="rect">
+          <a:prstGeom xmlns:a="http://schemas.openxmlformats.org/drawingml/2006/main" prst="rect">
             <a:avLst/>
           </a:prstGeom>
-          <a:noFill/>
-          <a:ln w="0">
+          <a:noFill xmlns:a="http://schemas.openxmlformats.org/drawingml/2006/main"/>
+          <a:ln xmlns:a="http://schemas.openxmlformats.org/drawingml/2006/main" w="0">
             <a:noFill/>
           </a:ln>
         </p:spPr>
         <p:txBody>
-          <a:bodyPr lIns="0" tIns="0" rIns="0" bIns="0"/>
-          <a:lstStyle>
+          <a:bodyPr xmlns:a="http://schemas.openxmlformats.org/drawingml/2006/main" lIns="0" tIns="0" rIns="0" bIns="0"/>
+          <a:lstStyle xmlns:a="http://schemas.openxmlformats.org/drawingml/2006/main">
             <a:defPPr>
               <a:defRPr sz="3150" b="1">
                 <a:solidFill>
@@ -9436,7 +9673,7 @@
               </a:defRPr>
             </a:lvl9pPr>
           </a:lstStyle>
-          <a:p>
+          <a:p xmlns:a="http://schemas.openxmlformats.org/drawingml/2006/main">
             <a:pPr>
               <a:buNone/>
               <a:defRPr sz="3150" b="1">
@@ -9459,33 +9696,33 @@
       <p:sp>
         <p:nvSpPr>
           <p:cNvPr id="7" name="demo-number-1">
-            <a:extLst>
+            <a:extLst xmlns:a="http://schemas.openxmlformats.org/drawingml/2006/main">
               <a:ext uri="{FF2B5EF4-FFF2-40B4-BE49-F238E27FC236}">
                 <a16:creationId xmlns:a16="http://schemas.microsoft.com/office/drawing/2014/main" id="{A8500B80-403B-4B5E-9A17-472FFEE84DAF}"/>
               </a:ext>
             </a:extLst>
           </p:cNvPr>
           <p:cNvSpPr>
-            <a:spLocks noGrp="1"/>
+            <a:spLocks xmlns:a="http://schemas.openxmlformats.org/drawingml/2006/main" noGrp="1"/>
           </p:cNvSpPr>
           <p:nvPr/>
         </p:nvSpPr>
         <p:spPr>
-          <a:xfrm>
+          <a:xfrm xmlns:a="http://schemas.openxmlformats.org/drawingml/2006/main">
             <a:off x="723900" y="3790950"/>
             <a:ext cx="723900" cy="523875"/>
           </a:xfrm>
-          <a:prstGeom prst="rect">
+          <a:prstGeom xmlns:a="http://schemas.openxmlformats.org/drawingml/2006/main" prst="rect">
             <a:avLst/>
           </a:prstGeom>
-          <a:noFill/>
-          <a:ln w="0">
+          <a:noFill xmlns:a="http://schemas.openxmlformats.org/drawingml/2006/main"/>
+          <a:ln xmlns:a="http://schemas.openxmlformats.org/drawingml/2006/main" w="0">
             <a:noFill/>
           </a:ln>
         </p:spPr>
         <p:txBody>
-          <a:bodyPr lIns="0" tIns="0" rIns="0" bIns="0"/>
-          <a:lstStyle>
+          <a:bodyPr xmlns:a="http://schemas.openxmlformats.org/drawingml/2006/main" lIns="0" tIns="0" rIns="0" bIns="0"/>
+          <a:lstStyle xmlns:a="http://schemas.openxmlformats.org/drawingml/2006/main">
             <a:defPPr>
               <a:defRPr sz="2625" b="1">
                 <a:solidFill>
@@ -9566,7 +9803,7 @@
               </a:defRPr>
             </a:lvl9pPr>
           </a:lstStyle>
-          <a:p>
+          <a:p xmlns:a="http://schemas.openxmlformats.org/drawingml/2006/main">
             <a:pPr>
               <a:buNone/>
               <a:defRPr sz="2625" b="1">
@@ -9589,33 +9826,33 @@
       <p:sp>
         <p:nvSpPr>
           <p:cNvPr id="8" name="demo-step-1">
-            <a:extLst>
+            <a:extLst xmlns:a="http://schemas.openxmlformats.org/drawingml/2006/main">
               <a:ext uri="{FF2B5EF4-FFF2-40B4-BE49-F238E27FC236}">
                 <a16:creationId xmlns:a16="http://schemas.microsoft.com/office/drawing/2014/main" id="{1B748AC6-D959-4CC9-9E51-F5F229CAF461}"/>
               </a:ext>
             </a:extLst>
           </p:cNvPr>
           <p:cNvSpPr>
-            <a:spLocks noGrp="1"/>
+            <a:spLocks xmlns:a="http://schemas.openxmlformats.org/drawingml/2006/main" noGrp="1"/>
           </p:cNvSpPr>
           <p:nvPr/>
         </p:nvSpPr>
         <p:spPr>
-          <a:xfrm>
+          <a:xfrm xmlns:a="http://schemas.openxmlformats.org/drawingml/2006/main">
             <a:off x="1657350" y="3771900"/>
             <a:ext cx="4572000" cy="542925"/>
           </a:xfrm>
-          <a:prstGeom prst="rect">
+          <a:prstGeom xmlns:a="http://schemas.openxmlformats.org/drawingml/2006/main" prst="rect">
             <a:avLst/>
           </a:prstGeom>
-          <a:noFill/>
-          <a:ln w="0">
+          <a:noFill xmlns:a="http://schemas.openxmlformats.org/drawingml/2006/main"/>
+          <a:ln xmlns:a="http://schemas.openxmlformats.org/drawingml/2006/main" w="0">
             <a:noFill/>
           </a:ln>
         </p:spPr>
         <p:txBody>
-          <a:bodyPr lIns="0" tIns="0" rIns="0" bIns="0"/>
-          <a:lstStyle>
+          <a:bodyPr xmlns:a="http://schemas.openxmlformats.org/drawingml/2006/main" lIns="0" tIns="0" rIns="0" bIns="0"/>
+          <a:lstStyle xmlns:a="http://schemas.openxmlformats.org/drawingml/2006/main">
             <a:defPPr>
               <a:defRPr sz="3150" b="1">
                 <a:solidFill>
@@ -9696,7 +9933,7 @@
               </a:defRPr>
             </a:lvl9pPr>
           </a:lstStyle>
-          <a:p>
+          <a:p xmlns:a="http://schemas.openxmlformats.org/drawingml/2006/main">
             <a:pPr>
               <a:buNone/>
               <a:defRPr sz="3150" b="1">
@@ -9719,33 +9956,33 @@
       <p:sp>
         <p:nvSpPr>
           <p:cNvPr id="9" name="demo-number-2">
-            <a:extLst>
+            <a:extLst xmlns:a="http://schemas.openxmlformats.org/drawingml/2006/main">
               <a:ext uri="{FF2B5EF4-FFF2-40B4-BE49-F238E27FC236}">
                 <a16:creationId xmlns:a16="http://schemas.microsoft.com/office/drawing/2014/main" id="{10AD7120-3AA4-4A2F-BA1F-9BC15B980BFD}"/>
               </a:ext>
             </a:extLst>
           </p:cNvPr>
           <p:cNvSpPr>
-            <a:spLocks noGrp="1"/>
+            <a:spLocks xmlns:a="http://schemas.openxmlformats.org/drawingml/2006/main" noGrp="1"/>
           </p:cNvSpPr>
           <p:nvPr/>
         </p:nvSpPr>
         <p:spPr>
-          <a:xfrm>
+          <a:xfrm xmlns:a="http://schemas.openxmlformats.org/drawingml/2006/main">
             <a:off x="723900" y="4514850"/>
             <a:ext cx="723900" cy="523875"/>
           </a:xfrm>
-          <a:prstGeom prst="rect">
+          <a:prstGeom xmlns:a="http://schemas.openxmlformats.org/drawingml/2006/main" prst="rect">
             <a:avLst/>
           </a:prstGeom>
-          <a:noFill/>
-          <a:ln w="0">
+          <a:noFill xmlns:a="http://schemas.openxmlformats.org/drawingml/2006/main"/>
+          <a:ln xmlns:a="http://schemas.openxmlformats.org/drawingml/2006/main" w="0">
             <a:noFill/>
           </a:ln>
         </p:spPr>
         <p:txBody>
-          <a:bodyPr lIns="0" tIns="0" rIns="0" bIns="0"/>
-          <a:lstStyle>
+          <a:bodyPr xmlns:a="http://schemas.openxmlformats.org/drawingml/2006/main" lIns="0" tIns="0" rIns="0" bIns="0"/>
+          <a:lstStyle xmlns:a="http://schemas.openxmlformats.org/drawingml/2006/main">
             <a:defPPr>
               <a:defRPr sz="2625" b="1">
                 <a:solidFill>
@@ -9826,7 +10063,7 @@
               </a:defRPr>
             </a:lvl9pPr>
           </a:lstStyle>
-          <a:p>
+          <a:p xmlns:a="http://schemas.openxmlformats.org/drawingml/2006/main">
             <a:pPr>
               <a:buNone/>
               <a:defRPr sz="2625" b="1">
@@ -9849,33 +10086,33 @@
       <p:sp>
         <p:nvSpPr>
           <p:cNvPr id="10" name="demo-step-2">
-            <a:extLst>
+            <a:extLst xmlns:a="http://schemas.openxmlformats.org/drawingml/2006/main">
               <a:ext uri="{FF2B5EF4-FFF2-40B4-BE49-F238E27FC236}">
                 <a16:creationId xmlns:a16="http://schemas.microsoft.com/office/drawing/2014/main" id="{FF2579D2-C2F0-4EB7-A0B2-DC7DB530C08A}"/>
               </a:ext>
             </a:extLst>
           </p:cNvPr>
           <p:cNvSpPr>
-            <a:spLocks noGrp="1"/>
+            <a:spLocks xmlns:a="http://schemas.openxmlformats.org/drawingml/2006/main" noGrp="1"/>
           </p:cNvSpPr>
           <p:nvPr/>
         </p:nvSpPr>
         <p:spPr>
-          <a:xfrm>
+          <a:xfrm xmlns:a="http://schemas.openxmlformats.org/drawingml/2006/main">
             <a:off x="1657350" y="4495800"/>
             <a:ext cx="4572000" cy="542925"/>
           </a:xfrm>
-          <a:prstGeom prst="rect">
+          <a:prstGeom xmlns:a="http://schemas.openxmlformats.org/drawingml/2006/main" prst="rect">
             <a:avLst/>
           </a:prstGeom>
-          <a:noFill/>
-          <a:ln w="0">
+          <a:noFill xmlns:a="http://schemas.openxmlformats.org/drawingml/2006/main"/>
+          <a:ln xmlns:a="http://schemas.openxmlformats.org/drawingml/2006/main" w="0">
             <a:noFill/>
           </a:ln>
         </p:spPr>
         <p:txBody>
-          <a:bodyPr lIns="0" tIns="0" rIns="0" bIns="0"/>
-          <a:lstStyle>
+          <a:bodyPr xmlns:a="http://schemas.openxmlformats.org/drawingml/2006/main" lIns="0" tIns="0" rIns="0" bIns="0"/>
+          <a:lstStyle xmlns:a="http://schemas.openxmlformats.org/drawingml/2006/main">
             <a:defPPr>
               <a:defRPr sz="3150" b="1">
                 <a:solidFill>
@@ -9956,7 +10193,7 @@
               </a:defRPr>
             </a:lvl9pPr>
           </a:lstStyle>
-          <a:p>
+          <a:p xmlns:a="http://schemas.openxmlformats.org/drawingml/2006/main">
             <a:pPr>
               <a:buNone/>
               <a:defRPr sz="3150" b="1">
@@ -9979,33 +10216,33 @@
       <p:sp>
         <p:nvSpPr>
           <p:cNvPr id="11" name="demo-goal">
-            <a:extLst>
+            <a:extLst xmlns:a="http://schemas.openxmlformats.org/drawingml/2006/main">
               <a:ext uri="{FF2B5EF4-FFF2-40B4-BE49-F238E27FC236}">
                 <a16:creationId xmlns:a16="http://schemas.microsoft.com/office/drawing/2014/main" id="{C8FFF4F6-2816-478B-9BCE-3DC34BA42186}"/>
               </a:ext>
             </a:extLst>
           </p:cNvPr>
           <p:cNvSpPr>
-            <a:spLocks noGrp="1"/>
+            <a:spLocks xmlns:a="http://schemas.openxmlformats.org/drawingml/2006/main" noGrp="1"/>
           </p:cNvSpPr>
           <p:nvPr/>
         </p:nvSpPr>
         <p:spPr>
-          <a:xfrm>
+          <a:xfrm xmlns:a="http://schemas.openxmlformats.org/drawingml/2006/main">
             <a:off x="723900" y="5648325"/>
             <a:ext cx="6048375" cy="781050"/>
           </a:xfrm>
-          <a:prstGeom prst="rect">
+          <a:prstGeom xmlns:a="http://schemas.openxmlformats.org/drawingml/2006/main" prst="rect">
             <a:avLst/>
           </a:prstGeom>
-          <a:noFill/>
-          <a:ln w="0">
+          <a:noFill xmlns:a="http://schemas.openxmlformats.org/drawingml/2006/main"/>
+          <a:ln xmlns:a="http://schemas.openxmlformats.org/drawingml/2006/main" w="0">
             <a:noFill/>
           </a:ln>
         </p:spPr>
         <p:txBody>
-          <a:bodyPr lIns="0" tIns="0" rIns="0" bIns="0"/>
-          <a:lstStyle>
+          <a:bodyPr xmlns:a="http://schemas.openxmlformats.org/drawingml/2006/main" lIns="0" tIns="0" rIns="0" bIns="0"/>
+          <a:lstStyle xmlns:a="http://schemas.openxmlformats.org/drawingml/2006/main">
             <a:defPPr>
               <a:defRPr sz="2100" b="0">
                 <a:solidFill>
@@ -10086,7 +10323,7 @@
               </a:defRPr>
             </a:lvl9pPr>
           </a:lstStyle>
-          <a:p>
+          <a:p xmlns:a="http://schemas.openxmlformats.org/drawingml/2006/main">
             <a:pPr>
               <a:buNone/>
               <a:defRPr sz="2100" b="0">
@@ -10104,7 +10341,7 @@
               <a:t>Eine Stelle ansehen.</a:t>
             </a:r>
           </a:p>
-          <a:p>
+          <a:p xmlns:a="http://schemas.openxmlformats.org/drawingml/2006/main">
             <a:pPr>
               <a:buNone/>
               <a:defRPr sz="2100" b="0">
@@ -10126,36 +10363,36 @@
       </p:sp>
       <p:pic>
         <p:nvPicPr>
-          <p:cNvPr id="13" name="Grafik 12" descr="Potenz mit einfarbiger Füllung">
-            <a:extLst>
+          <p:cNvPr id="13" name="Grafik 12">
+            <a:extLst xmlns:a="http://schemas.openxmlformats.org/drawingml/2006/main">
               <a:ext uri="{FF2B5EF4-FFF2-40B4-BE49-F238E27FC236}">
-                <a16:creationId xmlns:a16="http://schemas.microsoft.com/office/drawing/2014/main" id="{478D6523-8E61-674F-9069-0111BDA52569}"/>
+                <a16:creationId xmlns:a16="http://schemas.microsoft.com/office/drawing/2014/main" id="{86A33FFD-15F3-46F7-92D8-23B3CB15AD00}"/>
               </a:ext>
             </a:extLst>
           </p:cNvPr>
           <p:cNvPicPr>
-            <a:picLocks noChangeAspect="1"/>
+            <a:picLocks xmlns:a="http://schemas.openxmlformats.org/drawingml/2006/main" noChangeAspect="1"/>
           </p:cNvPicPr>
           <p:nvPr/>
         </p:nvPicPr>
         <p:blipFill>
-          <a:blip>
+          <a:blip xmlns:r="http://schemas.openxmlformats.org/officeDocument/2006/relationships" xmlns:a="http://schemas.openxmlformats.org/drawingml/2006/main" r:embed="R557bf3891c0e48fc">
             <a:extLst>
               <a:ext uri="{96DAC541-7B7A-43D3-8B79-37D633B846F1}">
-                <asvg:svgBlip xmlns:asvg="http://schemas.microsoft.com/office/drawing/2016/SVG/main" r:embed="rId3"/>
+                <asvg:svgBlip xmlns:asvg="http://schemas.microsoft.com/office/drawing/2016/SVG/main" r:embed="Rf8e59da3a1d04d71"/>
               </a:ext>
             </a:extLst>
           </a:blip>
-          <a:stretch>
-            <a:fillRect/>
+          <a:stretch xmlns:a="http://schemas.openxmlformats.org/drawingml/2006/main">
+            <a:fillRect l="0" t="0" r="0" b="0"/>
           </a:stretch>
         </p:blipFill>
         <p:spPr>
-          <a:xfrm>
+          <a:xfrm xmlns:a="http://schemas.openxmlformats.org/drawingml/2006/main">
             <a:off x="7717536" y="2540127"/>
             <a:ext cx="2463546" cy="2463546"/>
           </a:xfrm>
-          <a:prstGeom prst="rect">
+          <a:prstGeom xmlns:a="http://schemas.openxmlformats.org/drawingml/2006/main" prst="rect">
             <a:avLst/>
           </a:prstGeom>
         </p:spPr>
@@ -10167,14 +10404,11 @@
       </p:ext>
     </p:extLst>
   </p:cSld>
-  <p:clrMapOvr>
-    <a:masterClrMapping/>
-  </p:clrMapOvr>
 </p:sld>
 </file>
 
 <file path=ppt/slides/slide5.xml><?xml version="1.0" encoding="utf-8"?>
-<p:sld xmlns:a="http://schemas.openxmlformats.org/drawingml/2006/main" xmlns:r="http://schemas.openxmlformats.org/officeDocument/2006/relationships" xmlns:p="http://schemas.openxmlformats.org/presentationml/2006/main" show="0">
+<p:sld xmlns:p="http://schemas.openxmlformats.org/presentationml/2006/main" show="0">
   <p:cSld>
     <p:spTree>
       <p:nvGrpSpPr>
@@ -10183,48 +10417,46 @@
         <p:nvPr/>
       </p:nvGrpSpPr>
       <p:grpSpPr>
-        <a:xfrm>
-          <a:off x="0" y="0"/>
-          <a:ext cx="0" cy="0"/>
-          <a:chOff x="0" y="0"/>
-          <a:chExt cx="0" cy="0"/>
-        </a:xfrm>
+        <a:xfrm xmlns:a="http://schemas.openxmlformats.org/drawingml/2006/main"/>
       </p:grpSpPr>
       <p:sp>
         <p:nvSpPr>
           <p:cNvPr id="2" name="ai-title">
-            <a:extLst>
+            <a:extLst xmlns:a="http://schemas.openxmlformats.org/drawingml/2006/main">
               <a:ext uri="{FF2B5EF4-FFF2-40B4-BE49-F238E27FC236}">
                 <a16:creationId xmlns:a16="http://schemas.microsoft.com/office/drawing/2014/main" id="{AEEBEF97-8B83-7D1E-7B7A-5C8F8C0BEF5B}"/>
               </a:ext>
             </a:extLst>
           </p:cNvPr>
           <p:cNvSpPr>
-            <a:spLocks noGrp="1"/>
+            <a:spLocks xmlns:a="http://schemas.openxmlformats.org/drawingml/2006/main" noGrp="1"/>
           </p:cNvSpPr>
           <p:nvPr/>
         </p:nvSpPr>
         <p:spPr>
-          <a:xfrm>
-            <a:off x="253164" y="187345"/>
-            <a:ext cx="11938836" cy="857250"/>
+          <a:xfrm xmlns:a="http://schemas.openxmlformats.org/drawingml/2006/main">
+            <a:off x="685800" y="581025"/>
+            <a:ext cx="10820400" cy="857250"/>
           </a:xfrm>
-          <a:prstGeom prst="rect">
+          <a:prstGeom xmlns:a="http://schemas.openxmlformats.org/drawingml/2006/main" prst="rect">
             <a:avLst/>
           </a:prstGeom>
-          <a:noFill/>
-          <a:ln w="0">
+          <a:noFill xmlns:a="http://schemas.openxmlformats.org/drawingml/2006/main"/>
+          <a:ln xmlns:a="http://schemas.openxmlformats.org/drawingml/2006/main" w="0">
             <a:noFill/>
           </a:ln>
         </p:spPr>
         <p:txBody>
-          <a:bodyPr lIns="0" tIns="0" rIns="0" bIns="0"/>
-          <a:lstStyle>
+          <a:bodyPr xmlns:a="http://schemas.openxmlformats.org/drawingml/2006/main" lIns="0" tIns="0" rIns="0" bIns="0"/>
+          <a:lstStyle xmlns:a="http://schemas.openxmlformats.org/drawingml/2006/main">
             <a:defPPr>
-              <a:defRPr sz="4050" b="1">
-                <a:solidFill>
-                  <a:srgbClr val="181520"/>
-                </a:solidFill>
+              <a:defRPr sz="4800" b="1">
+                <a:solidFill>
+                  <a:srgbClr val="3702BF"/>
+                </a:solidFill>
+                <a:latin typeface="Aptos"/>
+                <a:ea typeface="Aptos"/>
+                <a:cs typeface="Aptos"/>
               </a:defRPr>
             </a:defPPr>
             <a:lvl1pPr>
@@ -10300,77 +10532,62 @@
               </a:defRPr>
             </a:lvl9pPr>
           </a:lstStyle>
-          <a:p>
+          <a:p xmlns:a="http://schemas.openxmlformats.org/drawingml/2006/main">
             <a:pPr>
-              <a:defRPr sz="4050" b="1">
-                <a:solidFill>
-                  <a:srgbClr val="181520"/>
-                </a:solidFill>
+              <a:buNone/>
+              <a:defRPr sz="4800" b="1">
+                <a:solidFill>
+                  <a:srgbClr val="3702BF"/>
+                </a:solidFill>
+                <a:latin typeface="Aptos"/>
+                <a:ea typeface="Aptos"/>
+                <a:cs typeface="Aptos"/>
               </a:defRPr>
             </a:pPr>
             <a:r>
-              <a:rPr lang="de-DE" sz="4400" dirty="0">
+              <a:rPr sz="4800" b="1">
                 <a:solidFill>
                   <a:srgbClr val="3702BF"/>
                 </a:solidFill>
-              </a:rPr>
-              <a:t>Aufnehmen allein reicht nicht – </a:t>
-            </a:r>
-          </a:p>
-          <a:p>
-            <a:pPr>
-              <a:defRPr sz="4050" b="1">
-                <a:solidFill>
-                  <a:srgbClr val="181520"/>
-                </a:solidFill>
-              </a:defRPr>
-            </a:pPr>
-            <a:r>
-              <a:rPr lang="de-DE" sz="4400" dirty="0">
-                <a:solidFill>
-                  <a:srgbClr val="3702BF"/>
-                </a:solidFill>
+                <a:latin typeface="Aptos"/>
+                <a:ea typeface="Aptos"/>
+                <a:cs typeface="Aptos"/>
               </a:rPr>
               <a:t>Feedback macht den Unterschied</a:t>
             </a:r>
-            <a:endParaRPr sz="4400" dirty="0">
-              <a:solidFill>
-                <a:srgbClr val="3702BF"/>
-              </a:solidFill>
-            </a:endParaRPr>
           </a:p>
         </p:txBody>
       </p:sp>
       <p:sp>
         <p:nvSpPr>
           <p:cNvPr id="14" name="correction-example">
-            <a:extLst>
+            <a:extLst xmlns:a="http://schemas.openxmlformats.org/drawingml/2006/main">
               <a:ext uri="{FF2B5EF4-FFF2-40B4-BE49-F238E27FC236}">
                 <a16:creationId xmlns:a16="http://schemas.microsoft.com/office/drawing/2014/main" id="{72419A1D-5A9E-52B4-B842-6B81D14B6CBC}"/>
               </a:ext>
             </a:extLst>
           </p:cNvPr>
           <p:cNvSpPr>
-            <a:spLocks noGrp="1"/>
+            <a:spLocks xmlns:a="http://schemas.openxmlformats.org/drawingml/2006/main" noGrp="1"/>
           </p:cNvSpPr>
           <p:nvPr/>
         </p:nvSpPr>
         <p:spPr>
-          <a:xfrm>
+          <a:xfrm xmlns:a="http://schemas.openxmlformats.org/drawingml/2006/main">
             <a:off x="170447" y="4853237"/>
             <a:ext cx="11851105" cy="676275"/>
           </a:xfrm>
-          <a:prstGeom prst="rect">
+          <a:prstGeom xmlns:a="http://schemas.openxmlformats.org/drawingml/2006/main" prst="rect">
             <a:avLst/>
           </a:prstGeom>
-          <a:noFill/>
-          <a:ln w="0">
+          <a:noFill xmlns:a="http://schemas.openxmlformats.org/drawingml/2006/main"/>
+          <a:ln xmlns:a="http://schemas.openxmlformats.org/drawingml/2006/main" w="0">
             <a:noFill/>
           </a:ln>
         </p:spPr>
         <p:txBody>
-          <a:bodyPr lIns="0" tIns="0" rIns="0" bIns="0"/>
-          <a:lstStyle>
+          <a:bodyPr xmlns:a="http://schemas.openxmlformats.org/drawingml/2006/main" lIns="0" tIns="0" rIns="0" bIns="0"/>
+          <a:lstStyle xmlns:a="http://schemas.openxmlformats.org/drawingml/2006/main">
             <a:defPPr>
               <a:defRPr sz="2100" b="0">
                 <a:solidFill>
@@ -10451,7 +10668,7 @@
               </a:defRPr>
             </a:lvl9pPr>
           </a:lstStyle>
-          <a:p>
+          <a:p xmlns:a="http://schemas.openxmlformats.org/drawingml/2006/main">
             <a:pPr algn="ctr">
               <a:buNone/>
               <a:defRPr sz="2100" b="0">
@@ -10460,7 +10677,7 @@
                 </a:solidFill>
               </a:defRPr>
             </a:pPr>
-            <a:endParaRPr sz="2100" b="1" dirty="0">
+            <a:endParaRPr sz="2100" b="1">
               <a:solidFill>
                 <a:srgbClr val="35303F"/>
               </a:solidFill>
@@ -10471,41 +10688,45 @@
       <p:sp>
         <p:nvSpPr>
           <p:cNvPr id="21" name="benefit-learner-3">
-            <a:extLst>
+            <a:extLst xmlns:a="http://schemas.openxmlformats.org/drawingml/2006/main">
               <a:ext uri="{FF2B5EF4-FFF2-40B4-BE49-F238E27FC236}">
                 <a16:creationId xmlns:a16="http://schemas.microsoft.com/office/drawing/2014/main" id="{12E7F86B-E11C-42A9-9242-5FF2B99AAFB3}"/>
               </a:ext>
             </a:extLst>
           </p:cNvPr>
           <p:cNvSpPr>
-            <a:spLocks noGrp="1"/>
+            <a:spLocks xmlns:a="http://schemas.openxmlformats.org/drawingml/2006/main" noGrp="1"/>
           </p:cNvSpPr>
           <p:nvPr/>
         </p:nvSpPr>
         <p:spPr>
-          <a:xfrm>
-            <a:off x="685800" y="4105275"/>
-            <a:ext cx="5095875" cy="457200"/>
+          <a:xfrm xmlns:a="http://schemas.openxmlformats.org/drawingml/2006/main">
+            <a:off x="723900" y="1847850"/>
+            <a:ext cx="10763250" cy="762000"/>
           </a:xfrm>
-          <a:prstGeom prst="rect">
+          <a:prstGeom xmlns:a="http://schemas.openxmlformats.org/drawingml/2006/main" prst="rect">
             <a:avLst/>
           </a:prstGeom>
-          <a:noFill/>
-          <a:ln w="0">
+          <a:noFill xmlns:a="http://schemas.openxmlformats.org/drawingml/2006/main"/>
+          <a:ln xmlns:a="http://schemas.openxmlformats.org/drawingml/2006/main" w="0">
             <a:noFill/>
           </a:ln>
         </p:spPr>
         <p:txBody>
-          <a:bodyPr lIns="0" tIns="0" rIns="0" bIns="0"/>
-          <a:lstStyle>
+          <a:bodyPr xmlns:a="http://schemas.openxmlformats.org/drawingml/2006/main" lIns="0" tIns="0" rIns="0" bIns="0"/>
+          <a:lstStyle xmlns:a="http://schemas.openxmlformats.org/drawingml/2006/main">
             <a:defPPr>
-              <a:defRPr sz="2025">
-                <a:solidFill>
-                  <a:srgbClr val="35303F"/>
-                </a:solidFill>
+              <a:defRPr sz="2400" b="0">
+                <a:solidFill>
+                  <a:srgbClr val="35303F"/>
+                </a:solidFill>
+                <a:latin typeface="Aptos"/>
+                <a:ea typeface="Aptos"/>
+                <a:cs typeface="Aptos"/>
               </a:defRPr>
             </a:defPPr>
             <a:lvl1pPr>
+              <a:buNone/>
               <a:defRPr sz="2025">
                 <a:solidFill>
                   <a:srgbClr val="35303F"/>
@@ -10513,6 +10734,7 @@
               </a:defRPr>
             </a:lvl1pPr>
             <a:lvl2pPr>
+              <a:buNone/>
               <a:defRPr sz="2025">
                 <a:solidFill>
                   <a:srgbClr val="35303F"/>
@@ -10520,6 +10742,7 @@
               </a:defRPr>
             </a:lvl2pPr>
             <a:lvl3pPr>
+              <a:buNone/>
               <a:defRPr sz="2025">
                 <a:solidFill>
                   <a:srgbClr val="35303F"/>
@@ -10527,6 +10750,7 @@
               </a:defRPr>
             </a:lvl3pPr>
             <a:lvl4pPr>
+              <a:buNone/>
               <a:defRPr sz="2025">
                 <a:solidFill>
                   <a:srgbClr val="35303F"/>
@@ -10534,6 +10758,7 @@
               </a:defRPr>
             </a:lvl4pPr>
             <a:lvl5pPr>
+              <a:buNone/>
               <a:defRPr sz="2025">
                 <a:solidFill>
                   <a:srgbClr val="35303F"/>
@@ -10541,6 +10766,7 @@
               </a:defRPr>
             </a:lvl5pPr>
             <a:lvl6pPr>
+              <a:buNone/>
               <a:defRPr sz="2025">
                 <a:solidFill>
                   <a:srgbClr val="35303F"/>
@@ -10548,6 +10774,7 @@
               </a:defRPr>
             </a:lvl6pPr>
             <a:lvl7pPr>
+              <a:buNone/>
               <a:defRPr sz="2025">
                 <a:solidFill>
                   <a:srgbClr val="35303F"/>
@@ -10555,6 +10782,7 @@
               </a:defRPr>
             </a:lvl7pPr>
             <a:lvl8pPr>
+              <a:buNone/>
               <a:defRPr sz="2025">
                 <a:solidFill>
                   <a:srgbClr val="35303F"/>
@@ -10562,6 +10790,7 @@
               </a:defRPr>
             </a:lvl8pPr>
             <a:lvl9pPr>
+              <a:buNone/>
               <a:defRPr sz="2025">
                 <a:solidFill>
                   <a:srgbClr val="35303F"/>
@@ -10569,15 +10798,30 @@
               </a:defRPr>
             </a:lvl9pPr>
           </a:lstStyle>
-          <a:p>
+          <a:p xmlns:a="http://schemas.openxmlformats.org/drawingml/2006/main">
             <a:pPr>
-              <a:defRPr sz="2025">
-                <a:solidFill>
-                  <a:srgbClr val="35303F"/>
-                </a:solidFill>
+              <a:buNone/>
+              <a:defRPr sz="2400" b="0">
+                <a:solidFill>
+                  <a:srgbClr val="35303F"/>
+                </a:solidFill>
+                <a:latin typeface="Aptos"/>
+                <a:ea typeface="Aptos"/>
+                <a:cs typeface="Aptos"/>
               </a:defRPr>
             </a:pPr>
-            <a:endParaRPr sz="2025" dirty="0">
+            <a:r>
+              <a:rPr sz="2400" b="0">
+                <a:solidFill>
+                  <a:srgbClr val="35303F"/>
+                </a:solidFill>
+                <a:latin typeface="Aptos"/>
+                <a:ea typeface="Aptos"/>
+                <a:cs typeface="Aptos"/>
+              </a:rPr>
+              <a:t>Eine Studie mit 90 Studierenden im Bewerbungsgespräch</a:t>
+            </a:r>
+            <a:endParaRPr sz="2025">
               <a:solidFill>
                 <a:srgbClr val="35303F"/>
               </a:solidFill>
@@ -10588,55 +10832,29 @@
       <p:graphicFrame>
         <p:nvGraphicFramePr>
           <p:cNvPr id="3" name="Tabelle 2">
-            <a:extLst>
+            <a:extLst xmlns:a="http://schemas.openxmlformats.org/drawingml/2006/main">
               <a:ext uri="{FF2B5EF4-FFF2-40B4-BE49-F238E27FC236}">
-                <a16:creationId xmlns:a16="http://schemas.microsoft.com/office/drawing/2014/main" id="{93AAB9AE-302A-FE46-AB3D-EBD4AAB3B3FF}"/>
+                <a16:creationId xmlns:a16="http://schemas.microsoft.com/office/drawing/2014/main" id="{0B1AA579-F7C1-49B3-A58C-51CC99829125}"/>
               </a:ext>
             </a:extLst>
           </p:cNvPr>
-          <p:cNvGraphicFramePr>
-            <a:graphicFrameLocks noGrp="1"/>
-          </p:cNvGraphicFramePr>
-          <p:nvPr>
-            <p:extLst>
-              <p:ext uri="{D42A27DB-BD31-4B8C-83A1-F6EECF244321}">
-                <p14:modId xmlns:p14="http://schemas.microsoft.com/office/powerpoint/2010/main" val="2611078760"/>
-              </p:ext>
-            </p:extLst>
-          </p:nvPr>
+          <p:cNvGraphicFramePr/>
+          <p:nvPr/>
         </p:nvGraphicFramePr>
         <p:xfrm>
-          <a:off x="1116548" y="2958454"/>
-          <a:ext cx="9958902" cy="1894783"/>
+          <a:off xmlns:a="http://schemas.openxmlformats.org/drawingml/2006/main" x="1116548" y="2958454"/>
+          <a:ext xmlns:a="http://schemas.openxmlformats.org/drawingml/2006/main" cx="9958902" cy="1894783"/>
         </p:xfrm>
-        <a:graphic>
+        <a:graphic xmlns:a="http://schemas.openxmlformats.org/drawingml/2006/main">
           <a:graphicData uri="http://schemas.openxmlformats.org/drawingml/2006/table">
             <a:tbl>
               <a:tblPr firstRow="1" bandRow="1">
                 <a:tableStyleId>{9D7B26C5-4107-4FEC-AEDC-1716B250A1EF}</a:tableStyleId>
               </a:tblPr>
               <a:tblGrid>
-                <a:gridCol w="3319634">
-                  <a:extLst>
-                    <a:ext uri="{9D8B030D-6E8A-4147-A177-3AD203B41FA5}">
-                      <a16:colId xmlns:a16="http://schemas.microsoft.com/office/drawing/2014/main" val="1885692217"/>
-                    </a:ext>
-                  </a:extLst>
-                </a:gridCol>
-                <a:gridCol w="3319634">
-                  <a:extLst>
-                    <a:ext uri="{9D8B030D-6E8A-4147-A177-3AD203B41FA5}">
-                      <a16:colId xmlns:a16="http://schemas.microsoft.com/office/drawing/2014/main" val="715772407"/>
-                    </a:ext>
-                  </a:extLst>
-                </a:gridCol>
-                <a:gridCol w="3319634">
-                  <a:extLst>
-                    <a:ext uri="{9D8B030D-6E8A-4147-A177-3AD203B41FA5}">
-                      <a16:colId xmlns:a16="http://schemas.microsoft.com/office/drawing/2014/main" val="2701981319"/>
-                    </a:ext>
-                  </a:extLst>
-                </a:gridCol>
+                <a:gridCol w="3319634"/>
+                <a:gridCol w="3319634"/>
+                <a:gridCol w="3319634"/>
               </a:tblGrid>
               <a:tr h="1171968">
                 <a:tc>
@@ -10645,12 +10863,19 @@
                     <a:lstStyle/>
                     <a:p>
                       <a:r>
-                        <a:rPr lang="de-DE" sz="2400" dirty="0"/>
+                        <a:rPr sz="2400" b="1">
+                          <a:solidFill>
+                            <a:srgbClr val="000000"/>
+                          </a:solidFill>
+                          <a:latin typeface="Aptos"/>
+                          <a:ea typeface="Aptos"/>
+                          <a:cs typeface="Aptos"/>
+                        </a:rPr>
                         <a:t>Tipps-Video</a:t>
                       </a:r>
                     </a:p>
                   </a:txBody>
-                  <a:tcPr anchor="ctr"/>
+                  <a:tcPr marL="91440" marR="91440" marT="45720" marB="45720" anchor="ctr"/>
                 </a:tc>
                 <a:tc>
                   <a:txBody>
@@ -10658,12 +10883,19 @@
                     <a:lstStyle/>
                     <a:p>
                       <a:r>
-                        <a:rPr lang="de-DE" sz="2400" dirty="0"/>
-                        <a:t>Eigenes Video</a:t>
+                        <a:rPr sz="2400" b="1">
+                          <a:solidFill>
+                            <a:srgbClr val="000000"/>
+                          </a:solidFill>
+                          <a:latin typeface="Aptos"/>
+                          <a:ea typeface="Aptos"/>
+                          <a:cs typeface="Aptos"/>
+                        </a:rPr>
+                        <a:t>Übung + Video</a:t>
                       </a:r>
                     </a:p>
                   </a:txBody>
-                  <a:tcPr anchor="ctr"/>
+                  <a:tcPr marL="91440" marR="91440" marT="45720" marB="45720" anchor="ctr"/>
                 </a:tc>
                 <a:tc>
                   <a:txBody>
@@ -10671,18 +10903,33 @@
                     <a:lstStyle/>
                     <a:p>
                       <a:r>
-                        <a:rPr lang="de-DE" sz="2400" dirty="0"/>
-                        <a:t>Video + Feedback</a:t>
+                        <a:rPr sz="2400" b="1">
+                          <a:solidFill>
+                            <a:srgbClr val="000000"/>
+                          </a:solidFill>
+                          <a:latin typeface="Aptos"/>
+                          <a:ea typeface="Aptos"/>
+                          <a:cs typeface="Aptos"/>
+                        </a:rPr>
+                        <a:t>Übung + Video</a:t>
+                      </a:r>
+                    </a:p>
+                    <a:p>
+                      <a:r>
+                        <a:rPr sz="2400" b="1">
+                          <a:solidFill>
+                            <a:srgbClr val="000000"/>
+                          </a:solidFill>
+                          <a:latin typeface="Aptos"/>
+                          <a:ea typeface="Aptos"/>
+                          <a:cs typeface="Aptos"/>
+                        </a:rPr>
+                        <a:t>+ Feedback</a:t>
                       </a:r>
                     </a:p>
                   </a:txBody>
-                  <a:tcPr anchor="ctr"/>
+                  <a:tcPr marL="91440" marR="91440" marT="45720" marB="45720" anchor="ctr"/>
                 </a:tc>
-                <a:extLst>
-                  <a:ext uri="{0D108BD9-81ED-4DB2-BD59-A6C34878D82A}">
-                    <a16:rowId xmlns:a16="http://schemas.microsoft.com/office/drawing/2014/main" val="1422306823"/>
-                  </a:ext>
-                </a:extLst>
               </a:tr>
               <a:tr h="722815">
                 <a:tc>
@@ -10691,12 +10938,32 @@
                     <a:lstStyle/>
                     <a:p>
                       <a:r>
-                        <a:rPr lang="de-DE"/>
-                        <a:t>✗ keine Verbesserung</a:t>
+                        <a:rPr sz="1800" b="0">
+                          <a:solidFill>
+                            <a:srgbClr val="000000"/>
+                          </a:solidFill>
+                          <a:latin typeface="Aptos"/>
+                          <a:ea typeface="Aptos"/>
+                          <a:cs typeface="Aptos"/>
+                        </a:rPr>
+                        <a:t>Keine signifikante</a:t>
+                      </a:r>
+                    </a:p>
+                    <a:p>
+                      <a:r>
+                        <a:rPr sz="1800" b="0">
+                          <a:solidFill>
+                            <a:srgbClr val="000000"/>
+                          </a:solidFill>
+                          <a:latin typeface="Aptos"/>
+                          <a:ea typeface="Aptos"/>
+                          <a:cs typeface="Aptos"/>
+                        </a:rPr>
+                        <a:t>Verbesserung</a:t>
                       </a:r>
                     </a:p>
                   </a:txBody>
-                  <a:tcPr anchor="ctr"/>
+                  <a:tcPr marL="91440" marR="91440" marT="45720" marB="45720" anchor="ctr"/>
                 </a:tc>
                 <a:tc>
                   <a:txBody>
@@ -10704,12 +10971,32 @@
                     <a:lstStyle/>
                     <a:p>
                       <a:r>
-                        <a:rPr lang="de-DE" dirty="0"/>
-                        <a:t>✗ keine Verbesserung</a:t>
+                        <a:rPr sz="1800" b="0">
+                          <a:solidFill>
+                            <a:srgbClr val="000000"/>
+                          </a:solidFill>
+                          <a:latin typeface="Aptos"/>
+                          <a:ea typeface="Aptos"/>
+                          <a:cs typeface="Aptos"/>
+                        </a:rPr>
+                        <a:t>Keine signifikante</a:t>
+                      </a:r>
+                    </a:p>
+                    <a:p>
+                      <a:r>
+                        <a:rPr sz="1800" b="0">
+                          <a:solidFill>
+                            <a:srgbClr val="000000"/>
+                          </a:solidFill>
+                          <a:latin typeface="Aptos"/>
+                          <a:ea typeface="Aptos"/>
+                          <a:cs typeface="Aptos"/>
+                        </a:rPr>
+                        <a:t>Verbesserung</a:t>
                       </a:r>
                     </a:p>
                   </a:txBody>
-                  <a:tcPr anchor="ctr"/>
+                  <a:tcPr marL="91440" marR="91440" marT="45720" marB="45720" anchor="ctr"/>
                 </a:tc>
                 <a:tc>
                   <a:txBody>
@@ -10717,18 +11004,33 @@
                     <a:lstStyle/>
                     <a:p>
                       <a:r>
-                        <a:rPr lang="de-DE" dirty="0"/>
-                        <a:t>✓ signifikant besser</a:t>
+                        <a:rPr sz="1800" b="0">
+                          <a:solidFill>
+                            <a:srgbClr val="000000"/>
+                          </a:solidFill>
+                          <a:latin typeface="Aptos"/>
+                          <a:ea typeface="Aptos"/>
+                          <a:cs typeface="Aptos"/>
+                        </a:rPr>
+                        <a:t>Signifikante</a:t>
+                      </a:r>
+                    </a:p>
+                    <a:p>
+                      <a:r>
+                        <a:rPr sz="1800" b="0">
+                          <a:solidFill>
+                            <a:srgbClr val="000000"/>
+                          </a:solidFill>
+                          <a:latin typeface="Aptos"/>
+                          <a:ea typeface="Aptos"/>
+                          <a:cs typeface="Aptos"/>
+                        </a:rPr>
+                        <a:t>Verbesserung</a:t>
                       </a:r>
                     </a:p>
                   </a:txBody>
-                  <a:tcPr anchor="ctr"/>
+                  <a:tcPr marL="91440" marR="91440" marT="45720" marB="45720" anchor="ctr"/>
                 </a:tc>
-                <a:extLst>
-                  <a:ext uri="{0D108BD9-81ED-4DB2-BD59-A6C34878D82A}">
-                    <a16:rowId xmlns:a16="http://schemas.microsoft.com/office/drawing/2014/main" val="1632860419"/>
-                  </a:ext>
-                </a:extLst>
               </a:tr>
             </a:tbl>
           </a:graphicData>
@@ -10737,63 +11039,90 @@
       <p:sp>
         <p:nvSpPr>
           <p:cNvPr id="4" name="Textfeld 3">
-            <a:extLst>
+            <a:extLst xmlns:a="http://schemas.openxmlformats.org/drawingml/2006/main">
               <a:ext uri="{FF2B5EF4-FFF2-40B4-BE49-F238E27FC236}">
                 <a16:creationId xmlns:a16="http://schemas.microsoft.com/office/drawing/2014/main" id="{EAC1535D-E8B8-F448-8A54-D395C5E3D747}"/>
               </a:ext>
             </a:extLst>
           </p:cNvPr>
-          <p:cNvSpPr txBox="1"/>
+          <p:cNvSpPr>
+            <a:spLocks xmlns:a="http://schemas.openxmlformats.org/drawingml/2006/main" noGrp="1"/>
+          </p:cNvSpPr>
           <p:nvPr/>
         </p:nvSpPr>
         <p:spPr>
-          <a:xfrm>
-            <a:off x="0" y="6273225"/>
-            <a:ext cx="12021553" cy="830997"/>
+          <a:xfrm xmlns:a="http://schemas.openxmlformats.org/drawingml/2006/main">
+            <a:off x="723900" y="5934075"/>
+            <a:ext cx="10820400" cy="640080"/>
           </a:xfrm>
-          <a:prstGeom prst="rect">
+          <a:prstGeom xmlns:a="http://schemas.openxmlformats.org/drawingml/2006/main" prst="rect">
             <a:avLst/>
           </a:prstGeom>
-          <a:noFill/>
+          <a:noFill xmlns:a="http://schemas.openxmlformats.org/drawingml/2006/main"/>
         </p:spPr>
         <p:txBody>
-          <a:bodyPr wrap="square" rtlCol="0">
+          <a:bodyPr xmlns:a="http://schemas.openxmlformats.org/drawingml/2006/main" wrap="square">
             <a:spAutoFit/>
           </a:bodyPr>
-          <a:lstStyle/>
-          <a:p>
-            <a:r>
-              <a:rPr lang="de-DE" sz="1600" dirty="0"/>
-              <a:t>MIT Media Lab, </a:t>
-            </a:r>
-            <a:r>
-              <a:rPr lang="de-DE" sz="1600" dirty="0" err="1"/>
-              <a:t>Hoque</a:t>
-            </a:r>
-            <a:r>
-              <a:rPr lang="de-DE" sz="1600" dirty="0"/>
-              <a:t> et al. 2013, randomisiert, </a:t>
-            </a:r>
-            <a:r>
-              <a:rPr lang="de-DE" sz="1600" dirty="0" err="1"/>
-              <a:t>n</a:t>
-            </a:r>
-            <a:r>
-              <a:rPr lang="de-DE" sz="1600" dirty="0"/>
-              <a:t> = 90</a:t>
+          <a:lstStyle xmlns:a="http://schemas.openxmlformats.org/drawingml/2006/main">
+            <a:defPPr>
+              <a:defRPr sz="1800" b="0" u="none">
+                <a:solidFill>
+                  <a:srgbClr val="5B5365"/>
+                </a:solidFill>
+                <a:latin typeface="Aptos"/>
+                <a:ea typeface="Aptos"/>
+                <a:cs typeface="Aptos"/>
+              </a:defRPr>
+            </a:defPPr>
+          </a:lstStyle>
+          <a:p xmlns:a="http://schemas.openxmlformats.org/drawingml/2006/main">
+            <a:pPr>
+              <a:defRPr sz="1800" b="0" u="none">
+                <a:solidFill>
+                  <a:srgbClr val="5B5365"/>
+                </a:solidFill>
+                <a:latin typeface="Aptos"/>
+                <a:ea typeface="Aptos"/>
+                <a:cs typeface="Aptos"/>
+              </a:defRPr>
+            </a:pPr>
+            <a:r>
+              <a:rPr sz="1800" b="0" u="none">
+                <a:solidFill>
+                  <a:srgbClr val="5B5365"/>
+                </a:solidFill>
+                <a:latin typeface="Aptos"/>
+                <a:ea typeface="Aptos"/>
+                <a:cs typeface="Aptos"/>
+              </a:rPr>
+              <a:t>Hoque et al. (2013), MACH-Studie, randomisiert, n = 90.</a:t>
             </a:r>
           </a:p>
-          <a:p>
-            <a:r>
-              <a:rPr lang="de-DE" sz="1600" dirty="0">
-                <a:hlinkClick r:id="rId3"/>
+          <a:p xmlns:a="http://schemas.openxmlformats.org/drawingml/2006/main">
+            <a:pPr>
+              <a:defRPr sz="1800" b="0" u="none">
+                <a:solidFill>
+                  <a:srgbClr val="5B5365"/>
+                </a:solidFill>
+                <a:latin typeface="Aptos"/>
+                <a:ea typeface="Aptos"/>
+                <a:cs typeface="Aptos"/>
+              </a:defRPr>
+            </a:pPr>
+            <a:r>
+              <a:rPr sz="1800" b="0" u="none">
+                <a:solidFill>
+                  <a:srgbClr val="5B5365"/>
+                </a:solidFill>
+                <a:latin typeface="Aptos"/>
+                <a:ea typeface="Aptos"/>
+                <a:cs typeface="Aptos"/>
+                <a:hlinkClick xmlns:r="http://schemas.openxmlformats.org/officeDocument/2006/relationships" r:id="R718ca4c800774163"/>
               </a:rPr>
-              <a:t>https://news.mit.edu/2013/automated-coach-could-help-with-social-interactions-0614</a:t>
-            </a:r>
-            <a:endParaRPr lang="de-DE" sz="1600" dirty="0"/>
-          </a:p>
-          <a:p>
-            <a:endParaRPr lang="de-DE" sz="1600" dirty="0"/>
+              <a:t>Die Wirkung unseres Prototyps ist noch ungeprüft.</a:t>
+            </a:r>
+            <a:endParaRPr sz="1600"/>
           </a:p>
         </p:txBody>
       </p:sp>
@@ -10804,9 +11133,6 @@
       </p:ext>
     </p:extLst>
   </p:cSld>
-  <p:clrMapOvr>
-    <a:masterClrMapping/>
-  </p:clrMapOvr>
 </p:sld>
 </file>
 
@@ -11052,254 +11378,5 @@
       </a:bgFillStyleLst>
     </a:fmtScheme>
   </a:themeElements>
-  <a:objectDefaults/>
-  <a:extraClrSchemeLst/>
-</a:theme>
-</file>
-
-<file path=ppt/theme/theme2.xml><?xml version="1.0" encoding="utf-8"?>
-<a:theme xmlns:a="http://schemas.openxmlformats.org/drawingml/2006/main" name="ChatGPT">
-  <a:themeElements>
-    <a:clrScheme name="ChatGPT">
-      <a:dk1>
-        <a:srgbClr val="000000"/>
-      </a:dk1>
-      <a:lt1>
-        <a:srgbClr val="FFFFFF"/>
-      </a:lt1>
-      <a:dk2>
-        <a:srgbClr val="0E2841"/>
-      </a:dk2>
-      <a:lt2>
-        <a:srgbClr val="E8E8E8"/>
-      </a:lt2>
-      <a:accent1>
-        <a:srgbClr val="156082"/>
-      </a:accent1>
-      <a:accent2>
-        <a:srgbClr val="E97132"/>
-      </a:accent2>
-      <a:accent3>
-        <a:srgbClr val="196B24"/>
-      </a:accent3>
-      <a:accent4>
-        <a:srgbClr val="0F9ED5"/>
-      </a:accent4>
-      <a:accent5>
-        <a:srgbClr val="A02B93"/>
-      </a:accent5>
-      <a:accent6>
-        <a:srgbClr val="4EA72E"/>
-      </a:accent6>
-      <a:hlink>
-        <a:srgbClr val="467886"/>
-      </a:hlink>
-      <a:folHlink>
-        <a:srgbClr val="96607D"/>
-      </a:folHlink>
-    </a:clrScheme>
-    <a:fontScheme name="">
-      <a:majorFont>
-        <a:latin typeface="Aptos"/>
-        <a:ea typeface=""/>
-        <a:cs typeface=""/>
-      </a:majorFont>
-      <a:minorFont>
-        <a:latin typeface="Aptos"/>
-        <a:ea typeface=""/>
-        <a:cs typeface=""/>
-      </a:minorFont>
-    </a:fontScheme>
-    <a:fmtScheme name="ChatGPT">
-      <a:fillStyleLst>
-        <a:solidFill>
-          <a:schemeClr val="phClr"/>
-        </a:solidFill>
-        <a:gradFill>
-          <a:gsLst>
-            <a:gs pos="0">
-              <a:schemeClr val="phClr">
-                <a:tint val="67000"/>
-                <a:lumMod val="110000"/>
-                <a:satMod val="105000"/>
-              </a:schemeClr>
-            </a:gs>
-            <a:gs pos="50000">
-              <a:schemeClr val="phClr">
-                <a:tint val="73000"/>
-                <a:lumMod val="105000"/>
-                <a:satMod val="103000"/>
-              </a:schemeClr>
-            </a:gs>
-            <a:gs pos="100000">
-              <a:schemeClr val="phClr">
-                <a:tint val="81000"/>
-                <a:lumMod val="105000"/>
-                <a:satMod val="109000"/>
-              </a:schemeClr>
-            </a:gs>
-          </a:gsLst>
-          <a:lin ang="5400000" scaled="0"/>
-        </a:gradFill>
-        <a:gradFill>
-          <a:gsLst>
-            <a:gs pos="0">
-              <a:schemeClr val="phClr">
-                <a:tint val="94000"/>
-                <a:lumMod val="102000"/>
-                <a:satMod val="103000"/>
-              </a:schemeClr>
-            </a:gs>
-            <a:gs pos="50000">
-              <a:schemeClr val="phClr">
-                <a:shade val="100000"/>
-                <a:lumMod val="100000"/>
-                <a:satMod val="110000"/>
-              </a:schemeClr>
-            </a:gs>
-            <a:gs pos="100000">
-              <a:schemeClr val="phClr">
-                <a:shade val="78000"/>
-                <a:lumMod val="99000"/>
-                <a:satMod val="120000"/>
-              </a:schemeClr>
-            </a:gs>
-          </a:gsLst>
-          <a:lin ang="5400000" scaled="0"/>
-        </a:gradFill>
-      </a:fillStyleLst>
-      <a:lnStyleLst>
-        <a:ln w="12700">
-          <a:solidFill>
-            <a:schemeClr val="phClr"/>
-          </a:solidFill>
-          <a:prstDash val="solid"/>
-        </a:ln>
-        <a:ln w="19050">
-          <a:solidFill>
-            <a:schemeClr val="phClr"/>
-          </a:solidFill>
-          <a:prstDash val="solid"/>
-        </a:ln>
-        <a:ln w="25400">
-          <a:solidFill>
-            <a:schemeClr val="phClr"/>
-          </a:solidFill>
-          <a:prstDash val="solid"/>
-        </a:ln>
-      </a:lnStyleLst>
-      <a:effectStyleLst>
-        <a:effectStyle>
-          <a:effectLst/>
-        </a:effectStyle>
-        <a:effectStyle>
-          <a:effectLst/>
-        </a:effectStyle>
-        <a:effectStyle>
-          <a:effectLst>
-            <a:outerShdw blurRad="57150" dist="19050" dir="5400000">
-              <a:srgbClr val="000000">
-                <a:alpha val="16000"/>
-              </a:srgbClr>
-            </a:outerShdw>
-          </a:effectLst>
-        </a:effectStyle>
-        <a:effectStyle>
-          <a:effectLst>
-            <a:outerShdw blurRad="19050" dist="9525" dir="5400000">
-              <a:srgbClr val="000000">
-                <a:alpha val="6000"/>
-              </a:srgbClr>
-            </a:outerShdw>
-          </a:effectLst>
-        </a:effectStyle>
-        <a:effectStyle>
-          <a:effectLst>
-            <a:outerShdw blurRad="28575" dist="9525" dir="5400000">
-              <a:srgbClr val="000000">
-                <a:alpha val="8000"/>
-              </a:srgbClr>
-            </a:outerShdw>
-          </a:effectLst>
-        </a:effectStyle>
-        <a:effectStyle>
-          <a:effectLst>
-            <a:outerShdw blurRad="57150" dist="19050" dir="5400000">
-              <a:srgbClr val="000000">
-                <a:alpha val="10000"/>
-              </a:srgbClr>
-            </a:outerShdw>
-          </a:effectLst>
-        </a:effectStyle>
-        <a:effectStyle>
-          <a:effectLst>
-            <a:outerShdw blurRad="114300" dist="38100" dir="5400000">
-              <a:srgbClr val="000000">
-                <a:alpha val="12000"/>
-              </a:srgbClr>
-            </a:outerShdw>
-          </a:effectLst>
-        </a:effectStyle>
-        <a:effectStyle>
-          <a:effectLst>
-            <a:outerShdw blurRad="171450" dist="57150" dir="5400000">
-              <a:srgbClr val="000000">
-                <a:alpha val="16000"/>
-              </a:srgbClr>
-            </a:outerShdw>
-          </a:effectLst>
-        </a:effectStyle>
-        <a:effectStyle>
-          <a:effectLst>
-            <a:outerShdw blurRad="266700" dist="95250" dir="5400000">
-              <a:srgbClr val="000000">
-                <a:alpha val="24000"/>
-              </a:srgbClr>
-            </a:outerShdw>
-          </a:effectLst>
-        </a:effectStyle>
-      </a:effectStyleLst>
-      <a:bgFillStyleLst>
-        <a:solidFill>
-          <a:schemeClr val="phClr"/>
-        </a:solidFill>
-        <a:solidFill>
-          <a:schemeClr val="phClr">
-            <a:tint val="95000"/>
-            <a:satMod val="170000"/>
-          </a:schemeClr>
-        </a:solidFill>
-        <a:gradFill>
-          <a:gsLst>
-            <a:gs pos="0">
-              <a:schemeClr val="phClr">
-                <a:tint val="93000"/>
-                <a:shade val="98000"/>
-                <a:lumMod val="102000"/>
-                <a:satMod val="150000"/>
-              </a:schemeClr>
-            </a:gs>
-            <a:gs pos="50000">
-              <a:schemeClr val="phClr">
-                <a:tint val="98000"/>
-                <a:shade val="90000"/>
-                <a:lumMod val="103000"/>
-                <a:satMod val="130000"/>
-              </a:schemeClr>
-            </a:gs>
-            <a:gs pos="100000">
-              <a:schemeClr val="phClr">
-                <a:shade val="63000"/>
-                <a:satMod val="120000"/>
-              </a:schemeClr>
-            </a:gs>
-          </a:gsLst>
-          <a:lin ang="5400000" scaled="0"/>
-        </a:gradFill>
-      </a:bgFillStyleLst>
-    </a:fmtScheme>
-  </a:themeElements>
-  <a:objectDefaults/>
-  <a:extraClrSchemeLst/>
 </a:theme>
 </file>